--- a/docs/pptx/auc3/jx-auc3-linsubhr-sens-grade3.pptx
+++ b/docs/pptx/auc3/jx-auc3-linsubhr-sens-grade3.pptx
@@ -5279,7 +5279,7 @@
           <p:spPr>
             <a:xfrm>
               <a:off x="817517" y="1896563"/>
-              <a:ext cx="6236116" cy="82021"/>
+              <a:ext cx="6899879" cy="82021"/>
             </a:xfrm>
             <a:prstGeom prst="rect">
               <a:avLst/>
@@ -5311,7 +5311,7 @@
                   <a:latin typeface="Helvetica"/>
                   <a:cs typeface="Helvetica"/>
                 </a:rPr>
-                <a:t>subHR per 0.1 ratio decline: 1.42 (1.19-1.69), p = &lt;0.001  |  per IQR decline (Δ = 0.28): 2.66 (1.62-4.36)  |  IQR: [0.70, 0.98]</a:t>
+                <a:t>subHR per 0.1 ratio decline: 1.42 (1.19-1.69), p_Bonf = &lt;0.001 (n = 6)  |  per IQR decline (Δ = 0.28): 2.66 (1.62-4.36)  |  IQR: [0.70, 0.98]</a:t>
               </a:r>
             </a:p>
           </p:txBody>

--- a/docs/pptx/auc3/jx-auc3-linsubhr-sens-grade3.pptx
+++ b/docs/pptx/auc3/jx-auc3-linsubhr-sens-grade3.pptx
@@ -5002,8 +5002,8 @@
           </p:nvSpPr>
           <p:spPr>
             <a:xfrm>
-              <a:off x="2137719" y="5785772"/>
-              <a:ext cx="155356" cy="80101"/>
+              <a:off x="2134610" y="5785772"/>
+              <a:ext cx="161574" cy="80101"/>
             </a:xfrm>
             <a:prstGeom prst="rect">
               <a:avLst/>
@@ -5035,7 +5035,7 @@
                   <a:latin typeface="Helvetica"/>
                   <a:cs typeface="Helvetica"/>
                 </a:rPr>
-                <a:t>0.6</a:t>
+                <a:t>-40</a:t>
               </a:r>
             </a:p>
           </p:txBody>
@@ -5048,8 +5048,8 @@
           </p:nvSpPr>
           <p:spPr>
             <a:xfrm>
-              <a:off x="3878840" y="5785772"/>
-              <a:ext cx="155356" cy="80101"/>
+              <a:off x="3875731" y="5785772"/>
+              <a:ext cx="161574" cy="80101"/>
             </a:xfrm>
             <a:prstGeom prst="rect">
               <a:avLst/>
@@ -5081,7 +5081,7 @@
                   <a:latin typeface="Helvetica"/>
                   <a:cs typeface="Helvetica"/>
                 </a:rPr>
-                <a:t>0.8</a:t>
+                <a:t>-20</a:t>
               </a:r>
             </a:p>
           </p:txBody>
@@ -5094,8 +5094,8 @@
           </p:nvSpPr>
           <p:spPr>
             <a:xfrm>
-              <a:off x="5619961" y="5785772"/>
-              <a:ext cx="155356" cy="80101"/>
+              <a:off x="5666549" y="5785772"/>
+              <a:ext cx="62179" cy="80101"/>
             </a:xfrm>
             <a:prstGeom prst="rect">
               <a:avLst/>
@@ -5127,7 +5127,7 @@
                   <a:latin typeface="Helvetica"/>
                   <a:cs typeface="Helvetica"/>
                 </a:rPr>
-                <a:t>1.0</a:t>
+                <a:t>0</a:t>
               </a:r>
             </a:p>
           </p:txBody>
@@ -5140,8 +5140,8 @@
           </p:nvSpPr>
           <p:spPr>
             <a:xfrm>
-              <a:off x="7361081" y="5785772"/>
-              <a:ext cx="155356" cy="80101"/>
+              <a:off x="7376580" y="5785772"/>
+              <a:ext cx="124358" cy="80101"/>
             </a:xfrm>
             <a:prstGeom prst="rect">
               <a:avLst/>
@@ -5173,7 +5173,7 @@
                   <a:latin typeface="Helvetica"/>
                   <a:cs typeface="Helvetica"/>
                 </a:rPr>
-                <a:t>1.2</a:t>
+                <a:t>20</a:t>
               </a:r>
             </a:p>
           </p:txBody>
@@ -5186,8 +5186,8 @@
           </p:nvSpPr>
           <p:spPr>
             <a:xfrm>
-              <a:off x="2691419" y="5925448"/>
-              <a:ext cx="4051889" cy="100218"/>
+              <a:off x="1561815" y="5925448"/>
+              <a:ext cx="6311097" cy="100218"/>
             </a:xfrm>
             <a:prstGeom prst="rect">
               <a:avLst/>
@@ -5219,7 +5219,7 @@
                   <a:latin typeface="Helvetica"/>
                   <a:cs typeface="Helvetica"/>
                 </a:rPr>
-                <a:t>Sensitivity eGFR Ratio (CKD-EPI 2012 CysC / CKD-EPI 2021 Cr)</a:t>
+                <a:t>Sensitivity eGFR Difference (%): 100 × (CKD-EPI 2012 CysC − CKD-EPI 2021 Cr) / CKD-EPI 2021 Cr</a:t>
               </a:r>
             </a:p>
           </p:txBody>
@@ -5279,7 +5279,7 @@
           <p:spPr>
             <a:xfrm>
               <a:off x="817517" y="1896563"/>
-              <a:ext cx="6899879" cy="82021"/>
+              <a:ext cx="7026615" cy="82021"/>
             </a:xfrm>
             <a:prstGeom prst="rect">
               <a:avLst/>
@@ -5311,7 +5311,7 @@
                   <a:latin typeface="Helvetica"/>
                   <a:cs typeface="Helvetica"/>
                 </a:rPr>
-                <a:t>subHR per 0.1 ratio decline: 1.42 (1.19-1.69), p_Bonf = &lt;0.001 (n = 6)  |  per IQR decline (Δ = 0.28): 2.66 (1.62-4.36)  |  IQR: [0.70, 0.98]</a:t>
+                <a:t>subHR per 10 % decline: 1.42 (1.19-1.69), p_Bonf = &lt;0.001 (n = 6)  |  per IQR decline (Δ = 28.1 %): 2.66 (1.62-4.36)  |  IQR: [-30.1, -2.1] %</a:t>
               </a:r>
             </a:p>
           </p:txBody>

--- a/docs/pptx/auc3/jx-auc3-linsubhr-sens-grade3.pptx
+++ b/docs/pptx/auc3/jx-auc3-linsubhr-sens-grade3.pptx
@@ -2265,34 +2265,26 @@
         </p:sp>
         <p:sp>
           <p:nvSpPr>
-            <p:cNvPr id="4" name="pl4"/>
+            <p:cNvPr id="4" name="rc4"/>
             <p:cNvSpPr/>
             <p:nvPr/>
           </p:nvSpPr>
           <p:spPr>
             <a:xfrm>
-              <a:off x="817517" y="5142518"/>
-              <a:ext cx="7799693" cy="0"/>
+              <a:off x="457200" y="1600200"/>
+              <a:ext cx="8229600" cy="4525962"/>
             </a:xfrm>
-            <a:custGeom>
+            <a:prstGeom prst="rect">
               <a:avLst/>
-              <a:pathLst>
-                <a:path w="7799693" h="0">
-                  <a:moveTo>
-                    <a:pt x="0" y="0"/>
-                  </a:moveTo>
-                  <a:lnTo>
-                    <a:pt x="7799693" y="0"/>
-                  </a:lnTo>
-                  <a:lnTo>
-                    <a:pt x="7799693" y="0"/>
-                  </a:lnTo>
-                </a:path>
-              </a:pathLst>
-            </a:custGeom>
-            <a:ln w="6775" cap="flat">
+            </a:prstGeom>
+            <a:solidFill>
+              <a:srgbClr val="FFFFFF">
+                <a:alpha val="100000"/>
+              </a:srgbClr>
+            </a:solidFill>
+            <a:ln w="13550" cap="rnd">
               <a:solidFill>
-                <a:srgbClr val="EBEBEB">
+                <a:srgbClr val="FFFFFF">
                   <a:alpha val="100000"/>
                 </a:srgbClr>
               </a:solidFill>
@@ -2314,21 +2306,21 @@
           </p:nvSpPr>
           <p:spPr>
             <a:xfrm>
-              <a:off x="817517" y="4313054"/>
-              <a:ext cx="7799693" cy="0"/>
+              <a:off x="887106" y="3250627"/>
+              <a:ext cx="7660515" cy="0"/>
             </a:xfrm>
             <a:custGeom>
               <a:avLst/>
               <a:pathLst>
-                <a:path w="7799693" h="0">
+                <a:path w="7660515" h="0">
                   <a:moveTo>
                     <a:pt x="0" y="0"/>
                   </a:moveTo>
                   <a:lnTo>
-                    <a:pt x="7799693" y="0"/>
-                  </a:lnTo>
-                  <a:lnTo>
-                    <a:pt x="7799693" y="0"/>
+                    <a:pt x="7660515" y="0"/>
+                  </a:lnTo>
+                  <a:lnTo>
+                    <a:pt x="7660515" y="0"/>
                   </a:lnTo>
                 </a:path>
               </a:pathLst>
@@ -2357,21 +2349,21 @@
           </p:nvSpPr>
           <p:spPr>
             <a:xfrm>
-              <a:off x="817517" y="3483591"/>
-              <a:ext cx="7799693" cy="0"/>
+              <a:off x="887106" y="2951293"/>
+              <a:ext cx="7660515" cy="0"/>
             </a:xfrm>
             <a:custGeom>
               <a:avLst/>
               <a:pathLst>
-                <a:path w="7799693" h="0">
+                <a:path w="7660515" h="0">
                   <a:moveTo>
                     <a:pt x="0" y="0"/>
                   </a:moveTo>
                   <a:lnTo>
-                    <a:pt x="7799693" y="0"/>
-                  </a:lnTo>
-                  <a:lnTo>
-                    <a:pt x="7799693" y="0"/>
+                    <a:pt x="7660515" y="0"/>
+                  </a:lnTo>
+                  <a:lnTo>
+                    <a:pt x="7660515" y="0"/>
                   </a:lnTo>
                 </a:path>
               </a:pathLst>
@@ -2400,21 +2392,21 @@
           </p:nvSpPr>
           <p:spPr>
             <a:xfrm>
-              <a:off x="817517" y="2654127"/>
-              <a:ext cx="7799693" cy="0"/>
+              <a:off x="887106" y="2651959"/>
+              <a:ext cx="7660515" cy="0"/>
             </a:xfrm>
             <a:custGeom>
               <a:avLst/>
               <a:pathLst>
-                <a:path w="7799693" h="0">
+                <a:path w="7660515" h="0">
                   <a:moveTo>
                     <a:pt x="0" y="0"/>
                   </a:moveTo>
                   <a:lnTo>
-                    <a:pt x="7799693" y="0"/>
-                  </a:lnTo>
-                  <a:lnTo>
-                    <a:pt x="7799693" y="0"/>
+                    <a:pt x="7660515" y="0"/>
+                  </a:lnTo>
+                  <a:lnTo>
+                    <a:pt x="7660515" y="0"/>
                   </a:lnTo>
                 </a:path>
               </a:pathLst>
@@ -2443,21 +2435,21 @@
           </p:nvSpPr>
           <p:spPr>
             <a:xfrm>
-              <a:off x="1344837" y="2073503"/>
-              <a:ext cx="0" cy="3649639"/>
+              <a:off x="887106" y="2352625"/>
+              <a:ext cx="7660515" cy="0"/>
             </a:xfrm>
             <a:custGeom>
               <a:avLst/>
               <a:pathLst>
-                <a:path w="0" h="3649639">
+                <a:path w="7660515" h="0">
                   <a:moveTo>
-                    <a:pt x="0" y="3649639"/>
+                    <a:pt x="0" y="0"/>
                   </a:moveTo>
                   <a:lnTo>
-                    <a:pt x="0" y="0"/>
-                  </a:lnTo>
-                  <a:lnTo>
-                    <a:pt x="0" y="0"/>
+                    <a:pt x="7660515" y="0"/>
+                  </a:lnTo>
+                  <a:lnTo>
+                    <a:pt x="7660515" y="0"/>
                   </a:lnTo>
                 </a:path>
               </a:pathLst>
@@ -2486,15 +2478,15 @@
           </p:nvSpPr>
           <p:spPr>
             <a:xfrm>
-              <a:off x="3085958" y="2073503"/>
-              <a:ext cx="0" cy="3649639"/>
+              <a:off x="1405017" y="2143092"/>
+              <a:ext cx="0" cy="1317069"/>
             </a:xfrm>
             <a:custGeom>
               <a:avLst/>
               <a:pathLst>
-                <a:path w="0" h="3649639">
+                <a:path w="0" h="1317069">
                   <a:moveTo>
-                    <a:pt x="0" y="3649639"/>
+                    <a:pt x="0" y="1317069"/>
                   </a:moveTo>
                   <a:lnTo>
                     <a:pt x="0" y="0"/>
@@ -2529,15 +2521,15 @@
           </p:nvSpPr>
           <p:spPr>
             <a:xfrm>
-              <a:off x="4827079" y="2073503"/>
-              <a:ext cx="0" cy="3649639"/>
+              <a:off x="3115069" y="2143092"/>
+              <a:ext cx="0" cy="1317069"/>
             </a:xfrm>
             <a:custGeom>
               <a:avLst/>
               <a:pathLst>
-                <a:path w="0" h="3649639">
+                <a:path w="0" h="1317069">
                   <a:moveTo>
-                    <a:pt x="0" y="3649639"/>
+                    <a:pt x="0" y="1317069"/>
                   </a:moveTo>
                   <a:lnTo>
                     <a:pt x="0" y="0"/>
@@ -2572,15 +2564,15 @@
           </p:nvSpPr>
           <p:spPr>
             <a:xfrm>
-              <a:off x="6568199" y="2073503"/>
-              <a:ext cx="0" cy="3649639"/>
+              <a:off x="4825121" y="2143092"/>
+              <a:ext cx="0" cy="1317069"/>
             </a:xfrm>
             <a:custGeom>
               <a:avLst/>
               <a:pathLst>
-                <a:path w="0" h="3649639">
+                <a:path w="0" h="1317069">
                   <a:moveTo>
-                    <a:pt x="0" y="3649639"/>
+                    <a:pt x="0" y="1317069"/>
                   </a:moveTo>
                   <a:lnTo>
                     <a:pt x="0" y="0"/>
@@ -2615,15 +2607,15 @@
           </p:nvSpPr>
           <p:spPr>
             <a:xfrm>
-              <a:off x="8309320" y="2073503"/>
-              <a:ext cx="0" cy="3649639"/>
+              <a:off x="6535173" y="2143092"/>
+              <a:ext cx="0" cy="1317069"/>
             </a:xfrm>
             <a:custGeom>
               <a:avLst/>
               <a:pathLst>
-                <a:path w="0" h="3649639">
+                <a:path w="0" h="1317069">
                   <a:moveTo>
-                    <a:pt x="0" y="3649639"/>
+                    <a:pt x="0" y="1317069"/>
                   </a:moveTo>
                   <a:lnTo>
                     <a:pt x="0" y="0"/>
@@ -2658,26 +2650,26 @@
           </p:nvSpPr>
           <p:spPr>
             <a:xfrm>
-              <a:off x="817517" y="5557249"/>
-              <a:ext cx="7799693" cy="0"/>
+              <a:off x="8245225" y="2143092"/>
+              <a:ext cx="0" cy="1317069"/>
             </a:xfrm>
             <a:custGeom>
               <a:avLst/>
               <a:pathLst>
-                <a:path w="7799693" h="0">
+                <a:path w="0" h="1317069">
                   <a:moveTo>
+                    <a:pt x="0" y="1317069"/>
+                  </a:moveTo>
+                  <a:lnTo>
                     <a:pt x="0" y="0"/>
-                  </a:moveTo>
-                  <a:lnTo>
-                    <a:pt x="7799693" y="0"/>
-                  </a:lnTo>
-                  <a:lnTo>
-                    <a:pt x="7799693" y="0"/>
+                  </a:lnTo>
+                  <a:lnTo>
+                    <a:pt x="0" y="0"/>
                   </a:lnTo>
                 </a:path>
               </a:pathLst>
             </a:custGeom>
-            <a:ln w="13550" cap="flat">
+            <a:ln w="6775" cap="flat">
               <a:solidFill>
                 <a:srgbClr val="EBEBEB">
                   <a:alpha val="100000"/>
@@ -2701,21 +2693,21 @@
           </p:nvSpPr>
           <p:spPr>
             <a:xfrm>
-              <a:off x="817517" y="4727786"/>
-              <a:ext cx="7799693" cy="0"/>
+              <a:off x="887106" y="3400294"/>
+              <a:ext cx="7660515" cy="0"/>
             </a:xfrm>
             <a:custGeom>
               <a:avLst/>
               <a:pathLst>
-                <a:path w="7799693" h="0">
+                <a:path w="7660515" h="0">
                   <a:moveTo>
                     <a:pt x="0" y="0"/>
                   </a:moveTo>
                   <a:lnTo>
-                    <a:pt x="7799693" y="0"/>
-                  </a:lnTo>
-                  <a:lnTo>
-                    <a:pt x="7799693" y="0"/>
+                    <a:pt x="7660515" y="0"/>
+                  </a:lnTo>
+                  <a:lnTo>
+                    <a:pt x="7660515" y="0"/>
                   </a:lnTo>
                 </a:path>
               </a:pathLst>
@@ -2744,21 +2736,21 @@
           </p:nvSpPr>
           <p:spPr>
             <a:xfrm>
-              <a:off x="817517" y="3898322"/>
-              <a:ext cx="7799693" cy="0"/>
+              <a:off x="887106" y="3100960"/>
+              <a:ext cx="7660515" cy="0"/>
             </a:xfrm>
             <a:custGeom>
               <a:avLst/>
               <a:pathLst>
-                <a:path w="7799693" h="0">
+                <a:path w="7660515" h="0">
                   <a:moveTo>
                     <a:pt x="0" y="0"/>
                   </a:moveTo>
                   <a:lnTo>
-                    <a:pt x="7799693" y="0"/>
-                  </a:lnTo>
-                  <a:lnTo>
-                    <a:pt x="7799693" y="0"/>
+                    <a:pt x="7660515" y="0"/>
+                  </a:lnTo>
+                  <a:lnTo>
+                    <a:pt x="7660515" y="0"/>
                   </a:lnTo>
                 </a:path>
               </a:pathLst>
@@ -2787,21 +2779,21 @@
           </p:nvSpPr>
           <p:spPr>
             <a:xfrm>
-              <a:off x="817517" y="3068859"/>
-              <a:ext cx="7799693" cy="0"/>
+              <a:off x="887106" y="2801626"/>
+              <a:ext cx="7660515" cy="0"/>
             </a:xfrm>
             <a:custGeom>
               <a:avLst/>
               <a:pathLst>
-                <a:path w="7799693" h="0">
+                <a:path w="7660515" h="0">
                   <a:moveTo>
                     <a:pt x="0" y="0"/>
                   </a:moveTo>
                   <a:lnTo>
-                    <a:pt x="7799693" y="0"/>
-                  </a:lnTo>
-                  <a:lnTo>
-                    <a:pt x="7799693" y="0"/>
+                    <a:pt x="7660515" y="0"/>
+                  </a:lnTo>
+                  <a:lnTo>
+                    <a:pt x="7660515" y="0"/>
                   </a:lnTo>
                 </a:path>
               </a:pathLst>
@@ -2830,21 +2822,21 @@
           </p:nvSpPr>
           <p:spPr>
             <a:xfrm>
-              <a:off x="817517" y="2239395"/>
-              <a:ext cx="7799693" cy="0"/>
+              <a:off x="887106" y="2502292"/>
+              <a:ext cx="7660515" cy="0"/>
             </a:xfrm>
             <a:custGeom>
               <a:avLst/>
               <a:pathLst>
-                <a:path w="7799693" h="0">
+                <a:path w="7660515" h="0">
                   <a:moveTo>
                     <a:pt x="0" y="0"/>
                   </a:moveTo>
                   <a:lnTo>
-                    <a:pt x="7799693" y="0"/>
-                  </a:lnTo>
-                  <a:lnTo>
-                    <a:pt x="7799693" y="0"/>
+                    <a:pt x="7660515" y="0"/>
+                  </a:lnTo>
+                  <a:lnTo>
+                    <a:pt x="7660515" y="0"/>
                   </a:lnTo>
                 </a:path>
               </a:pathLst>
@@ -2873,21 +2865,21 @@
           </p:nvSpPr>
           <p:spPr>
             <a:xfrm>
-              <a:off x="2215398" y="2073503"/>
-              <a:ext cx="0" cy="3649639"/>
+              <a:off x="887106" y="2202958"/>
+              <a:ext cx="7660515" cy="0"/>
             </a:xfrm>
             <a:custGeom>
               <a:avLst/>
               <a:pathLst>
-                <a:path w="0" h="3649639">
+                <a:path w="7660515" h="0">
                   <a:moveTo>
-                    <a:pt x="0" y="3649639"/>
+                    <a:pt x="0" y="0"/>
                   </a:moveTo>
                   <a:lnTo>
-                    <a:pt x="0" y="0"/>
-                  </a:lnTo>
-                  <a:lnTo>
-                    <a:pt x="0" y="0"/>
+                    <a:pt x="7660515" y="0"/>
+                  </a:lnTo>
+                  <a:lnTo>
+                    <a:pt x="7660515" y="0"/>
                   </a:lnTo>
                 </a:path>
               </a:pathLst>
@@ -2916,15 +2908,15 @@
           </p:nvSpPr>
           <p:spPr>
             <a:xfrm>
-              <a:off x="3956518" y="2073503"/>
-              <a:ext cx="0" cy="3649639"/>
+              <a:off x="2260043" y="2143092"/>
+              <a:ext cx="0" cy="1317069"/>
             </a:xfrm>
             <a:custGeom>
               <a:avLst/>
               <a:pathLst>
-                <a:path w="0" h="3649639">
+                <a:path w="0" h="1317069">
                   <a:moveTo>
-                    <a:pt x="0" y="3649639"/>
+                    <a:pt x="0" y="1317069"/>
                   </a:moveTo>
                   <a:lnTo>
                     <a:pt x="0" y="0"/>
@@ -2959,15 +2951,15 @@
           </p:nvSpPr>
           <p:spPr>
             <a:xfrm>
-              <a:off x="5697639" y="2073503"/>
-              <a:ext cx="0" cy="3649639"/>
+              <a:off x="3970095" y="2143092"/>
+              <a:ext cx="0" cy="1317069"/>
             </a:xfrm>
             <a:custGeom>
               <a:avLst/>
               <a:pathLst>
-                <a:path w="0" h="3649639">
+                <a:path w="0" h="1317069">
                   <a:moveTo>
-                    <a:pt x="0" y="3649639"/>
+                    <a:pt x="0" y="1317069"/>
                   </a:moveTo>
                   <a:lnTo>
                     <a:pt x="0" y="0"/>
@@ -3002,15 +2994,15 @@
           </p:nvSpPr>
           <p:spPr>
             <a:xfrm>
-              <a:off x="7438760" y="2073503"/>
-              <a:ext cx="0" cy="3649639"/>
+              <a:off x="5680147" y="2143092"/>
+              <a:ext cx="0" cy="1317069"/>
             </a:xfrm>
             <a:custGeom>
               <a:avLst/>
               <a:pathLst>
-                <a:path w="0" h="3649639">
+                <a:path w="0" h="1317069">
                   <a:moveTo>
-                    <a:pt x="0" y="3649639"/>
+                    <a:pt x="0" y="1317069"/>
                   </a:moveTo>
                   <a:lnTo>
                     <a:pt x="0" y="0"/>
@@ -3039,588 +3031,631 @@
         </p:sp>
         <p:sp>
           <p:nvSpPr>
-            <p:cNvPr id="22" name="pg22"/>
+            <p:cNvPr id="22" name="pl22"/>
             <p:cNvSpPr/>
             <p:nvPr/>
           </p:nvSpPr>
           <p:spPr>
             <a:xfrm>
-              <a:off x="1172049" y="2073503"/>
-              <a:ext cx="7090630" cy="3407898"/>
+              <a:off x="7390199" y="2143092"/>
+              <a:ext cx="0" cy="1317069"/>
             </a:xfrm>
             <a:custGeom>
               <a:avLst/>
               <a:pathLst>
-                <a:path w="7090630" h="3407898">
+                <a:path w="0" h="1317069">
                   <a:moveTo>
-                    <a:pt x="739948" y="0"/>
+                    <a:pt x="0" y="1317069"/>
                   </a:moveTo>
                   <a:lnTo>
-                    <a:pt x="787847" y="99812"/>
-                  </a:lnTo>
-                  <a:lnTo>
-                    <a:pt x="859470" y="242755"/>
-                  </a:lnTo>
-                  <a:lnTo>
-                    <a:pt x="931092" y="379659"/>
-                  </a:lnTo>
-                  <a:lnTo>
-                    <a:pt x="1002715" y="510781"/>
-                  </a:lnTo>
-                  <a:lnTo>
-                    <a:pt x="1074337" y="636364"/>
-                  </a:lnTo>
-                  <a:lnTo>
-                    <a:pt x="1145960" y="756642"/>
-                  </a:lnTo>
-                  <a:lnTo>
-                    <a:pt x="1217582" y="871839"/>
-                  </a:lnTo>
-                  <a:lnTo>
-                    <a:pt x="1289205" y="982171"/>
-                  </a:lnTo>
-                  <a:lnTo>
-                    <a:pt x="1360827" y="1087841"/>
-                  </a:lnTo>
-                  <a:lnTo>
-                    <a:pt x="1432450" y="1189048"/>
-                  </a:lnTo>
-                  <a:lnTo>
-                    <a:pt x="1504073" y="1285980"/>
-                  </a:lnTo>
-                  <a:lnTo>
-                    <a:pt x="1575695" y="1378817"/>
-                  </a:lnTo>
-                  <a:lnTo>
-                    <a:pt x="1647318" y="1467733"/>
-                  </a:lnTo>
-                  <a:lnTo>
-                    <a:pt x="1718940" y="1552893"/>
-                  </a:lnTo>
-                  <a:lnTo>
-                    <a:pt x="1790563" y="1634455"/>
-                  </a:lnTo>
-                  <a:lnTo>
-                    <a:pt x="1862185" y="1712572"/>
-                  </a:lnTo>
-                  <a:lnTo>
-                    <a:pt x="1933808" y="1787389"/>
-                  </a:lnTo>
-                  <a:lnTo>
-                    <a:pt x="2005430" y="1859046"/>
-                  </a:lnTo>
-                  <a:lnTo>
-                    <a:pt x="2077053" y="1927676"/>
-                  </a:lnTo>
-                  <a:lnTo>
-                    <a:pt x="2148675" y="1993407"/>
-                  </a:lnTo>
-                  <a:lnTo>
-                    <a:pt x="2220298" y="2056361"/>
-                  </a:lnTo>
-                  <a:lnTo>
-                    <a:pt x="2291920" y="2116657"/>
-                  </a:lnTo>
-                  <a:lnTo>
-                    <a:pt x="2363543" y="2174405"/>
-                  </a:lnTo>
-                  <a:lnTo>
-                    <a:pt x="2435165" y="2229713"/>
-                  </a:lnTo>
-                  <a:lnTo>
-                    <a:pt x="2506788" y="2282686"/>
-                  </a:lnTo>
-                  <a:lnTo>
-                    <a:pt x="2578410" y="2333421"/>
-                  </a:lnTo>
-                  <a:lnTo>
-                    <a:pt x="2650033" y="2382012"/>
-                  </a:lnTo>
-                  <a:lnTo>
-                    <a:pt x="2721655" y="2428551"/>
-                  </a:lnTo>
-                  <a:lnTo>
-                    <a:pt x="2793278" y="2473124"/>
-                  </a:lnTo>
-                  <a:lnTo>
-                    <a:pt x="2864901" y="2515815"/>
-                  </a:lnTo>
-                  <a:lnTo>
-                    <a:pt x="2936523" y="2556702"/>
-                  </a:lnTo>
-                  <a:lnTo>
-                    <a:pt x="3008146" y="2595862"/>
-                  </a:lnTo>
-                  <a:lnTo>
-                    <a:pt x="3079768" y="2633367"/>
-                  </a:lnTo>
-                  <a:lnTo>
-                    <a:pt x="3151391" y="2659223"/>
-                  </a:lnTo>
-                  <a:lnTo>
-                    <a:pt x="3223013" y="2670786"/>
-                  </a:lnTo>
-                  <a:lnTo>
-                    <a:pt x="3294636" y="2682186"/>
-                  </a:lnTo>
-                  <a:lnTo>
-                    <a:pt x="3366258" y="2693427"/>
-                  </a:lnTo>
-                  <a:lnTo>
-                    <a:pt x="3437881" y="2704510"/>
-                  </a:lnTo>
-                  <a:lnTo>
-                    <a:pt x="3509503" y="2715438"/>
-                  </a:lnTo>
-                  <a:lnTo>
-                    <a:pt x="3581126" y="2726212"/>
-                  </a:lnTo>
-                  <a:lnTo>
-                    <a:pt x="3652748" y="2736835"/>
-                  </a:lnTo>
-                  <a:lnTo>
-                    <a:pt x="3724371" y="2747310"/>
-                  </a:lnTo>
-                  <a:lnTo>
-                    <a:pt x="3795993" y="2757637"/>
-                  </a:lnTo>
-                  <a:lnTo>
-                    <a:pt x="3867616" y="2767820"/>
-                  </a:lnTo>
-                  <a:lnTo>
-                    <a:pt x="3939238" y="2777859"/>
-                  </a:lnTo>
-                  <a:lnTo>
-                    <a:pt x="4010861" y="2787758"/>
-                  </a:lnTo>
-                  <a:lnTo>
-                    <a:pt x="4082483" y="2797519"/>
-                  </a:lnTo>
-                  <a:lnTo>
-                    <a:pt x="4154106" y="2807142"/>
-                  </a:lnTo>
-                  <a:lnTo>
-                    <a:pt x="4225729" y="2816630"/>
-                  </a:lnTo>
-                  <a:lnTo>
-                    <a:pt x="4297351" y="2825985"/>
-                  </a:lnTo>
-                  <a:lnTo>
-                    <a:pt x="4368974" y="2835210"/>
-                  </a:lnTo>
-                  <a:lnTo>
-                    <a:pt x="4440596" y="2844304"/>
-                  </a:lnTo>
-                  <a:lnTo>
-                    <a:pt x="4512219" y="2853271"/>
-                  </a:lnTo>
-                  <a:lnTo>
-                    <a:pt x="4583841" y="2862113"/>
-                  </a:lnTo>
-                  <a:lnTo>
-                    <a:pt x="4655464" y="2870830"/>
-                  </a:lnTo>
-                  <a:lnTo>
-                    <a:pt x="4727086" y="2879426"/>
-                  </a:lnTo>
-                  <a:lnTo>
-                    <a:pt x="4798709" y="2887900"/>
-                  </a:lnTo>
-                  <a:lnTo>
-                    <a:pt x="4870331" y="2896256"/>
-                  </a:lnTo>
-                  <a:lnTo>
-                    <a:pt x="4941954" y="2904495"/>
-                  </a:lnTo>
-                  <a:lnTo>
-                    <a:pt x="5013576" y="2912618"/>
-                  </a:lnTo>
-                  <a:lnTo>
-                    <a:pt x="5085199" y="2920627"/>
-                  </a:lnTo>
-                  <a:lnTo>
-                    <a:pt x="5156821" y="2928524"/>
-                  </a:lnTo>
-                  <a:lnTo>
-                    <a:pt x="5228444" y="2936310"/>
-                  </a:lnTo>
-                  <a:lnTo>
-                    <a:pt x="5300066" y="2943987"/>
-                  </a:lnTo>
-                  <a:lnTo>
-                    <a:pt x="5371689" y="2951556"/>
-                  </a:lnTo>
-                  <a:lnTo>
-                    <a:pt x="5443311" y="2959020"/>
-                  </a:lnTo>
-                  <a:lnTo>
-                    <a:pt x="5514934" y="2966378"/>
-                  </a:lnTo>
-                  <a:lnTo>
-                    <a:pt x="5586557" y="2973633"/>
-                  </a:lnTo>
-                  <a:lnTo>
-                    <a:pt x="5658179" y="2980787"/>
-                  </a:lnTo>
-                  <a:lnTo>
-                    <a:pt x="5729802" y="2987840"/>
-                  </a:lnTo>
-                  <a:lnTo>
-                    <a:pt x="5801424" y="2994794"/>
-                  </a:lnTo>
-                  <a:lnTo>
-                    <a:pt x="5873047" y="3001651"/>
-                  </a:lnTo>
-                  <a:lnTo>
-                    <a:pt x="5944669" y="3008412"/>
-                  </a:lnTo>
-                  <a:lnTo>
-                    <a:pt x="6016292" y="3015078"/>
-                  </a:lnTo>
-                  <a:lnTo>
-                    <a:pt x="6087914" y="3021650"/>
-                  </a:lnTo>
-                  <a:lnTo>
-                    <a:pt x="6159537" y="3028130"/>
-                  </a:lnTo>
-                  <a:lnTo>
-                    <a:pt x="6231159" y="3034520"/>
-                  </a:lnTo>
-                  <a:lnTo>
-                    <a:pt x="6302782" y="3040819"/>
-                  </a:lnTo>
-                  <a:lnTo>
-                    <a:pt x="6374404" y="3047031"/>
-                  </a:lnTo>
-                  <a:lnTo>
-                    <a:pt x="6446027" y="3053155"/>
-                  </a:lnTo>
-                  <a:lnTo>
-                    <a:pt x="6517649" y="3059193"/>
-                  </a:lnTo>
-                  <a:lnTo>
-                    <a:pt x="6589272" y="3065147"/>
-                  </a:lnTo>
-                  <a:lnTo>
-                    <a:pt x="6660894" y="3071017"/>
-                  </a:lnTo>
-                  <a:lnTo>
-                    <a:pt x="6732517" y="3076805"/>
-                  </a:lnTo>
-                  <a:lnTo>
-                    <a:pt x="6804139" y="3082512"/>
-                  </a:lnTo>
-                  <a:lnTo>
-                    <a:pt x="6875762" y="3088139"/>
-                  </a:lnTo>
-                  <a:lnTo>
-                    <a:pt x="6947385" y="3093686"/>
-                  </a:lnTo>
-                  <a:lnTo>
-                    <a:pt x="7019007" y="3099156"/>
-                  </a:lnTo>
-                  <a:lnTo>
-                    <a:pt x="7090630" y="3104550"/>
-                  </a:lnTo>
-                  <a:lnTo>
-                    <a:pt x="7090630" y="3407898"/>
-                  </a:lnTo>
-                  <a:lnTo>
-                    <a:pt x="7019007" y="3404553"/>
-                  </a:lnTo>
-                  <a:lnTo>
-                    <a:pt x="6947385" y="3401060"/>
-                  </a:lnTo>
-                  <a:lnTo>
-                    <a:pt x="6875762" y="3397413"/>
-                  </a:lnTo>
-                  <a:lnTo>
-                    <a:pt x="6804139" y="3393605"/>
-                  </a:lnTo>
-                  <a:lnTo>
-                    <a:pt x="6732517" y="3389630"/>
-                  </a:lnTo>
-                  <a:lnTo>
-                    <a:pt x="6660894" y="3385479"/>
-                  </a:lnTo>
-                  <a:lnTo>
-                    <a:pt x="6589272" y="3381145"/>
-                  </a:lnTo>
-                  <a:lnTo>
-                    <a:pt x="6517649" y="3376620"/>
-                  </a:lnTo>
-                  <a:lnTo>
-                    <a:pt x="6446027" y="3371895"/>
-                  </a:lnTo>
-                  <a:lnTo>
-                    <a:pt x="6374404" y="3366962"/>
-                  </a:lnTo>
-                  <a:lnTo>
-                    <a:pt x="6302782" y="3361811"/>
-                  </a:lnTo>
-                  <a:lnTo>
-                    <a:pt x="6231159" y="3356433"/>
-                  </a:lnTo>
-                  <a:lnTo>
-                    <a:pt x="6159537" y="3350818"/>
-                  </a:lnTo>
-                  <a:lnTo>
-                    <a:pt x="6087914" y="3344955"/>
-                  </a:lnTo>
-                  <a:lnTo>
-                    <a:pt x="6016292" y="3338834"/>
-                  </a:lnTo>
-                  <a:lnTo>
-                    <a:pt x="5944669" y="3332442"/>
-                  </a:lnTo>
-                  <a:lnTo>
-                    <a:pt x="5873047" y="3325769"/>
-                  </a:lnTo>
-                  <a:lnTo>
-                    <a:pt x="5801424" y="3318801"/>
-                  </a:lnTo>
-                  <a:lnTo>
-                    <a:pt x="5729802" y="3311527"/>
-                  </a:lnTo>
-                  <a:lnTo>
-                    <a:pt x="5658179" y="3303931"/>
-                  </a:lnTo>
-                  <a:lnTo>
-                    <a:pt x="5586557" y="3296000"/>
-                  </a:lnTo>
-                  <a:lnTo>
-                    <a:pt x="5514934" y="3287720"/>
-                  </a:lnTo>
-                  <a:lnTo>
-                    <a:pt x="5443311" y="3279074"/>
-                  </a:lnTo>
-                  <a:lnTo>
-                    <a:pt x="5371689" y="3270047"/>
-                  </a:lnTo>
-                  <a:lnTo>
-                    <a:pt x="5300066" y="3260622"/>
-                  </a:lnTo>
-                  <a:lnTo>
-                    <a:pt x="5228444" y="3250781"/>
-                  </a:lnTo>
-                  <a:lnTo>
-                    <a:pt x="5156821" y="3240506"/>
-                  </a:lnTo>
-                  <a:lnTo>
-                    <a:pt x="5085199" y="3229778"/>
-                  </a:lnTo>
-                  <a:lnTo>
-                    <a:pt x="5013576" y="3218577"/>
-                  </a:lnTo>
-                  <a:lnTo>
-                    <a:pt x="4941954" y="3206882"/>
-                  </a:lnTo>
-                  <a:lnTo>
-                    <a:pt x="4870331" y="3194671"/>
-                  </a:lnTo>
-                  <a:lnTo>
-                    <a:pt x="4798709" y="3181921"/>
-                  </a:lnTo>
-                  <a:lnTo>
-                    <a:pt x="4727086" y="3168609"/>
-                  </a:lnTo>
-                  <a:lnTo>
-                    <a:pt x="4655464" y="3154710"/>
-                  </a:lnTo>
-                  <a:lnTo>
-                    <a:pt x="4583841" y="3140198"/>
-                  </a:lnTo>
-                  <a:lnTo>
-                    <a:pt x="4512219" y="3125046"/>
-                  </a:lnTo>
-                  <a:lnTo>
-                    <a:pt x="4440596" y="3109226"/>
-                  </a:lnTo>
-                  <a:lnTo>
-                    <a:pt x="4368974" y="3092708"/>
-                  </a:lnTo>
-                  <a:lnTo>
-                    <a:pt x="4297351" y="3075461"/>
-                  </a:lnTo>
-                  <a:lnTo>
-                    <a:pt x="4225729" y="3057454"/>
-                  </a:lnTo>
-                  <a:lnTo>
-                    <a:pt x="4154106" y="3038652"/>
-                  </a:lnTo>
-                  <a:lnTo>
-                    <a:pt x="4082483" y="3019021"/>
-                  </a:lnTo>
-                  <a:lnTo>
-                    <a:pt x="4010861" y="2998525"/>
-                  </a:lnTo>
-                  <a:lnTo>
-                    <a:pt x="3939238" y="2977124"/>
-                  </a:lnTo>
-                  <a:lnTo>
-                    <a:pt x="3867616" y="2954780"/>
-                  </a:lnTo>
-                  <a:lnTo>
-                    <a:pt x="3795993" y="2931450"/>
-                  </a:lnTo>
-                  <a:lnTo>
-                    <a:pt x="3724371" y="2907091"/>
-                  </a:lnTo>
-                  <a:lnTo>
-                    <a:pt x="3652748" y="2881658"/>
-                  </a:lnTo>
-                  <a:lnTo>
-                    <a:pt x="3581126" y="2855103"/>
-                  </a:lnTo>
-                  <a:lnTo>
-                    <a:pt x="3509503" y="2827377"/>
-                  </a:lnTo>
-                  <a:lnTo>
-                    <a:pt x="3437881" y="2798428"/>
-                  </a:lnTo>
-                  <a:lnTo>
-                    <a:pt x="3366258" y="2768202"/>
-                  </a:lnTo>
-                  <a:lnTo>
-                    <a:pt x="3294636" y="2736643"/>
-                  </a:lnTo>
-                  <a:lnTo>
-                    <a:pt x="3223013" y="2703693"/>
-                  </a:lnTo>
-                  <a:lnTo>
-                    <a:pt x="3151391" y="2669289"/>
-                  </a:lnTo>
-                  <a:lnTo>
-                    <a:pt x="3079768" y="2647496"/>
-                  </a:lnTo>
-                  <a:lnTo>
-                    <a:pt x="3008146" y="2635602"/>
-                  </a:lnTo>
-                  <a:lnTo>
-                    <a:pt x="2936523" y="2623539"/>
-                  </a:lnTo>
-                  <a:lnTo>
-                    <a:pt x="2864901" y="2611304"/>
-                  </a:lnTo>
-                  <a:lnTo>
-                    <a:pt x="2793278" y="2598896"/>
-                  </a:lnTo>
-                  <a:lnTo>
-                    <a:pt x="2721655" y="2586311"/>
-                  </a:lnTo>
-                  <a:lnTo>
-                    <a:pt x="2650033" y="2573546"/>
-                  </a:lnTo>
-                  <a:lnTo>
-                    <a:pt x="2578410" y="2560601"/>
-                  </a:lnTo>
-                  <a:lnTo>
-                    <a:pt x="2506788" y="2547471"/>
-                  </a:lnTo>
-                  <a:lnTo>
-                    <a:pt x="2435165" y="2534154"/>
-                  </a:lnTo>
-                  <a:lnTo>
-                    <a:pt x="2363543" y="2520648"/>
-                  </a:lnTo>
-                  <a:lnTo>
-                    <a:pt x="2291920" y="2506950"/>
-                  </a:lnTo>
-                  <a:lnTo>
-                    <a:pt x="2220298" y="2493057"/>
-                  </a:lnTo>
-                  <a:lnTo>
-                    <a:pt x="2148675" y="2478967"/>
-                  </a:lnTo>
-                  <a:lnTo>
-                    <a:pt x="2077053" y="2464676"/>
-                  </a:lnTo>
-                  <a:lnTo>
-                    <a:pt x="2005430" y="2450182"/>
-                  </a:lnTo>
-                  <a:lnTo>
-                    <a:pt x="1933808" y="2435481"/>
-                  </a:lnTo>
-                  <a:lnTo>
-                    <a:pt x="1862185" y="2420572"/>
-                  </a:lnTo>
-                  <a:lnTo>
-                    <a:pt x="1790563" y="2405451"/>
-                  </a:lnTo>
-                  <a:lnTo>
-                    <a:pt x="1718940" y="2390114"/>
-                  </a:lnTo>
-                  <a:lnTo>
-                    <a:pt x="1647318" y="2374559"/>
-                  </a:lnTo>
-                  <a:lnTo>
-                    <a:pt x="1575695" y="2358784"/>
-                  </a:lnTo>
-                  <a:lnTo>
-                    <a:pt x="1504073" y="2342783"/>
-                  </a:lnTo>
-                  <a:lnTo>
-                    <a:pt x="1432450" y="2326555"/>
-                  </a:lnTo>
-                  <a:lnTo>
-                    <a:pt x="1360827" y="2310097"/>
-                  </a:lnTo>
-                  <a:lnTo>
-                    <a:pt x="1289205" y="2293404"/>
-                  </a:lnTo>
-                  <a:lnTo>
-                    <a:pt x="1217582" y="2276474"/>
-                  </a:lnTo>
-                  <a:lnTo>
-                    <a:pt x="1145960" y="2259303"/>
-                  </a:lnTo>
-                  <a:lnTo>
-                    <a:pt x="1074337" y="2241888"/>
-                  </a:lnTo>
-                  <a:lnTo>
-                    <a:pt x="1002715" y="2224225"/>
-                  </a:lnTo>
-                  <a:lnTo>
-                    <a:pt x="931092" y="2206311"/>
-                  </a:lnTo>
-                  <a:lnTo>
-                    <a:pt x="859470" y="2188142"/>
-                  </a:lnTo>
-                  <a:lnTo>
-                    <a:pt x="787847" y="2169715"/>
-                  </a:lnTo>
-                  <a:lnTo>
-                    <a:pt x="716225" y="2151025"/>
-                  </a:lnTo>
-                  <a:lnTo>
-                    <a:pt x="644602" y="2132070"/>
-                  </a:lnTo>
-                  <a:lnTo>
-                    <a:pt x="572980" y="2112845"/>
-                  </a:lnTo>
-                  <a:lnTo>
-                    <a:pt x="501357" y="2093347"/>
-                  </a:lnTo>
-                  <a:lnTo>
-                    <a:pt x="429735" y="2073572"/>
-                  </a:lnTo>
-                  <a:lnTo>
-                    <a:pt x="358112" y="2053515"/>
-                  </a:lnTo>
-                  <a:lnTo>
-                    <a:pt x="286490" y="2033173"/>
-                  </a:lnTo>
-                  <a:lnTo>
-                    <a:pt x="214867" y="2012541"/>
-                  </a:lnTo>
-                  <a:lnTo>
-                    <a:pt x="143245" y="1991616"/>
-                  </a:lnTo>
-                  <a:lnTo>
-                    <a:pt x="71622" y="1970394"/>
-                  </a:lnTo>
-                  <a:lnTo>
-                    <a:pt x="0" y="1948870"/>
+                    <a:pt x="0" y="0"/>
+                  </a:lnTo>
+                  <a:lnTo>
+                    <a:pt x="0" y="0"/>
+                  </a:lnTo>
+                </a:path>
+              </a:pathLst>
+            </a:custGeom>
+            <a:ln w="13550" cap="flat">
+              <a:solidFill>
+                <a:srgbClr val="EBEBEB">
+                  <a:alpha val="100000"/>
+                </a:srgbClr>
+              </a:solidFill>
+              <a:prstDash val="solid"/>
+              <a:round/>
+            </a:ln>
+          </p:spPr>
+          <p:txBody>
+            <a:bodyPr/>
+            <a:lstStyle/>
+            <a:p/>
+          </p:txBody>
+        </p:sp>
+        <p:sp>
+          <p:nvSpPr>
+            <p:cNvPr id="23" name="pg23"/>
+            <p:cNvSpPr/>
+            <p:nvPr/>
+          </p:nvSpPr>
+          <p:spPr>
+            <a:xfrm>
+              <a:off x="1235312" y="2143092"/>
+              <a:ext cx="6964104" cy="1229830"/>
+            </a:xfrm>
+            <a:custGeom>
+              <a:avLst/>
+              <a:pathLst>
+                <a:path w="6964104" h="1229830">
+                  <a:moveTo>
+                    <a:pt x="726745" y="0"/>
+                  </a:moveTo>
+                  <a:lnTo>
+                    <a:pt x="773789" y="36019"/>
+                  </a:lnTo>
+                  <a:lnTo>
+                    <a:pt x="844133" y="87604"/>
+                  </a:lnTo>
+                  <a:lnTo>
+                    <a:pt x="914478" y="137010"/>
+                  </a:lnTo>
+                  <a:lnTo>
+                    <a:pt x="984822" y="184329"/>
+                  </a:lnTo>
+                  <a:lnTo>
+                    <a:pt x="1055167" y="229648"/>
+                  </a:lnTo>
+                  <a:lnTo>
+                    <a:pt x="1125511" y="273054"/>
+                  </a:lnTo>
+                  <a:lnTo>
+                    <a:pt x="1195856" y="314626"/>
+                  </a:lnTo>
+                  <a:lnTo>
+                    <a:pt x="1266200" y="354442"/>
+                  </a:lnTo>
+                  <a:lnTo>
+                    <a:pt x="1336545" y="392576"/>
+                  </a:lnTo>
+                  <a:lnTo>
+                    <a:pt x="1406889" y="429099"/>
+                  </a:lnTo>
+                  <a:lnTo>
+                    <a:pt x="1477234" y="464080"/>
+                  </a:lnTo>
+                  <a:lnTo>
+                    <a:pt x="1547578" y="497582"/>
+                  </a:lnTo>
+                  <a:lnTo>
+                    <a:pt x="1617923" y="529670"/>
+                  </a:lnTo>
+                  <a:lnTo>
+                    <a:pt x="1688267" y="560402"/>
+                  </a:lnTo>
+                  <a:lnTo>
+                    <a:pt x="1758612" y="589836"/>
+                  </a:lnTo>
+                  <a:lnTo>
+                    <a:pt x="1828956" y="618027"/>
+                  </a:lnTo>
+                  <a:lnTo>
+                    <a:pt x="1899301" y="645026"/>
+                  </a:lnTo>
+                  <a:lnTo>
+                    <a:pt x="1969645" y="670886"/>
+                  </a:lnTo>
+                  <a:lnTo>
+                    <a:pt x="2039990" y="695653"/>
+                  </a:lnTo>
+                  <a:lnTo>
+                    <a:pt x="2110334" y="719373"/>
+                  </a:lnTo>
+                  <a:lnTo>
+                    <a:pt x="2180679" y="742092"/>
+                  </a:lnTo>
+                  <a:lnTo>
+                    <a:pt x="2251023" y="763851"/>
+                  </a:lnTo>
+                  <a:lnTo>
+                    <a:pt x="2321368" y="784691"/>
+                  </a:lnTo>
+                  <a:lnTo>
+                    <a:pt x="2391712" y="804651"/>
+                  </a:lnTo>
+                  <a:lnTo>
+                    <a:pt x="2462057" y="823767"/>
+                  </a:lnTo>
+                  <a:lnTo>
+                    <a:pt x="2532401" y="842076"/>
+                  </a:lnTo>
+                  <a:lnTo>
+                    <a:pt x="2602746" y="859612"/>
+                  </a:lnTo>
+                  <a:lnTo>
+                    <a:pt x="2673090" y="876407"/>
+                  </a:lnTo>
+                  <a:lnTo>
+                    <a:pt x="2743435" y="892492"/>
+                  </a:lnTo>
+                  <a:lnTo>
+                    <a:pt x="2813779" y="907898"/>
+                  </a:lnTo>
+                  <a:lnTo>
+                    <a:pt x="2884124" y="922653"/>
+                  </a:lnTo>
+                  <a:lnTo>
+                    <a:pt x="2954468" y="936785"/>
+                  </a:lnTo>
+                  <a:lnTo>
+                    <a:pt x="3024813" y="950320"/>
+                  </a:lnTo>
+                  <a:lnTo>
+                    <a:pt x="3095157" y="959651"/>
+                  </a:lnTo>
+                  <a:lnTo>
+                    <a:pt x="3165502" y="963823"/>
+                  </a:lnTo>
+                  <a:lnTo>
+                    <a:pt x="3235846" y="967938"/>
+                  </a:lnTo>
+                  <a:lnTo>
+                    <a:pt x="3306191" y="971994"/>
+                  </a:lnTo>
+                  <a:lnTo>
+                    <a:pt x="3376535" y="975994"/>
+                  </a:lnTo>
+                  <a:lnTo>
+                    <a:pt x="3446880" y="979937"/>
+                  </a:lnTo>
+                  <a:lnTo>
+                    <a:pt x="3517224" y="983825"/>
+                  </a:lnTo>
+                  <a:lnTo>
+                    <a:pt x="3587569" y="987659"/>
+                  </a:lnTo>
+                  <a:lnTo>
+                    <a:pt x="3657913" y="991439"/>
+                  </a:lnTo>
+                  <a:lnTo>
+                    <a:pt x="3728257" y="995166"/>
+                  </a:lnTo>
+                  <a:lnTo>
+                    <a:pt x="3798602" y="998841"/>
+                  </a:lnTo>
+                  <a:lnTo>
+                    <a:pt x="3868946" y="1002464"/>
+                  </a:lnTo>
+                  <a:lnTo>
+                    <a:pt x="3939291" y="1006036"/>
+                  </a:lnTo>
+                  <a:lnTo>
+                    <a:pt x="4009635" y="1009558"/>
+                  </a:lnTo>
+                  <a:lnTo>
+                    <a:pt x="4079980" y="1013031"/>
+                  </a:lnTo>
+                  <a:lnTo>
+                    <a:pt x="4150324" y="1016455"/>
+                  </a:lnTo>
+                  <a:lnTo>
+                    <a:pt x="4220669" y="1019831"/>
+                  </a:lnTo>
+                  <a:lnTo>
+                    <a:pt x="4291013" y="1023160"/>
+                  </a:lnTo>
+                  <a:lnTo>
+                    <a:pt x="4361358" y="1026442"/>
+                  </a:lnTo>
+                  <a:lnTo>
+                    <a:pt x="4431702" y="1029678"/>
+                  </a:lnTo>
+                  <a:lnTo>
+                    <a:pt x="4502047" y="1032869"/>
+                  </a:lnTo>
+                  <a:lnTo>
+                    <a:pt x="4572391" y="1036015"/>
+                  </a:lnTo>
+                  <a:lnTo>
+                    <a:pt x="4642736" y="1039117"/>
+                  </a:lnTo>
+                  <a:lnTo>
+                    <a:pt x="4713080" y="1042175"/>
+                  </a:lnTo>
+                  <a:lnTo>
+                    <a:pt x="4783425" y="1045190"/>
+                  </a:lnTo>
+                  <a:lnTo>
+                    <a:pt x="4853769" y="1048164"/>
+                  </a:lnTo>
+                  <a:lnTo>
+                    <a:pt x="4924114" y="1051095"/>
+                  </a:lnTo>
+                  <a:lnTo>
+                    <a:pt x="4994458" y="1053985"/>
+                  </a:lnTo>
+                  <a:lnTo>
+                    <a:pt x="5064803" y="1056835"/>
+                  </a:lnTo>
+                  <a:lnTo>
+                    <a:pt x="5135147" y="1059645"/>
+                  </a:lnTo>
+                  <a:lnTo>
+                    <a:pt x="5205492" y="1062415"/>
+                  </a:lnTo>
+                  <a:lnTo>
+                    <a:pt x="5275836" y="1065147"/>
+                  </a:lnTo>
+                  <a:lnTo>
+                    <a:pt x="5346181" y="1067840"/>
+                  </a:lnTo>
+                  <a:lnTo>
+                    <a:pt x="5416525" y="1070496"/>
+                  </a:lnTo>
+                  <a:lnTo>
+                    <a:pt x="5486870" y="1073114"/>
+                  </a:lnTo>
+                  <a:lnTo>
+                    <a:pt x="5557214" y="1075696"/>
+                  </a:lnTo>
+                  <a:lnTo>
+                    <a:pt x="5627559" y="1078241"/>
+                  </a:lnTo>
+                  <a:lnTo>
+                    <a:pt x="5697903" y="1080751"/>
+                  </a:lnTo>
+                  <a:lnTo>
+                    <a:pt x="5768248" y="1083225"/>
+                  </a:lnTo>
+                  <a:lnTo>
+                    <a:pt x="5838592" y="1085665"/>
+                  </a:lnTo>
+                  <a:lnTo>
+                    <a:pt x="5908937" y="1088070"/>
+                  </a:lnTo>
+                  <a:lnTo>
+                    <a:pt x="5979281" y="1090442"/>
+                  </a:lnTo>
+                  <a:lnTo>
+                    <a:pt x="6049626" y="1092781"/>
+                  </a:lnTo>
+                  <a:lnTo>
+                    <a:pt x="6119970" y="1095086"/>
+                  </a:lnTo>
+                  <a:lnTo>
+                    <a:pt x="6190315" y="1097360"/>
+                  </a:lnTo>
+                  <a:lnTo>
+                    <a:pt x="6260659" y="1099601"/>
+                  </a:lnTo>
+                  <a:lnTo>
+                    <a:pt x="6331004" y="1101811"/>
+                  </a:lnTo>
+                  <a:lnTo>
+                    <a:pt x="6401348" y="1103991"/>
+                  </a:lnTo>
+                  <a:lnTo>
+                    <a:pt x="6471693" y="1106139"/>
+                  </a:lnTo>
+                  <a:lnTo>
+                    <a:pt x="6542037" y="1108258"/>
+                  </a:lnTo>
+                  <a:lnTo>
+                    <a:pt x="6612382" y="1110346"/>
+                  </a:lnTo>
+                  <a:lnTo>
+                    <a:pt x="6682726" y="1112406"/>
+                  </a:lnTo>
+                  <a:lnTo>
+                    <a:pt x="6753071" y="1114436"/>
+                  </a:lnTo>
+                  <a:lnTo>
+                    <a:pt x="6823415" y="1116438"/>
+                  </a:lnTo>
+                  <a:lnTo>
+                    <a:pt x="6893760" y="1118412"/>
+                  </a:lnTo>
+                  <a:lnTo>
+                    <a:pt x="6964104" y="1120359"/>
+                  </a:lnTo>
+                  <a:lnTo>
+                    <a:pt x="6964104" y="1229830"/>
+                  </a:lnTo>
+                  <a:lnTo>
+                    <a:pt x="6893760" y="1228623"/>
+                  </a:lnTo>
+                  <a:lnTo>
+                    <a:pt x="6823415" y="1227362"/>
+                  </a:lnTo>
+                  <a:lnTo>
+                    <a:pt x="6753071" y="1226046"/>
+                  </a:lnTo>
+                  <a:lnTo>
+                    <a:pt x="6682726" y="1224672"/>
+                  </a:lnTo>
+                  <a:lnTo>
+                    <a:pt x="6612382" y="1223237"/>
+                  </a:lnTo>
+                  <a:lnTo>
+                    <a:pt x="6542037" y="1221739"/>
+                  </a:lnTo>
+                  <a:lnTo>
+                    <a:pt x="6471693" y="1220175"/>
+                  </a:lnTo>
+                  <a:lnTo>
+                    <a:pt x="6401348" y="1218542"/>
+                  </a:lnTo>
+                  <a:lnTo>
+                    <a:pt x="6331004" y="1216837"/>
+                  </a:lnTo>
+                  <a:lnTo>
+                    <a:pt x="6260659" y="1215057"/>
+                  </a:lnTo>
+                  <a:lnTo>
+                    <a:pt x="6190315" y="1213198"/>
+                  </a:lnTo>
+                  <a:lnTo>
+                    <a:pt x="6119970" y="1211257"/>
+                  </a:lnTo>
+                  <a:lnTo>
+                    <a:pt x="6049626" y="1209231"/>
+                  </a:lnTo>
+                  <a:lnTo>
+                    <a:pt x="5979281" y="1207115"/>
+                  </a:lnTo>
+                  <a:lnTo>
+                    <a:pt x="5908937" y="1204906"/>
+                  </a:lnTo>
+                  <a:lnTo>
+                    <a:pt x="5838592" y="1202600"/>
+                  </a:lnTo>
+                  <a:lnTo>
+                    <a:pt x="5768248" y="1200191"/>
+                  </a:lnTo>
+                  <a:lnTo>
+                    <a:pt x="5697903" y="1197677"/>
+                  </a:lnTo>
+                  <a:lnTo>
+                    <a:pt x="5627559" y="1195052"/>
+                  </a:lnTo>
+                  <a:lnTo>
+                    <a:pt x="5557214" y="1192311"/>
+                  </a:lnTo>
+                  <a:lnTo>
+                    <a:pt x="5486870" y="1189449"/>
+                  </a:lnTo>
+                  <a:lnTo>
+                    <a:pt x="5416525" y="1186460"/>
+                  </a:lnTo>
+                  <a:lnTo>
+                    <a:pt x="5346181" y="1183340"/>
+                  </a:lnTo>
+                  <a:lnTo>
+                    <a:pt x="5275836" y="1180083"/>
+                  </a:lnTo>
+                  <a:lnTo>
+                    <a:pt x="5205492" y="1176681"/>
+                  </a:lnTo>
+                  <a:lnTo>
+                    <a:pt x="5135147" y="1173130"/>
+                  </a:lnTo>
+                  <a:lnTo>
+                    <a:pt x="5064803" y="1169422"/>
+                  </a:lnTo>
+                  <a:lnTo>
+                    <a:pt x="4994458" y="1165551"/>
+                  </a:lnTo>
+                  <a:lnTo>
+                    <a:pt x="4924114" y="1161508"/>
+                  </a:lnTo>
+                  <a:lnTo>
+                    <a:pt x="4853769" y="1157288"/>
+                  </a:lnTo>
+                  <a:lnTo>
+                    <a:pt x="4783425" y="1152881"/>
+                  </a:lnTo>
+                  <a:lnTo>
+                    <a:pt x="4713080" y="1148280"/>
+                  </a:lnTo>
+                  <a:lnTo>
+                    <a:pt x="4642736" y="1143476"/>
+                  </a:lnTo>
+                  <a:lnTo>
+                    <a:pt x="4572391" y="1138460"/>
+                  </a:lnTo>
+                  <a:lnTo>
+                    <a:pt x="4502047" y="1133223"/>
+                  </a:lnTo>
+                  <a:lnTo>
+                    <a:pt x="4431702" y="1127755"/>
+                  </a:lnTo>
+                  <a:lnTo>
+                    <a:pt x="4361358" y="1122046"/>
+                  </a:lnTo>
+                  <a:lnTo>
+                    <a:pt x="4291013" y="1116085"/>
+                  </a:lnTo>
+                  <a:lnTo>
+                    <a:pt x="4220669" y="1109861"/>
+                  </a:lnTo>
+                  <a:lnTo>
+                    <a:pt x="4150324" y="1103363"/>
+                  </a:lnTo>
+                  <a:lnTo>
+                    <a:pt x="4079980" y="1096578"/>
+                  </a:lnTo>
+                  <a:lnTo>
+                    <a:pt x="4009635" y="1089493"/>
+                  </a:lnTo>
+                  <a:lnTo>
+                    <a:pt x="3939291" y="1082097"/>
+                  </a:lnTo>
+                  <a:lnTo>
+                    <a:pt x="3868946" y="1074374"/>
+                  </a:lnTo>
+                  <a:lnTo>
+                    <a:pt x="3798602" y="1066310"/>
+                  </a:lnTo>
+                  <a:lnTo>
+                    <a:pt x="3728257" y="1057891"/>
+                  </a:lnTo>
+                  <a:lnTo>
+                    <a:pt x="3657913" y="1049101"/>
+                  </a:lnTo>
+                  <a:lnTo>
+                    <a:pt x="3587569" y="1039922"/>
+                  </a:lnTo>
+                  <a:lnTo>
+                    <a:pt x="3517224" y="1030339"/>
+                  </a:lnTo>
+                  <a:lnTo>
+                    <a:pt x="3446880" y="1020334"/>
+                  </a:lnTo>
+                  <a:lnTo>
+                    <a:pt x="3376535" y="1009887"/>
+                  </a:lnTo>
+                  <a:lnTo>
+                    <a:pt x="3306191" y="998979"/>
+                  </a:lnTo>
+                  <a:lnTo>
+                    <a:pt x="3235846" y="987590"/>
+                  </a:lnTo>
+                  <a:lnTo>
+                    <a:pt x="3165502" y="975699"/>
+                  </a:lnTo>
+                  <a:lnTo>
+                    <a:pt x="3095157" y="963283"/>
+                  </a:lnTo>
+                  <a:lnTo>
+                    <a:pt x="3024813" y="955419"/>
+                  </a:lnTo>
+                  <a:lnTo>
+                    <a:pt x="2954468" y="951127"/>
+                  </a:lnTo>
+                  <a:lnTo>
+                    <a:pt x="2884124" y="946773"/>
+                  </a:lnTo>
+                  <a:lnTo>
+                    <a:pt x="2813779" y="942358"/>
+                  </a:lnTo>
+                  <a:lnTo>
+                    <a:pt x="2743435" y="937880"/>
+                  </a:lnTo>
+                  <a:lnTo>
+                    <a:pt x="2673090" y="933338"/>
+                  </a:lnTo>
+                  <a:lnTo>
+                    <a:pt x="2602746" y="928732"/>
+                  </a:lnTo>
+                  <a:lnTo>
+                    <a:pt x="2532401" y="924060"/>
+                  </a:lnTo>
+                  <a:lnTo>
+                    <a:pt x="2462057" y="919322"/>
+                  </a:lnTo>
+                  <a:lnTo>
+                    <a:pt x="2391712" y="914516"/>
+                  </a:lnTo>
+                  <a:lnTo>
+                    <a:pt x="2321368" y="909642"/>
+                  </a:lnTo>
+                  <a:lnTo>
+                    <a:pt x="2251023" y="904699"/>
+                  </a:lnTo>
+                  <a:lnTo>
+                    <a:pt x="2180679" y="899685"/>
+                  </a:lnTo>
+                  <a:lnTo>
+                    <a:pt x="2110334" y="894600"/>
+                  </a:lnTo>
+                  <a:lnTo>
+                    <a:pt x="2039990" y="889443"/>
+                  </a:lnTo>
+                  <a:lnTo>
+                    <a:pt x="1969645" y="884213"/>
+                  </a:lnTo>
+                  <a:lnTo>
+                    <a:pt x="1899301" y="878908"/>
+                  </a:lnTo>
+                  <a:lnTo>
+                    <a:pt x="1828956" y="873527"/>
+                  </a:lnTo>
+                  <a:lnTo>
+                    <a:pt x="1758612" y="868070"/>
+                  </a:lnTo>
+                  <a:lnTo>
+                    <a:pt x="1688267" y="862536"/>
+                  </a:lnTo>
+                  <a:lnTo>
+                    <a:pt x="1617923" y="856922"/>
+                  </a:lnTo>
+                  <a:lnTo>
+                    <a:pt x="1547578" y="851229"/>
+                  </a:lnTo>
+                  <a:lnTo>
+                    <a:pt x="1477234" y="845455"/>
+                  </a:lnTo>
+                  <a:lnTo>
+                    <a:pt x="1406889" y="839599"/>
+                  </a:lnTo>
+                  <a:lnTo>
+                    <a:pt x="1336545" y="833659"/>
+                  </a:lnTo>
+                  <a:lnTo>
+                    <a:pt x="1266200" y="827635"/>
+                  </a:lnTo>
+                  <a:lnTo>
+                    <a:pt x="1195856" y="821526"/>
+                  </a:lnTo>
+                  <a:lnTo>
+                    <a:pt x="1125511" y="815329"/>
+                  </a:lnTo>
+                  <a:lnTo>
+                    <a:pt x="1055167" y="809044"/>
+                  </a:lnTo>
+                  <a:lnTo>
+                    <a:pt x="984822" y="802670"/>
+                  </a:lnTo>
+                  <a:lnTo>
+                    <a:pt x="914478" y="796205"/>
+                  </a:lnTo>
+                  <a:lnTo>
+                    <a:pt x="844133" y="789649"/>
+                  </a:lnTo>
+                  <a:lnTo>
+                    <a:pt x="773789" y="782999"/>
+                  </a:lnTo>
+                  <a:lnTo>
+                    <a:pt x="703444" y="776254"/>
+                  </a:lnTo>
+                  <a:lnTo>
+                    <a:pt x="633100" y="769414"/>
+                  </a:lnTo>
+                  <a:lnTo>
+                    <a:pt x="562755" y="762476"/>
+                  </a:lnTo>
+                  <a:lnTo>
+                    <a:pt x="492411" y="755439"/>
+                  </a:lnTo>
+                  <a:lnTo>
+                    <a:pt x="422066" y="748303"/>
+                  </a:lnTo>
+                  <a:lnTo>
+                    <a:pt x="351722" y="741065"/>
+                  </a:lnTo>
+                  <a:lnTo>
+                    <a:pt x="281377" y="733724"/>
+                  </a:lnTo>
+                  <a:lnTo>
+                    <a:pt x="211033" y="726278"/>
+                  </a:lnTo>
+                  <a:lnTo>
+                    <a:pt x="140688" y="718727"/>
+                  </a:lnTo>
+                  <a:lnTo>
+                    <a:pt x="70344" y="711069"/>
+                  </a:lnTo>
+                  <a:lnTo>
+                    <a:pt x="0" y="703301"/>
                   </a:lnTo>
                   <a:close/>
                 </a:path>
@@ -3640,613 +3675,288 @@
         </p:sp>
         <p:sp>
           <p:nvSpPr>
-            <p:cNvPr id="23" name="pl23"/>
-            <p:cNvSpPr/>
-            <p:nvPr/>
-          </p:nvSpPr>
-          <p:spPr>
-            <a:xfrm>
-              <a:off x="1911998" y="2073503"/>
-              <a:ext cx="6350681" cy="3104550"/>
-            </a:xfrm>
-            <a:custGeom>
-              <a:avLst/>
-              <a:pathLst>
-                <a:path w="6350681" h="3104550">
-                  <a:moveTo>
-                    <a:pt x="0" y="0"/>
-                  </a:moveTo>
-                  <a:lnTo>
-                    <a:pt x="47899" y="99812"/>
-                  </a:lnTo>
-                  <a:lnTo>
-                    <a:pt x="119521" y="242755"/>
-                  </a:lnTo>
-                  <a:lnTo>
-                    <a:pt x="191144" y="379659"/>
-                  </a:lnTo>
-                  <a:lnTo>
-                    <a:pt x="262766" y="510781"/>
-                  </a:lnTo>
-                  <a:lnTo>
-                    <a:pt x="334389" y="636364"/>
-                  </a:lnTo>
-                  <a:lnTo>
-                    <a:pt x="406011" y="756642"/>
-                  </a:lnTo>
-                  <a:lnTo>
-                    <a:pt x="477634" y="871839"/>
-                  </a:lnTo>
-                  <a:lnTo>
-                    <a:pt x="549256" y="982171"/>
-                  </a:lnTo>
-                  <a:lnTo>
-                    <a:pt x="620879" y="1087841"/>
-                  </a:lnTo>
-                  <a:lnTo>
-                    <a:pt x="692501" y="1189048"/>
-                  </a:lnTo>
-                  <a:lnTo>
-                    <a:pt x="764124" y="1285980"/>
-                  </a:lnTo>
-                  <a:lnTo>
-                    <a:pt x="835746" y="1378817"/>
-                  </a:lnTo>
-                  <a:lnTo>
-                    <a:pt x="907369" y="1467733"/>
-                  </a:lnTo>
-                  <a:lnTo>
-                    <a:pt x="978991" y="1552893"/>
-                  </a:lnTo>
-                  <a:lnTo>
-                    <a:pt x="1050614" y="1634455"/>
-                  </a:lnTo>
-                  <a:lnTo>
-                    <a:pt x="1122236" y="1712572"/>
-                  </a:lnTo>
-                  <a:lnTo>
-                    <a:pt x="1193859" y="1787389"/>
-                  </a:lnTo>
-                  <a:lnTo>
-                    <a:pt x="1265482" y="1859046"/>
-                  </a:lnTo>
-                  <a:lnTo>
-                    <a:pt x="1337104" y="1927676"/>
-                  </a:lnTo>
-                  <a:lnTo>
-                    <a:pt x="1408727" y="1993407"/>
-                  </a:lnTo>
-                  <a:lnTo>
-                    <a:pt x="1480349" y="2056361"/>
-                  </a:lnTo>
-                  <a:lnTo>
-                    <a:pt x="1551972" y="2116657"/>
-                  </a:lnTo>
-                  <a:lnTo>
-                    <a:pt x="1623594" y="2174405"/>
-                  </a:lnTo>
-                  <a:lnTo>
-                    <a:pt x="1695217" y="2229713"/>
-                  </a:lnTo>
-                  <a:lnTo>
-                    <a:pt x="1766839" y="2282686"/>
-                  </a:lnTo>
-                  <a:lnTo>
-                    <a:pt x="1838462" y="2333421"/>
-                  </a:lnTo>
-                  <a:lnTo>
-                    <a:pt x="1910084" y="2382012"/>
-                  </a:lnTo>
-                  <a:lnTo>
-                    <a:pt x="1981707" y="2428551"/>
-                  </a:lnTo>
-                  <a:lnTo>
-                    <a:pt x="2053329" y="2473124"/>
-                  </a:lnTo>
-                  <a:lnTo>
-                    <a:pt x="2124952" y="2515815"/>
-                  </a:lnTo>
-                  <a:lnTo>
-                    <a:pt x="2196574" y="2556702"/>
-                  </a:lnTo>
-                  <a:lnTo>
-                    <a:pt x="2268197" y="2595862"/>
-                  </a:lnTo>
-                  <a:lnTo>
-                    <a:pt x="2339819" y="2633367"/>
-                  </a:lnTo>
-                  <a:lnTo>
-                    <a:pt x="2411442" y="2659223"/>
-                  </a:lnTo>
-                  <a:lnTo>
-                    <a:pt x="2483064" y="2670786"/>
-                  </a:lnTo>
-                  <a:lnTo>
-                    <a:pt x="2554687" y="2682186"/>
-                  </a:lnTo>
-                  <a:lnTo>
-                    <a:pt x="2626310" y="2693427"/>
-                  </a:lnTo>
-                  <a:lnTo>
-                    <a:pt x="2697932" y="2704510"/>
-                  </a:lnTo>
-                  <a:lnTo>
-                    <a:pt x="2769555" y="2715438"/>
-                  </a:lnTo>
-                  <a:lnTo>
-                    <a:pt x="2841177" y="2726212"/>
-                  </a:lnTo>
-                  <a:lnTo>
-                    <a:pt x="2912800" y="2736835"/>
-                  </a:lnTo>
-                  <a:lnTo>
-                    <a:pt x="2984422" y="2747310"/>
-                  </a:lnTo>
-                  <a:lnTo>
-                    <a:pt x="3056045" y="2757637"/>
-                  </a:lnTo>
-                  <a:lnTo>
-                    <a:pt x="3127667" y="2767820"/>
-                  </a:lnTo>
-                  <a:lnTo>
-                    <a:pt x="3199290" y="2777859"/>
-                  </a:lnTo>
-                  <a:lnTo>
-                    <a:pt x="3270912" y="2787758"/>
-                  </a:lnTo>
-                  <a:lnTo>
-                    <a:pt x="3342535" y="2797519"/>
-                  </a:lnTo>
-                  <a:lnTo>
-                    <a:pt x="3414157" y="2807142"/>
-                  </a:lnTo>
-                  <a:lnTo>
-                    <a:pt x="3485780" y="2816630"/>
-                  </a:lnTo>
-                  <a:lnTo>
-                    <a:pt x="3557402" y="2825985"/>
-                  </a:lnTo>
-                  <a:lnTo>
-                    <a:pt x="3629025" y="2835210"/>
-                  </a:lnTo>
-                  <a:lnTo>
-                    <a:pt x="3700647" y="2844304"/>
-                  </a:lnTo>
-                  <a:lnTo>
-                    <a:pt x="3772270" y="2853271"/>
-                  </a:lnTo>
-                  <a:lnTo>
-                    <a:pt x="3843892" y="2862113"/>
-                  </a:lnTo>
-                  <a:lnTo>
-                    <a:pt x="3915515" y="2870830"/>
-                  </a:lnTo>
-                  <a:lnTo>
-                    <a:pt x="3987138" y="2879426"/>
-                  </a:lnTo>
-                  <a:lnTo>
-                    <a:pt x="4058760" y="2887900"/>
-                  </a:lnTo>
-                  <a:lnTo>
-                    <a:pt x="4130383" y="2896256"/>
-                  </a:lnTo>
-                  <a:lnTo>
-                    <a:pt x="4202005" y="2904495"/>
-                  </a:lnTo>
-                  <a:lnTo>
-                    <a:pt x="4273628" y="2912618"/>
-                  </a:lnTo>
-                  <a:lnTo>
-                    <a:pt x="4345250" y="2920627"/>
-                  </a:lnTo>
-                  <a:lnTo>
-                    <a:pt x="4416873" y="2928524"/>
-                  </a:lnTo>
-                  <a:lnTo>
-                    <a:pt x="4488495" y="2936310"/>
-                  </a:lnTo>
-                  <a:lnTo>
-                    <a:pt x="4560118" y="2943987"/>
-                  </a:lnTo>
-                  <a:lnTo>
-                    <a:pt x="4631740" y="2951556"/>
-                  </a:lnTo>
-                  <a:lnTo>
-                    <a:pt x="4703363" y="2959020"/>
-                  </a:lnTo>
-                  <a:lnTo>
-                    <a:pt x="4774985" y="2966378"/>
-                  </a:lnTo>
-                  <a:lnTo>
-                    <a:pt x="4846608" y="2973633"/>
-                  </a:lnTo>
-                  <a:lnTo>
-                    <a:pt x="4918230" y="2980787"/>
-                  </a:lnTo>
-                  <a:lnTo>
-                    <a:pt x="4989853" y="2987840"/>
-                  </a:lnTo>
-                  <a:lnTo>
-                    <a:pt x="5061475" y="2994794"/>
-                  </a:lnTo>
-                  <a:lnTo>
-                    <a:pt x="5133098" y="3001651"/>
-                  </a:lnTo>
-                  <a:lnTo>
-                    <a:pt x="5204720" y="3008412"/>
-                  </a:lnTo>
-                  <a:lnTo>
-                    <a:pt x="5276343" y="3015078"/>
-                  </a:lnTo>
-                  <a:lnTo>
-                    <a:pt x="5347966" y="3021650"/>
-                  </a:lnTo>
-                  <a:lnTo>
-                    <a:pt x="5419588" y="3028130"/>
-                  </a:lnTo>
-                  <a:lnTo>
-                    <a:pt x="5491211" y="3034520"/>
-                  </a:lnTo>
-                  <a:lnTo>
-                    <a:pt x="5562833" y="3040819"/>
-                  </a:lnTo>
-                  <a:lnTo>
-                    <a:pt x="5634456" y="3047031"/>
-                  </a:lnTo>
-                  <a:lnTo>
-                    <a:pt x="5706078" y="3053155"/>
-                  </a:lnTo>
-                  <a:lnTo>
-                    <a:pt x="5777701" y="3059193"/>
-                  </a:lnTo>
-                  <a:lnTo>
-                    <a:pt x="5849323" y="3065147"/>
-                  </a:lnTo>
-                  <a:lnTo>
-                    <a:pt x="5920946" y="3071017"/>
-                  </a:lnTo>
-                  <a:lnTo>
-                    <a:pt x="5992568" y="3076805"/>
-                  </a:lnTo>
-                  <a:lnTo>
-                    <a:pt x="6064191" y="3082512"/>
-                  </a:lnTo>
-                  <a:lnTo>
-                    <a:pt x="6135813" y="3088139"/>
-                  </a:lnTo>
-                  <a:lnTo>
-                    <a:pt x="6207436" y="3093686"/>
-                  </a:lnTo>
-                  <a:lnTo>
-                    <a:pt x="6279058" y="3099156"/>
-                  </a:lnTo>
-                  <a:lnTo>
-                    <a:pt x="6350681" y="3104550"/>
-                  </a:lnTo>
-                </a:path>
-              </a:pathLst>
-            </a:custGeom>
-          </p:spPr>
-          <p:txBody>
-            <a:bodyPr/>
-            <a:lstStyle/>
-            <a:p/>
-          </p:txBody>
-        </p:sp>
-        <p:sp>
-          <p:nvSpPr>
             <p:cNvPr id="24" name="pl24"/>
             <p:cNvSpPr/>
             <p:nvPr/>
           </p:nvSpPr>
           <p:spPr>
             <a:xfrm>
-              <a:off x="1172049" y="4022373"/>
-              <a:ext cx="7090630" cy="1459028"/>
+              <a:off x="1962057" y="2143092"/>
+              <a:ext cx="6237359" cy="1120359"/>
             </a:xfrm>
             <a:custGeom>
               <a:avLst/>
               <a:pathLst>
-                <a:path w="7090630" h="1459028">
+                <a:path w="6237359" h="1120359">
                   <a:moveTo>
-                    <a:pt x="7090630" y="1459028"/>
+                    <a:pt x="0" y="0"/>
                   </a:moveTo>
                   <a:lnTo>
-                    <a:pt x="7019007" y="1455683"/>
-                  </a:lnTo>
-                  <a:lnTo>
-                    <a:pt x="6947385" y="1452190"/>
-                  </a:lnTo>
-                  <a:lnTo>
-                    <a:pt x="6875762" y="1448543"/>
-                  </a:lnTo>
-                  <a:lnTo>
-                    <a:pt x="6804139" y="1444735"/>
-                  </a:lnTo>
-                  <a:lnTo>
-                    <a:pt x="6732517" y="1440760"/>
-                  </a:lnTo>
-                  <a:lnTo>
-                    <a:pt x="6660894" y="1436609"/>
-                  </a:lnTo>
-                  <a:lnTo>
-                    <a:pt x="6589272" y="1432275"/>
-                  </a:lnTo>
-                  <a:lnTo>
-                    <a:pt x="6517649" y="1427749"/>
-                  </a:lnTo>
-                  <a:lnTo>
-                    <a:pt x="6446027" y="1423025"/>
-                  </a:lnTo>
-                  <a:lnTo>
-                    <a:pt x="6374404" y="1418091"/>
-                  </a:lnTo>
-                  <a:lnTo>
-                    <a:pt x="6302782" y="1412941"/>
-                  </a:lnTo>
-                  <a:lnTo>
-                    <a:pt x="6231159" y="1407563"/>
-                  </a:lnTo>
-                  <a:lnTo>
-                    <a:pt x="6159537" y="1401948"/>
-                  </a:lnTo>
-                  <a:lnTo>
-                    <a:pt x="6087914" y="1396085"/>
-                  </a:lnTo>
-                  <a:lnTo>
-                    <a:pt x="6016292" y="1389963"/>
-                  </a:lnTo>
-                  <a:lnTo>
-                    <a:pt x="5944669" y="1383572"/>
-                  </a:lnTo>
-                  <a:lnTo>
-                    <a:pt x="5873047" y="1376899"/>
-                  </a:lnTo>
-                  <a:lnTo>
-                    <a:pt x="5801424" y="1369931"/>
-                  </a:lnTo>
-                  <a:lnTo>
-                    <a:pt x="5729802" y="1362656"/>
-                  </a:lnTo>
-                  <a:lnTo>
-                    <a:pt x="5658179" y="1355061"/>
-                  </a:lnTo>
-                  <a:lnTo>
-                    <a:pt x="5586557" y="1347130"/>
-                  </a:lnTo>
-                  <a:lnTo>
-                    <a:pt x="5514934" y="1338850"/>
-                  </a:lnTo>
-                  <a:lnTo>
-                    <a:pt x="5443311" y="1330204"/>
-                  </a:lnTo>
-                  <a:lnTo>
-                    <a:pt x="5371689" y="1321177"/>
-                  </a:lnTo>
-                  <a:lnTo>
-                    <a:pt x="5300066" y="1311752"/>
-                  </a:lnTo>
-                  <a:lnTo>
-                    <a:pt x="5228444" y="1301911"/>
-                  </a:lnTo>
-                  <a:lnTo>
-                    <a:pt x="5156821" y="1291636"/>
-                  </a:lnTo>
-                  <a:lnTo>
-                    <a:pt x="5085199" y="1280908"/>
-                  </a:lnTo>
-                  <a:lnTo>
-                    <a:pt x="5013576" y="1269707"/>
-                  </a:lnTo>
-                  <a:lnTo>
-                    <a:pt x="4941954" y="1258012"/>
-                  </a:lnTo>
-                  <a:lnTo>
-                    <a:pt x="4870331" y="1245801"/>
-                  </a:lnTo>
-                  <a:lnTo>
-                    <a:pt x="4798709" y="1233051"/>
-                  </a:lnTo>
-                  <a:lnTo>
-                    <a:pt x="4727086" y="1219739"/>
-                  </a:lnTo>
-                  <a:lnTo>
-                    <a:pt x="4655464" y="1205840"/>
-                  </a:lnTo>
-                  <a:lnTo>
-                    <a:pt x="4583841" y="1191328"/>
-                  </a:lnTo>
-                  <a:lnTo>
-                    <a:pt x="4512219" y="1176176"/>
-                  </a:lnTo>
-                  <a:lnTo>
-                    <a:pt x="4440596" y="1160356"/>
-                  </a:lnTo>
-                  <a:lnTo>
-                    <a:pt x="4368974" y="1143837"/>
-                  </a:lnTo>
-                  <a:lnTo>
-                    <a:pt x="4297351" y="1126591"/>
-                  </a:lnTo>
-                  <a:lnTo>
-                    <a:pt x="4225729" y="1108584"/>
-                  </a:lnTo>
-                  <a:lnTo>
-                    <a:pt x="4154106" y="1089782"/>
-                  </a:lnTo>
-                  <a:lnTo>
-                    <a:pt x="4082483" y="1070151"/>
-                  </a:lnTo>
-                  <a:lnTo>
-                    <a:pt x="4010861" y="1049655"/>
-                  </a:lnTo>
-                  <a:lnTo>
-                    <a:pt x="3939238" y="1028254"/>
-                  </a:lnTo>
-                  <a:lnTo>
-                    <a:pt x="3867616" y="1005910"/>
-                  </a:lnTo>
-                  <a:lnTo>
-                    <a:pt x="3795993" y="982580"/>
-                  </a:lnTo>
-                  <a:lnTo>
-                    <a:pt x="3724371" y="958221"/>
-                  </a:lnTo>
-                  <a:lnTo>
-                    <a:pt x="3652748" y="932788"/>
-                  </a:lnTo>
-                  <a:lnTo>
-                    <a:pt x="3581126" y="906233"/>
-                  </a:lnTo>
-                  <a:lnTo>
-                    <a:pt x="3509503" y="878507"/>
-                  </a:lnTo>
-                  <a:lnTo>
-                    <a:pt x="3437881" y="849558"/>
-                  </a:lnTo>
-                  <a:lnTo>
-                    <a:pt x="3366258" y="819332"/>
-                  </a:lnTo>
-                  <a:lnTo>
-                    <a:pt x="3294636" y="787773"/>
-                  </a:lnTo>
-                  <a:lnTo>
-                    <a:pt x="3223013" y="754823"/>
-                  </a:lnTo>
-                  <a:lnTo>
-                    <a:pt x="3151391" y="720418"/>
-                  </a:lnTo>
-                  <a:lnTo>
-                    <a:pt x="3079768" y="698626"/>
-                  </a:lnTo>
-                  <a:lnTo>
-                    <a:pt x="3008146" y="686732"/>
-                  </a:lnTo>
-                  <a:lnTo>
-                    <a:pt x="2936523" y="674669"/>
-                  </a:lnTo>
-                  <a:lnTo>
-                    <a:pt x="2864901" y="662434"/>
-                  </a:lnTo>
-                  <a:lnTo>
-                    <a:pt x="2793278" y="650026"/>
-                  </a:lnTo>
-                  <a:lnTo>
-                    <a:pt x="2721655" y="637440"/>
-                  </a:lnTo>
-                  <a:lnTo>
-                    <a:pt x="2650033" y="624676"/>
-                  </a:lnTo>
-                  <a:lnTo>
-                    <a:pt x="2578410" y="611731"/>
-                  </a:lnTo>
-                  <a:lnTo>
-                    <a:pt x="2506788" y="598601"/>
-                  </a:lnTo>
-                  <a:lnTo>
-                    <a:pt x="2435165" y="585284"/>
-                  </a:lnTo>
-                  <a:lnTo>
-                    <a:pt x="2363543" y="571778"/>
-                  </a:lnTo>
-                  <a:lnTo>
-                    <a:pt x="2291920" y="558080"/>
-                  </a:lnTo>
-                  <a:lnTo>
-                    <a:pt x="2220298" y="544187"/>
-                  </a:lnTo>
-                  <a:lnTo>
-                    <a:pt x="2148675" y="530097"/>
-                  </a:lnTo>
-                  <a:lnTo>
-                    <a:pt x="2077053" y="515806"/>
-                  </a:lnTo>
-                  <a:lnTo>
-                    <a:pt x="2005430" y="501312"/>
-                  </a:lnTo>
-                  <a:lnTo>
-                    <a:pt x="1933808" y="486611"/>
-                  </a:lnTo>
-                  <a:lnTo>
-                    <a:pt x="1862185" y="471702"/>
-                  </a:lnTo>
-                  <a:lnTo>
-                    <a:pt x="1790563" y="456580"/>
-                  </a:lnTo>
-                  <a:lnTo>
-                    <a:pt x="1718940" y="441244"/>
-                  </a:lnTo>
-                  <a:lnTo>
-                    <a:pt x="1647318" y="425689"/>
-                  </a:lnTo>
-                  <a:lnTo>
-                    <a:pt x="1575695" y="409913"/>
-                  </a:lnTo>
-                  <a:lnTo>
-                    <a:pt x="1504073" y="393913"/>
-                  </a:lnTo>
-                  <a:lnTo>
-                    <a:pt x="1432450" y="377685"/>
-                  </a:lnTo>
-                  <a:lnTo>
-                    <a:pt x="1360827" y="361227"/>
-                  </a:lnTo>
-                  <a:lnTo>
-                    <a:pt x="1289205" y="344534"/>
-                  </a:lnTo>
-                  <a:lnTo>
-                    <a:pt x="1217582" y="327604"/>
-                  </a:lnTo>
-                  <a:lnTo>
-                    <a:pt x="1145960" y="310433"/>
-                  </a:lnTo>
-                  <a:lnTo>
-                    <a:pt x="1074337" y="293018"/>
-                  </a:lnTo>
-                  <a:lnTo>
-                    <a:pt x="1002715" y="275355"/>
-                  </a:lnTo>
-                  <a:lnTo>
-                    <a:pt x="931092" y="257441"/>
-                  </a:lnTo>
-                  <a:lnTo>
-                    <a:pt x="859470" y="239272"/>
-                  </a:lnTo>
-                  <a:lnTo>
-                    <a:pt x="787847" y="220845"/>
-                  </a:lnTo>
-                  <a:lnTo>
-                    <a:pt x="716225" y="202155"/>
-                  </a:lnTo>
-                  <a:lnTo>
-                    <a:pt x="644602" y="183200"/>
-                  </a:lnTo>
-                  <a:lnTo>
-                    <a:pt x="572980" y="163975"/>
-                  </a:lnTo>
-                  <a:lnTo>
-                    <a:pt x="501357" y="144477"/>
-                  </a:lnTo>
-                  <a:lnTo>
-                    <a:pt x="429735" y="124701"/>
-                  </a:lnTo>
-                  <a:lnTo>
-                    <a:pt x="358112" y="104645"/>
-                  </a:lnTo>
-                  <a:lnTo>
-                    <a:pt x="286490" y="84303"/>
-                  </a:lnTo>
-                  <a:lnTo>
-                    <a:pt x="214867" y="63671"/>
-                  </a:lnTo>
-                  <a:lnTo>
-                    <a:pt x="143245" y="42746"/>
-                  </a:lnTo>
-                  <a:lnTo>
-                    <a:pt x="71622" y="21524"/>
-                  </a:lnTo>
-                  <a:lnTo>
-                    <a:pt x="0" y="0"/>
+                    <a:pt x="47044" y="36019"/>
+                  </a:lnTo>
+                  <a:lnTo>
+                    <a:pt x="117388" y="87604"/>
+                  </a:lnTo>
+                  <a:lnTo>
+                    <a:pt x="187733" y="137010"/>
+                  </a:lnTo>
+                  <a:lnTo>
+                    <a:pt x="258077" y="184329"/>
+                  </a:lnTo>
+                  <a:lnTo>
+                    <a:pt x="328422" y="229648"/>
+                  </a:lnTo>
+                  <a:lnTo>
+                    <a:pt x="398766" y="273054"/>
+                  </a:lnTo>
+                  <a:lnTo>
+                    <a:pt x="469111" y="314626"/>
+                  </a:lnTo>
+                  <a:lnTo>
+                    <a:pt x="539455" y="354442"/>
+                  </a:lnTo>
+                  <a:lnTo>
+                    <a:pt x="609800" y="392576"/>
+                  </a:lnTo>
+                  <a:lnTo>
+                    <a:pt x="680144" y="429099"/>
+                  </a:lnTo>
+                  <a:lnTo>
+                    <a:pt x="750489" y="464080"/>
+                  </a:lnTo>
+                  <a:lnTo>
+                    <a:pt x="820833" y="497582"/>
+                  </a:lnTo>
+                  <a:lnTo>
+                    <a:pt x="891178" y="529670"/>
+                  </a:lnTo>
+                  <a:lnTo>
+                    <a:pt x="961522" y="560402"/>
+                  </a:lnTo>
+                  <a:lnTo>
+                    <a:pt x="1031867" y="589836"/>
+                  </a:lnTo>
+                  <a:lnTo>
+                    <a:pt x="1102211" y="618027"/>
+                  </a:lnTo>
+                  <a:lnTo>
+                    <a:pt x="1172556" y="645026"/>
+                  </a:lnTo>
+                  <a:lnTo>
+                    <a:pt x="1242900" y="670886"/>
+                  </a:lnTo>
+                  <a:lnTo>
+                    <a:pt x="1313245" y="695653"/>
+                  </a:lnTo>
+                  <a:lnTo>
+                    <a:pt x="1383589" y="719373"/>
+                  </a:lnTo>
+                  <a:lnTo>
+                    <a:pt x="1453934" y="742092"/>
+                  </a:lnTo>
+                  <a:lnTo>
+                    <a:pt x="1524278" y="763851"/>
+                  </a:lnTo>
+                  <a:lnTo>
+                    <a:pt x="1594623" y="784691"/>
+                  </a:lnTo>
+                  <a:lnTo>
+                    <a:pt x="1664967" y="804651"/>
+                  </a:lnTo>
+                  <a:lnTo>
+                    <a:pt x="1735312" y="823767"/>
+                  </a:lnTo>
+                  <a:lnTo>
+                    <a:pt x="1805656" y="842076"/>
+                  </a:lnTo>
+                  <a:lnTo>
+                    <a:pt x="1876001" y="859612"/>
+                  </a:lnTo>
+                  <a:lnTo>
+                    <a:pt x="1946345" y="876407"/>
+                  </a:lnTo>
+                  <a:lnTo>
+                    <a:pt x="2016690" y="892492"/>
+                  </a:lnTo>
+                  <a:lnTo>
+                    <a:pt x="2087034" y="907898"/>
+                  </a:lnTo>
+                  <a:lnTo>
+                    <a:pt x="2157379" y="922653"/>
+                  </a:lnTo>
+                  <a:lnTo>
+                    <a:pt x="2227723" y="936785"/>
+                  </a:lnTo>
+                  <a:lnTo>
+                    <a:pt x="2298068" y="950320"/>
+                  </a:lnTo>
+                  <a:lnTo>
+                    <a:pt x="2368412" y="959651"/>
+                  </a:lnTo>
+                  <a:lnTo>
+                    <a:pt x="2438757" y="963823"/>
+                  </a:lnTo>
+                  <a:lnTo>
+                    <a:pt x="2509101" y="967938"/>
+                  </a:lnTo>
+                  <a:lnTo>
+                    <a:pt x="2579446" y="971994"/>
+                  </a:lnTo>
+                  <a:lnTo>
+                    <a:pt x="2649790" y="975994"/>
+                  </a:lnTo>
+                  <a:lnTo>
+                    <a:pt x="2720134" y="979937"/>
+                  </a:lnTo>
+                  <a:lnTo>
+                    <a:pt x="2790479" y="983825"/>
+                  </a:lnTo>
+                  <a:lnTo>
+                    <a:pt x="2860823" y="987659"/>
+                  </a:lnTo>
+                  <a:lnTo>
+                    <a:pt x="2931168" y="991439"/>
+                  </a:lnTo>
+                  <a:lnTo>
+                    <a:pt x="3001512" y="995166"/>
+                  </a:lnTo>
+                  <a:lnTo>
+                    <a:pt x="3071857" y="998841"/>
+                  </a:lnTo>
+                  <a:lnTo>
+                    <a:pt x="3142201" y="1002464"/>
+                  </a:lnTo>
+                  <a:lnTo>
+                    <a:pt x="3212546" y="1006036"/>
+                  </a:lnTo>
+                  <a:lnTo>
+                    <a:pt x="3282890" y="1009558"/>
+                  </a:lnTo>
+                  <a:lnTo>
+                    <a:pt x="3353235" y="1013031"/>
+                  </a:lnTo>
+                  <a:lnTo>
+                    <a:pt x="3423579" y="1016455"/>
+                  </a:lnTo>
+                  <a:lnTo>
+                    <a:pt x="3493924" y="1019831"/>
+                  </a:lnTo>
+                  <a:lnTo>
+                    <a:pt x="3564268" y="1023160"/>
+                  </a:lnTo>
+                  <a:lnTo>
+                    <a:pt x="3634613" y="1026442"/>
+                  </a:lnTo>
+                  <a:lnTo>
+                    <a:pt x="3704957" y="1029678"/>
+                  </a:lnTo>
+                  <a:lnTo>
+                    <a:pt x="3775302" y="1032869"/>
+                  </a:lnTo>
+                  <a:lnTo>
+                    <a:pt x="3845646" y="1036015"/>
+                  </a:lnTo>
+                  <a:lnTo>
+                    <a:pt x="3915991" y="1039117"/>
+                  </a:lnTo>
+                  <a:lnTo>
+                    <a:pt x="3986335" y="1042175"/>
+                  </a:lnTo>
+                  <a:lnTo>
+                    <a:pt x="4056680" y="1045190"/>
+                  </a:lnTo>
+                  <a:lnTo>
+                    <a:pt x="4127024" y="1048164"/>
+                  </a:lnTo>
+                  <a:lnTo>
+                    <a:pt x="4197369" y="1051095"/>
+                  </a:lnTo>
+                  <a:lnTo>
+                    <a:pt x="4267713" y="1053985"/>
+                  </a:lnTo>
+                  <a:lnTo>
+                    <a:pt x="4338058" y="1056835"/>
+                  </a:lnTo>
+                  <a:lnTo>
+                    <a:pt x="4408402" y="1059645"/>
+                  </a:lnTo>
+                  <a:lnTo>
+                    <a:pt x="4478747" y="1062415"/>
+                  </a:lnTo>
+                  <a:lnTo>
+                    <a:pt x="4549091" y="1065147"/>
+                  </a:lnTo>
+                  <a:lnTo>
+                    <a:pt x="4619436" y="1067840"/>
+                  </a:lnTo>
+                  <a:lnTo>
+                    <a:pt x="4689780" y="1070496"/>
+                  </a:lnTo>
+                  <a:lnTo>
+                    <a:pt x="4760125" y="1073114"/>
+                  </a:lnTo>
+                  <a:lnTo>
+                    <a:pt x="4830469" y="1075696"/>
+                  </a:lnTo>
+                  <a:lnTo>
+                    <a:pt x="4900814" y="1078241"/>
+                  </a:lnTo>
+                  <a:lnTo>
+                    <a:pt x="4971158" y="1080751"/>
+                  </a:lnTo>
+                  <a:lnTo>
+                    <a:pt x="5041503" y="1083225"/>
+                  </a:lnTo>
+                  <a:lnTo>
+                    <a:pt x="5111847" y="1085665"/>
+                  </a:lnTo>
+                  <a:lnTo>
+                    <a:pt x="5182192" y="1088070"/>
+                  </a:lnTo>
+                  <a:lnTo>
+                    <a:pt x="5252536" y="1090442"/>
+                  </a:lnTo>
+                  <a:lnTo>
+                    <a:pt x="5322881" y="1092781"/>
+                  </a:lnTo>
+                  <a:lnTo>
+                    <a:pt x="5393225" y="1095086"/>
+                  </a:lnTo>
+                  <a:lnTo>
+                    <a:pt x="5463570" y="1097360"/>
+                  </a:lnTo>
+                  <a:lnTo>
+                    <a:pt x="5533914" y="1099601"/>
+                  </a:lnTo>
+                  <a:lnTo>
+                    <a:pt x="5604259" y="1101811"/>
+                  </a:lnTo>
+                  <a:lnTo>
+                    <a:pt x="5674603" y="1103991"/>
+                  </a:lnTo>
+                  <a:lnTo>
+                    <a:pt x="5744948" y="1106139"/>
+                  </a:lnTo>
+                  <a:lnTo>
+                    <a:pt x="5815292" y="1108258"/>
+                  </a:lnTo>
+                  <a:lnTo>
+                    <a:pt x="5885637" y="1110346"/>
+                  </a:lnTo>
+                  <a:lnTo>
+                    <a:pt x="5955981" y="1112406"/>
+                  </a:lnTo>
+                  <a:lnTo>
+                    <a:pt x="6026326" y="1114436"/>
+                  </a:lnTo>
+                  <a:lnTo>
+                    <a:pt x="6096670" y="1116438"/>
+                  </a:lnTo>
+                  <a:lnTo>
+                    <a:pt x="6167015" y="1118412"/>
+                  </a:lnTo>
+                  <a:lnTo>
+                    <a:pt x="6237359" y="1120359"/>
                   </a:lnTo>
                 </a:path>
               </a:pathLst>
@@ -4266,312 +3976,637 @@
           </p:nvSpPr>
           <p:spPr>
             <a:xfrm>
-              <a:off x="1172049" y="2667635"/>
-              <a:ext cx="7090630" cy="2720022"/>
+              <a:off x="1235312" y="2846393"/>
+              <a:ext cx="6964104" cy="526529"/>
             </a:xfrm>
             <a:custGeom>
               <a:avLst/>
               <a:pathLst>
-                <a:path w="7090630" h="2720022">
+                <a:path w="6964104" h="526529">
+                  <a:moveTo>
+                    <a:pt x="6964104" y="526529"/>
+                  </a:moveTo>
+                  <a:lnTo>
+                    <a:pt x="6893760" y="525321"/>
+                  </a:lnTo>
+                  <a:lnTo>
+                    <a:pt x="6823415" y="524061"/>
+                  </a:lnTo>
+                  <a:lnTo>
+                    <a:pt x="6753071" y="522745"/>
+                  </a:lnTo>
+                  <a:lnTo>
+                    <a:pt x="6682726" y="521371"/>
+                  </a:lnTo>
+                  <a:lnTo>
+                    <a:pt x="6612382" y="519936"/>
+                  </a:lnTo>
+                  <a:lnTo>
+                    <a:pt x="6542037" y="518438"/>
+                  </a:lnTo>
+                  <a:lnTo>
+                    <a:pt x="6471693" y="516874"/>
+                  </a:lnTo>
+                  <a:lnTo>
+                    <a:pt x="6401348" y="515241"/>
+                  </a:lnTo>
+                  <a:lnTo>
+                    <a:pt x="6331004" y="513536"/>
+                  </a:lnTo>
+                  <a:lnTo>
+                    <a:pt x="6260659" y="511755"/>
+                  </a:lnTo>
+                  <a:lnTo>
+                    <a:pt x="6190315" y="509897"/>
+                  </a:lnTo>
+                  <a:lnTo>
+                    <a:pt x="6119970" y="507956"/>
+                  </a:lnTo>
+                  <a:lnTo>
+                    <a:pt x="6049626" y="505930"/>
+                  </a:lnTo>
+                  <a:lnTo>
+                    <a:pt x="5979281" y="503814"/>
+                  </a:lnTo>
+                  <a:lnTo>
+                    <a:pt x="5908937" y="501605"/>
+                  </a:lnTo>
+                  <a:lnTo>
+                    <a:pt x="5838592" y="499298"/>
+                  </a:lnTo>
+                  <a:lnTo>
+                    <a:pt x="5768248" y="496890"/>
+                  </a:lnTo>
+                  <a:lnTo>
+                    <a:pt x="5697903" y="494376"/>
+                  </a:lnTo>
+                  <a:lnTo>
+                    <a:pt x="5627559" y="491750"/>
+                  </a:lnTo>
+                  <a:lnTo>
+                    <a:pt x="5557214" y="489009"/>
+                  </a:lnTo>
+                  <a:lnTo>
+                    <a:pt x="5486870" y="486147"/>
+                  </a:lnTo>
+                  <a:lnTo>
+                    <a:pt x="5416525" y="483159"/>
+                  </a:lnTo>
+                  <a:lnTo>
+                    <a:pt x="5346181" y="480039"/>
+                  </a:lnTo>
+                  <a:lnTo>
+                    <a:pt x="5275836" y="476781"/>
+                  </a:lnTo>
+                  <a:lnTo>
+                    <a:pt x="5205492" y="473380"/>
+                  </a:lnTo>
+                  <a:lnTo>
+                    <a:pt x="5135147" y="469829"/>
+                  </a:lnTo>
+                  <a:lnTo>
+                    <a:pt x="5064803" y="466121"/>
+                  </a:lnTo>
+                  <a:lnTo>
+                    <a:pt x="4994458" y="462249"/>
+                  </a:lnTo>
+                  <a:lnTo>
+                    <a:pt x="4924114" y="458207"/>
+                  </a:lnTo>
+                  <a:lnTo>
+                    <a:pt x="4853769" y="453986"/>
+                  </a:lnTo>
+                  <a:lnTo>
+                    <a:pt x="4783425" y="449580"/>
+                  </a:lnTo>
+                  <a:lnTo>
+                    <a:pt x="4713080" y="444979"/>
+                  </a:lnTo>
+                  <a:lnTo>
+                    <a:pt x="4642736" y="440175"/>
+                  </a:lnTo>
+                  <a:lnTo>
+                    <a:pt x="4572391" y="435159"/>
+                  </a:lnTo>
+                  <a:lnTo>
+                    <a:pt x="4502047" y="429922"/>
+                  </a:lnTo>
+                  <a:lnTo>
+                    <a:pt x="4431702" y="424454"/>
+                  </a:lnTo>
+                  <a:lnTo>
+                    <a:pt x="4361358" y="418745"/>
+                  </a:lnTo>
+                  <a:lnTo>
+                    <a:pt x="4291013" y="412784"/>
+                  </a:lnTo>
+                  <a:lnTo>
+                    <a:pt x="4220669" y="406560"/>
+                  </a:lnTo>
+                  <a:lnTo>
+                    <a:pt x="4150324" y="400061"/>
+                  </a:lnTo>
+                  <a:lnTo>
+                    <a:pt x="4079980" y="393276"/>
+                  </a:lnTo>
+                  <a:lnTo>
+                    <a:pt x="4009635" y="386192"/>
+                  </a:lnTo>
+                  <a:lnTo>
+                    <a:pt x="3939291" y="378795"/>
+                  </a:lnTo>
+                  <a:lnTo>
+                    <a:pt x="3868946" y="371072"/>
+                  </a:lnTo>
+                  <a:lnTo>
+                    <a:pt x="3798602" y="363009"/>
+                  </a:lnTo>
+                  <a:lnTo>
+                    <a:pt x="3728257" y="354590"/>
+                  </a:lnTo>
+                  <a:lnTo>
+                    <a:pt x="3657913" y="345799"/>
+                  </a:lnTo>
+                  <a:lnTo>
+                    <a:pt x="3587569" y="336621"/>
+                  </a:lnTo>
+                  <a:lnTo>
+                    <a:pt x="3517224" y="327038"/>
+                  </a:lnTo>
+                  <a:lnTo>
+                    <a:pt x="3446880" y="317032"/>
+                  </a:lnTo>
+                  <a:lnTo>
+                    <a:pt x="3376535" y="306585"/>
+                  </a:lnTo>
+                  <a:lnTo>
+                    <a:pt x="3306191" y="295677"/>
+                  </a:lnTo>
+                  <a:lnTo>
+                    <a:pt x="3235846" y="284289"/>
+                  </a:lnTo>
+                  <a:lnTo>
+                    <a:pt x="3165502" y="272397"/>
+                  </a:lnTo>
+                  <a:lnTo>
+                    <a:pt x="3095157" y="259982"/>
+                  </a:lnTo>
+                  <a:lnTo>
+                    <a:pt x="3024813" y="252117"/>
+                  </a:lnTo>
+                  <a:lnTo>
+                    <a:pt x="2954468" y="247825"/>
+                  </a:lnTo>
+                  <a:lnTo>
+                    <a:pt x="2884124" y="243472"/>
+                  </a:lnTo>
+                  <a:lnTo>
+                    <a:pt x="2813779" y="239057"/>
+                  </a:lnTo>
+                  <a:lnTo>
+                    <a:pt x="2743435" y="234579"/>
+                  </a:lnTo>
+                  <a:lnTo>
+                    <a:pt x="2673090" y="230037"/>
+                  </a:lnTo>
+                  <a:lnTo>
+                    <a:pt x="2602746" y="225431"/>
+                  </a:lnTo>
+                  <a:lnTo>
+                    <a:pt x="2532401" y="220759"/>
+                  </a:lnTo>
+                  <a:lnTo>
+                    <a:pt x="2462057" y="216021"/>
+                  </a:lnTo>
+                  <a:lnTo>
+                    <a:pt x="2391712" y="211215"/>
+                  </a:lnTo>
+                  <a:lnTo>
+                    <a:pt x="2321368" y="206341"/>
+                  </a:lnTo>
+                  <a:lnTo>
+                    <a:pt x="2251023" y="201398"/>
+                  </a:lnTo>
+                  <a:lnTo>
+                    <a:pt x="2180679" y="196384"/>
+                  </a:lnTo>
+                  <a:lnTo>
+                    <a:pt x="2110334" y="191299"/>
+                  </a:lnTo>
+                  <a:lnTo>
+                    <a:pt x="2039990" y="186142"/>
+                  </a:lnTo>
+                  <a:lnTo>
+                    <a:pt x="1969645" y="180911"/>
+                  </a:lnTo>
+                  <a:lnTo>
+                    <a:pt x="1899301" y="175606"/>
+                  </a:lnTo>
+                  <a:lnTo>
+                    <a:pt x="1828956" y="170226"/>
+                  </a:lnTo>
+                  <a:lnTo>
+                    <a:pt x="1758612" y="164769"/>
+                  </a:lnTo>
+                  <a:lnTo>
+                    <a:pt x="1688267" y="159234"/>
+                  </a:lnTo>
+                  <a:lnTo>
+                    <a:pt x="1617923" y="153621"/>
+                  </a:lnTo>
+                  <a:lnTo>
+                    <a:pt x="1547578" y="147928"/>
+                  </a:lnTo>
+                  <a:lnTo>
+                    <a:pt x="1477234" y="142154"/>
+                  </a:lnTo>
+                  <a:lnTo>
+                    <a:pt x="1406889" y="136297"/>
+                  </a:lnTo>
+                  <a:lnTo>
+                    <a:pt x="1336545" y="130358"/>
+                  </a:lnTo>
+                  <a:lnTo>
+                    <a:pt x="1266200" y="124334"/>
+                  </a:lnTo>
+                  <a:lnTo>
+                    <a:pt x="1195856" y="118224"/>
+                  </a:lnTo>
+                  <a:lnTo>
+                    <a:pt x="1125511" y="112028"/>
+                  </a:lnTo>
+                  <a:lnTo>
+                    <a:pt x="1055167" y="105743"/>
+                  </a:lnTo>
+                  <a:lnTo>
+                    <a:pt x="984822" y="99369"/>
+                  </a:lnTo>
+                  <a:lnTo>
+                    <a:pt x="914478" y="92904"/>
+                  </a:lnTo>
+                  <a:lnTo>
+                    <a:pt x="844133" y="86347"/>
+                  </a:lnTo>
+                  <a:lnTo>
+                    <a:pt x="773789" y="79697"/>
+                  </a:lnTo>
+                  <a:lnTo>
+                    <a:pt x="703444" y="72953"/>
+                  </a:lnTo>
+                  <a:lnTo>
+                    <a:pt x="633100" y="66112"/>
+                  </a:lnTo>
+                  <a:lnTo>
+                    <a:pt x="562755" y="59174"/>
+                  </a:lnTo>
+                  <a:lnTo>
+                    <a:pt x="492411" y="52138"/>
+                  </a:lnTo>
+                  <a:lnTo>
+                    <a:pt x="422066" y="45001"/>
+                  </a:lnTo>
+                  <a:lnTo>
+                    <a:pt x="351722" y="37763"/>
+                  </a:lnTo>
+                  <a:lnTo>
+                    <a:pt x="281377" y="30422"/>
+                  </a:lnTo>
+                  <a:lnTo>
+                    <a:pt x="211033" y="22977"/>
+                  </a:lnTo>
+                  <a:lnTo>
+                    <a:pt x="140688" y="15426"/>
+                  </a:lnTo>
+                  <a:lnTo>
+                    <a:pt x="70344" y="7767"/>
+                  </a:lnTo>
+                  <a:lnTo>
+                    <a:pt x="0" y="0"/>
+                  </a:lnTo>
+                </a:path>
+              </a:pathLst>
+            </a:custGeom>
+          </p:spPr>
+          <p:txBody>
+            <a:bodyPr/>
+            <a:lstStyle/>
+            <a:p/>
+          </p:txBody>
+        </p:sp>
+        <p:sp>
+          <p:nvSpPr>
+            <p:cNvPr id="26" name="pl26"/>
+            <p:cNvSpPr/>
+            <p:nvPr/>
+          </p:nvSpPr>
+          <p:spPr>
+            <a:xfrm>
+              <a:off x="1235312" y="2357500"/>
+              <a:ext cx="6964104" cy="981592"/>
+            </a:xfrm>
+            <a:custGeom>
+              <a:avLst/>
+              <a:pathLst>
+                <a:path w="6964104" h="981592">
                   <a:moveTo>
                     <a:pt x="0" y="0"/>
                   </a:moveTo>
                   <a:lnTo>
-                    <a:pt x="71622" y="81588"/>
-                  </a:lnTo>
-                  <a:lnTo>
-                    <a:pt x="143245" y="160872"/>
-                  </a:lnTo>
-                  <a:lnTo>
-                    <a:pt x="214867" y="237918"/>
-                  </a:lnTo>
-                  <a:lnTo>
-                    <a:pt x="286490" y="312789"/>
-                  </a:lnTo>
-                  <a:lnTo>
-                    <a:pt x="358112" y="385545"/>
-                  </a:lnTo>
-                  <a:lnTo>
-                    <a:pt x="429735" y="456248"/>
-                  </a:lnTo>
-                  <a:lnTo>
-                    <a:pt x="501357" y="524954"/>
-                  </a:lnTo>
-                  <a:lnTo>
-                    <a:pt x="572980" y="591720"/>
-                  </a:lnTo>
-                  <a:lnTo>
-                    <a:pt x="644602" y="656601"/>
-                  </a:lnTo>
-                  <a:lnTo>
-                    <a:pt x="716225" y="719650"/>
-                  </a:lnTo>
-                  <a:lnTo>
-                    <a:pt x="787847" y="780919"/>
-                  </a:lnTo>
-                  <a:lnTo>
-                    <a:pt x="859470" y="840458"/>
-                  </a:lnTo>
-                  <a:lnTo>
-                    <a:pt x="931092" y="898316"/>
-                  </a:lnTo>
-                  <a:lnTo>
-                    <a:pt x="1002715" y="954540"/>
-                  </a:lnTo>
-                  <a:lnTo>
-                    <a:pt x="1074337" y="1009177"/>
-                  </a:lnTo>
-                  <a:lnTo>
-                    <a:pt x="1145960" y="1062271"/>
-                  </a:lnTo>
-                  <a:lnTo>
-                    <a:pt x="1217582" y="1113866"/>
-                  </a:lnTo>
-                  <a:lnTo>
-                    <a:pt x="1289205" y="1164004"/>
-                  </a:lnTo>
-                  <a:lnTo>
-                    <a:pt x="1360827" y="1212726"/>
-                  </a:lnTo>
-                  <a:lnTo>
-                    <a:pt x="1432450" y="1260073"/>
-                  </a:lnTo>
-                  <a:lnTo>
-                    <a:pt x="1504073" y="1306083"/>
-                  </a:lnTo>
-                  <a:lnTo>
-                    <a:pt x="1575695" y="1350794"/>
-                  </a:lnTo>
-                  <a:lnTo>
-                    <a:pt x="1647318" y="1394243"/>
-                  </a:lnTo>
-                  <a:lnTo>
-                    <a:pt x="1718940" y="1436465"/>
-                  </a:lnTo>
-                  <a:lnTo>
-                    <a:pt x="1790563" y="1477494"/>
-                  </a:lnTo>
-                  <a:lnTo>
-                    <a:pt x="1862185" y="1517365"/>
-                  </a:lnTo>
-                  <a:lnTo>
-                    <a:pt x="1933808" y="1556111"/>
-                  </a:lnTo>
-                  <a:lnTo>
-                    <a:pt x="2005430" y="1593762"/>
-                  </a:lnTo>
-                  <a:lnTo>
-                    <a:pt x="2077053" y="1630351"/>
-                  </a:lnTo>
-                  <a:lnTo>
-                    <a:pt x="2148675" y="1665906"/>
-                  </a:lnTo>
-                  <a:lnTo>
-                    <a:pt x="2220298" y="1700457"/>
-                  </a:lnTo>
-                  <a:lnTo>
-                    <a:pt x="2291920" y="1734033"/>
-                  </a:lnTo>
-                  <a:lnTo>
-                    <a:pt x="2363543" y="1766661"/>
-                  </a:lnTo>
-                  <a:lnTo>
-                    <a:pt x="2435165" y="1798367"/>
-                  </a:lnTo>
-                  <a:lnTo>
-                    <a:pt x="2506788" y="1829179"/>
-                  </a:lnTo>
-                  <a:lnTo>
-                    <a:pt x="2578410" y="1859120"/>
-                  </a:lnTo>
-                  <a:lnTo>
-                    <a:pt x="2650033" y="1888216"/>
-                  </a:lnTo>
-                  <a:lnTo>
-                    <a:pt x="2721655" y="1916491"/>
-                  </a:lnTo>
-                  <a:lnTo>
-                    <a:pt x="2793278" y="1943967"/>
-                  </a:lnTo>
-                  <a:lnTo>
-                    <a:pt x="2864901" y="1970667"/>
-                  </a:lnTo>
-                  <a:lnTo>
-                    <a:pt x="2936523" y="1996613"/>
-                  </a:lnTo>
-                  <a:lnTo>
-                    <a:pt x="3008146" y="2021827"/>
-                  </a:lnTo>
-                  <a:lnTo>
-                    <a:pt x="3079768" y="2046329"/>
-                  </a:lnTo>
-                  <a:lnTo>
-                    <a:pt x="3151391" y="2070139"/>
-                  </a:lnTo>
-                  <a:lnTo>
-                    <a:pt x="3223013" y="2093277"/>
-                  </a:lnTo>
-                  <a:lnTo>
-                    <a:pt x="3294636" y="2115762"/>
-                  </a:lnTo>
-                  <a:lnTo>
-                    <a:pt x="3366258" y="2137612"/>
-                  </a:lnTo>
-                  <a:lnTo>
-                    <a:pt x="3437881" y="2158844"/>
-                  </a:lnTo>
-                  <a:lnTo>
-                    <a:pt x="3509503" y="2179478"/>
-                  </a:lnTo>
-                  <a:lnTo>
-                    <a:pt x="3581126" y="2199528"/>
-                  </a:lnTo>
-                  <a:lnTo>
-                    <a:pt x="3652748" y="2219013"/>
-                  </a:lnTo>
-                  <a:lnTo>
-                    <a:pt x="3724371" y="2237947"/>
-                  </a:lnTo>
-                  <a:lnTo>
-                    <a:pt x="3795993" y="2256347"/>
-                  </a:lnTo>
-                  <a:lnTo>
-                    <a:pt x="3867616" y="2274227"/>
-                  </a:lnTo>
-                  <a:lnTo>
-                    <a:pt x="3939238" y="2291603"/>
-                  </a:lnTo>
-                  <a:lnTo>
-                    <a:pt x="4010861" y="2308488"/>
-                  </a:lnTo>
-                  <a:lnTo>
-                    <a:pt x="4082483" y="2324896"/>
-                  </a:lnTo>
-                  <a:lnTo>
-                    <a:pt x="4154106" y="2340840"/>
-                  </a:lnTo>
-                  <a:lnTo>
-                    <a:pt x="4225729" y="2356335"/>
-                  </a:lnTo>
-                  <a:lnTo>
-                    <a:pt x="4297351" y="2371392"/>
-                  </a:lnTo>
-                  <a:lnTo>
-                    <a:pt x="4368974" y="2386024"/>
-                  </a:lnTo>
-                  <a:lnTo>
-                    <a:pt x="4440596" y="2400243"/>
-                  </a:lnTo>
-                  <a:lnTo>
-                    <a:pt x="4512219" y="2414060"/>
-                  </a:lnTo>
-                  <a:lnTo>
-                    <a:pt x="4583841" y="2427488"/>
-                  </a:lnTo>
-                  <a:lnTo>
-                    <a:pt x="4655464" y="2440536"/>
-                  </a:lnTo>
-                  <a:lnTo>
-                    <a:pt x="4727086" y="2453216"/>
-                  </a:lnTo>
-                  <a:lnTo>
-                    <a:pt x="4798709" y="2465537"/>
-                  </a:lnTo>
-                  <a:lnTo>
-                    <a:pt x="4870331" y="2477511"/>
-                  </a:lnTo>
-                  <a:lnTo>
-                    <a:pt x="4941954" y="2489147"/>
-                  </a:lnTo>
-                  <a:lnTo>
-                    <a:pt x="5013576" y="2500454"/>
-                  </a:lnTo>
-                  <a:lnTo>
-                    <a:pt x="5085199" y="2511442"/>
-                  </a:lnTo>
-                  <a:lnTo>
-                    <a:pt x="5156821" y="2522120"/>
-                  </a:lnTo>
-                  <a:lnTo>
-                    <a:pt x="5228444" y="2532496"/>
-                  </a:lnTo>
-                  <a:lnTo>
-                    <a:pt x="5300066" y="2542579"/>
-                  </a:lnTo>
-                  <a:lnTo>
-                    <a:pt x="5371689" y="2552378"/>
-                  </a:lnTo>
-                  <a:lnTo>
-                    <a:pt x="5443311" y="2561899"/>
-                  </a:lnTo>
-                  <a:lnTo>
-                    <a:pt x="5514934" y="2571152"/>
-                  </a:lnTo>
-                  <a:lnTo>
-                    <a:pt x="5586557" y="2580144"/>
-                  </a:lnTo>
-                  <a:lnTo>
-                    <a:pt x="5658179" y="2588882"/>
-                  </a:lnTo>
-                  <a:lnTo>
-                    <a:pt x="5729802" y="2597373"/>
-                  </a:lnTo>
-                  <a:lnTo>
-                    <a:pt x="5801424" y="2605625"/>
-                  </a:lnTo>
-                  <a:lnTo>
-                    <a:pt x="5873047" y="2613643"/>
-                  </a:lnTo>
-                  <a:lnTo>
-                    <a:pt x="5944669" y="2621435"/>
-                  </a:lnTo>
-                  <a:lnTo>
-                    <a:pt x="6016292" y="2629007"/>
-                  </a:lnTo>
-                  <a:lnTo>
-                    <a:pt x="6087914" y="2636365"/>
-                  </a:lnTo>
-                  <a:lnTo>
-                    <a:pt x="6159537" y="2643516"/>
-                  </a:lnTo>
-                  <a:lnTo>
-                    <a:pt x="6231159" y="2650464"/>
-                  </a:lnTo>
-                  <a:lnTo>
-                    <a:pt x="6302782" y="2657217"/>
-                  </a:lnTo>
-                  <a:lnTo>
-                    <a:pt x="6374404" y="2663779"/>
-                  </a:lnTo>
-                  <a:lnTo>
-                    <a:pt x="6446027" y="2670155"/>
-                  </a:lnTo>
-                  <a:lnTo>
-                    <a:pt x="6517649" y="2676352"/>
-                  </a:lnTo>
-                  <a:lnTo>
-                    <a:pt x="6589272" y="2682373"/>
-                  </a:lnTo>
-                  <a:lnTo>
-                    <a:pt x="6660894" y="2688224"/>
-                  </a:lnTo>
-                  <a:lnTo>
-                    <a:pt x="6732517" y="2693911"/>
-                  </a:lnTo>
-                  <a:lnTo>
-                    <a:pt x="6804139" y="2699436"/>
-                  </a:lnTo>
-                  <a:lnTo>
-                    <a:pt x="6875762" y="2704806"/>
-                  </a:lnTo>
-                  <a:lnTo>
-                    <a:pt x="6947385" y="2710024"/>
-                  </a:lnTo>
-                  <a:lnTo>
-                    <a:pt x="7019007" y="2715095"/>
-                  </a:lnTo>
-                  <a:lnTo>
-                    <a:pt x="7090630" y="2720022"/>
+                    <a:pt x="70344" y="29443"/>
+                  </a:lnTo>
+                  <a:lnTo>
+                    <a:pt x="140688" y="58055"/>
+                  </a:lnTo>
+                  <a:lnTo>
+                    <a:pt x="211033" y="85859"/>
+                  </a:lnTo>
+                  <a:lnTo>
+                    <a:pt x="281377" y="112878"/>
+                  </a:lnTo>
+                  <a:lnTo>
+                    <a:pt x="351722" y="139134"/>
+                  </a:lnTo>
+                  <a:lnTo>
+                    <a:pt x="422066" y="164649"/>
+                  </a:lnTo>
+                  <a:lnTo>
+                    <a:pt x="492411" y="189443"/>
+                  </a:lnTo>
+                  <a:lnTo>
+                    <a:pt x="562755" y="213537"/>
+                  </a:lnTo>
+                  <a:lnTo>
+                    <a:pt x="633100" y="236951"/>
+                  </a:lnTo>
+                  <a:lnTo>
+                    <a:pt x="703444" y="259704"/>
+                  </a:lnTo>
+                  <a:lnTo>
+                    <a:pt x="773789" y="281815"/>
+                  </a:lnTo>
+                  <a:lnTo>
+                    <a:pt x="844133" y="303301"/>
+                  </a:lnTo>
+                  <a:lnTo>
+                    <a:pt x="914478" y="324181"/>
+                  </a:lnTo>
+                  <a:lnTo>
+                    <a:pt x="984822" y="344471"/>
+                  </a:lnTo>
+                  <a:lnTo>
+                    <a:pt x="1055167" y="364188"/>
+                  </a:lnTo>
+                  <a:lnTo>
+                    <a:pt x="1125511" y="383348"/>
+                  </a:lnTo>
+                  <a:lnTo>
+                    <a:pt x="1195856" y="401968"/>
+                  </a:lnTo>
+                  <a:lnTo>
+                    <a:pt x="1266200" y="420061"/>
+                  </a:lnTo>
+                  <a:lnTo>
+                    <a:pt x="1336545" y="437644"/>
+                  </a:lnTo>
+                  <a:lnTo>
+                    <a:pt x="1406889" y="454731"/>
+                  </a:lnTo>
+                  <a:lnTo>
+                    <a:pt x="1477234" y="471334"/>
+                  </a:lnTo>
+                  <a:lnTo>
+                    <a:pt x="1547578" y="487470"/>
+                  </a:lnTo>
+                  <a:lnTo>
+                    <a:pt x="1617923" y="503149"/>
+                  </a:lnTo>
+                  <a:lnTo>
+                    <a:pt x="1688267" y="518386"/>
+                  </a:lnTo>
+                  <a:lnTo>
+                    <a:pt x="1758612" y="533193"/>
+                  </a:lnTo>
+                  <a:lnTo>
+                    <a:pt x="1828956" y="547581"/>
+                  </a:lnTo>
+                  <a:lnTo>
+                    <a:pt x="1899301" y="561563"/>
+                  </a:lnTo>
+                  <a:lnTo>
+                    <a:pt x="1969645" y="575151"/>
+                  </a:lnTo>
+                  <a:lnTo>
+                    <a:pt x="2039990" y="588355"/>
+                  </a:lnTo>
+                  <a:lnTo>
+                    <a:pt x="2110334" y="601186"/>
+                  </a:lnTo>
+                  <a:lnTo>
+                    <a:pt x="2180679" y="613655"/>
+                  </a:lnTo>
+                  <a:lnTo>
+                    <a:pt x="2251023" y="625771"/>
+                  </a:lnTo>
+                  <a:lnTo>
+                    <a:pt x="2321368" y="637546"/>
+                  </a:lnTo>
+                  <a:lnTo>
+                    <a:pt x="2391712" y="648988"/>
+                  </a:lnTo>
+                  <a:lnTo>
+                    <a:pt x="2462057" y="660107"/>
+                  </a:lnTo>
+                  <a:lnTo>
+                    <a:pt x="2532401" y="670912"/>
+                  </a:lnTo>
+                  <a:lnTo>
+                    <a:pt x="2602746" y="681412"/>
+                  </a:lnTo>
+                  <a:lnTo>
+                    <a:pt x="2673090" y="691616"/>
+                  </a:lnTo>
+                  <a:lnTo>
+                    <a:pt x="2743435" y="701532"/>
+                  </a:lnTo>
+                  <a:lnTo>
+                    <a:pt x="2813779" y="711167"/>
+                  </a:lnTo>
+                  <a:lnTo>
+                    <a:pt x="2884124" y="720531"/>
+                  </a:lnTo>
+                  <a:lnTo>
+                    <a:pt x="2954468" y="729630"/>
+                  </a:lnTo>
+                  <a:lnTo>
+                    <a:pt x="3024813" y="738472"/>
+                  </a:lnTo>
+                  <a:lnTo>
+                    <a:pt x="3095157" y="747064"/>
+                  </a:lnTo>
+                  <a:lnTo>
+                    <a:pt x="3165502" y="755414"/>
+                  </a:lnTo>
+                  <a:lnTo>
+                    <a:pt x="3235846" y="763528"/>
+                  </a:lnTo>
+                  <a:lnTo>
+                    <a:pt x="3306191" y="771413"/>
+                  </a:lnTo>
+                  <a:lnTo>
+                    <a:pt x="3376535" y="779076"/>
+                  </a:lnTo>
+                  <a:lnTo>
+                    <a:pt x="3446880" y="786522"/>
+                  </a:lnTo>
+                  <a:lnTo>
+                    <a:pt x="3517224" y="793758"/>
+                  </a:lnTo>
+                  <a:lnTo>
+                    <a:pt x="3587569" y="800789"/>
+                  </a:lnTo>
+                  <a:lnTo>
+                    <a:pt x="3657913" y="807622"/>
+                  </a:lnTo>
+                  <a:lnTo>
+                    <a:pt x="3728257" y="814262"/>
+                  </a:lnTo>
+                  <a:lnTo>
+                    <a:pt x="3798602" y="820715"/>
+                  </a:lnTo>
+                  <a:lnTo>
+                    <a:pt x="3868946" y="826985"/>
+                  </a:lnTo>
+                  <a:lnTo>
+                    <a:pt x="3939291" y="833079"/>
+                  </a:lnTo>
+                  <a:lnTo>
+                    <a:pt x="4009635" y="839000"/>
+                  </a:lnTo>
+                  <a:lnTo>
+                    <a:pt x="4079980" y="844754"/>
+                  </a:lnTo>
+                  <a:lnTo>
+                    <a:pt x="4150324" y="850346"/>
+                  </a:lnTo>
+                  <a:lnTo>
+                    <a:pt x="4220669" y="855779"/>
+                  </a:lnTo>
+                  <a:lnTo>
+                    <a:pt x="4291013" y="861060"/>
+                  </a:lnTo>
+                  <a:lnTo>
+                    <a:pt x="4361358" y="866191"/>
+                  </a:lnTo>
+                  <a:lnTo>
+                    <a:pt x="4431702" y="871177"/>
+                  </a:lnTo>
+                  <a:lnTo>
+                    <a:pt x="4502047" y="876023"/>
+                  </a:lnTo>
+                  <a:lnTo>
+                    <a:pt x="4572391" y="880732"/>
+                  </a:lnTo>
+                  <a:lnTo>
+                    <a:pt x="4642736" y="885307"/>
+                  </a:lnTo>
+                  <a:lnTo>
+                    <a:pt x="4713080" y="889754"/>
+                  </a:lnTo>
+                  <a:lnTo>
+                    <a:pt x="4783425" y="894075"/>
+                  </a:lnTo>
+                  <a:lnTo>
+                    <a:pt x="4853769" y="898274"/>
+                  </a:lnTo>
+                  <a:lnTo>
+                    <a:pt x="4924114" y="902355"/>
+                  </a:lnTo>
+                  <a:lnTo>
+                    <a:pt x="4994458" y="906320"/>
+                  </a:lnTo>
+                  <a:lnTo>
+                    <a:pt x="5064803" y="910173"/>
+                  </a:lnTo>
+                  <a:lnTo>
+                    <a:pt x="5135147" y="913918"/>
+                  </a:lnTo>
+                  <a:lnTo>
+                    <a:pt x="5205492" y="917557"/>
+                  </a:lnTo>
+                  <a:lnTo>
+                    <a:pt x="5275836" y="921093"/>
+                  </a:lnTo>
+                  <a:lnTo>
+                    <a:pt x="5346181" y="924529"/>
+                  </a:lnTo>
+                  <a:lnTo>
+                    <a:pt x="5416525" y="927868"/>
+                  </a:lnTo>
+                  <a:lnTo>
+                    <a:pt x="5486870" y="931113"/>
+                  </a:lnTo>
+                  <a:lnTo>
+                    <a:pt x="5557214" y="934266"/>
+                  </a:lnTo>
+                  <a:lnTo>
+                    <a:pt x="5627559" y="937331"/>
+                  </a:lnTo>
+                  <a:lnTo>
+                    <a:pt x="5697903" y="940308"/>
+                  </a:lnTo>
+                  <a:lnTo>
+                    <a:pt x="5768248" y="943202"/>
+                  </a:lnTo>
+                  <a:lnTo>
+                    <a:pt x="5838592" y="946014"/>
+                  </a:lnTo>
+                  <a:lnTo>
+                    <a:pt x="5908937" y="948747"/>
+                  </a:lnTo>
+                  <a:lnTo>
+                    <a:pt x="5979281" y="951402"/>
+                  </a:lnTo>
+                  <a:lnTo>
+                    <a:pt x="6049626" y="953982"/>
+                  </a:lnTo>
+                  <a:lnTo>
+                    <a:pt x="6119970" y="956490"/>
+                  </a:lnTo>
+                  <a:lnTo>
+                    <a:pt x="6190315" y="958927"/>
+                  </a:lnTo>
+                  <a:lnTo>
+                    <a:pt x="6260659" y="961295"/>
+                  </a:lnTo>
+                  <a:lnTo>
+                    <a:pt x="6331004" y="963596"/>
+                  </a:lnTo>
+                  <a:lnTo>
+                    <a:pt x="6401348" y="965832"/>
+                  </a:lnTo>
+                  <a:lnTo>
+                    <a:pt x="6471693" y="968005"/>
+                  </a:lnTo>
+                  <a:lnTo>
+                    <a:pt x="6542037" y="970117"/>
+                  </a:lnTo>
+                  <a:lnTo>
+                    <a:pt x="6612382" y="972169"/>
+                  </a:lnTo>
+                  <a:lnTo>
+                    <a:pt x="6682726" y="974163"/>
+                  </a:lnTo>
+                  <a:lnTo>
+                    <a:pt x="6753071" y="976101"/>
+                  </a:lnTo>
+                  <a:lnTo>
+                    <a:pt x="6823415" y="977984"/>
+                  </a:lnTo>
+                  <a:lnTo>
+                    <a:pt x="6893760" y="979814"/>
+                  </a:lnTo>
+                  <a:lnTo>
+                    <a:pt x="6964104" y="981592"/>
                   </a:lnTo>
                 </a:path>
               </a:pathLst>
@@ -4594,27 +4629,27 @@
         </p:sp>
         <p:sp>
           <p:nvSpPr>
-            <p:cNvPr id="26" name="pl26"/>
+            <p:cNvPr id="27" name="pl27"/>
             <p:cNvSpPr/>
             <p:nvPr/>
           </p:nvSpPr>
           <p:spPr>
             <a:xfrm>
-              <a:off x="817517" y="4727786"/>
-              <a:ext cx="7799693" cy="0"/>
+              <a:off x="887106" y="3100960"/>
+              <a:ext cx="7660515" cy="0"/>
             </a:xfrm>
             <a:custGeom>
               <a:avLst/>
               <a:pathLst>
-                <a:path w="7799693" h="0">
+                <a:path w="7660515" h="0">
                   <a:moveTo>
                     <a:pt x="0" y="0"/>
                   </a:moveTo>
                   <a:lnTo>
-                    <a:pt x="7799693" y="0"/>
-                  </a:lnTo>
-                  <a:lnTo>
-                    <a:pt x="7799693" y="0"/>
+                    <a:pt x="7660515" y="0"/>
+                  </a:lnTo>
+                  <a:lnTo>
+                    <a:pt x="7660515" y="0"/>
                   </a:lnTo>
                 </a:path>
               </a:pathLst>
@@ -4637,21 +4672,21 @@
         </p:sp>
         <p:sp>
           <p:nvSpPr>
-            <p:cNvPr id="27" name="pl27"/>
+            <p:cNvPr id="28" name="pl28"/>
             <p:cNvSpPr/>
             <p:nvPr/>
           </p:nvSpPr>
           <p:spPr>
             <a:xfrm>
-              <a:off x="4293144" y="2073503"/>
-              <a:ext cx="0" cy="3649639"/>
+              <a:off x="4300713" y="2143092"/>
+              <a:ext cx="0" cy="1317069"/>
             </a:xfrm>
             <a:custGeom>
               <a:avLst/>
               <a:pathLst>
-                <a:path w="0" h="3649639">
+                <a:path w="0" h="1317069">
                   <a:moveTo>
-                    <a:pt x="0" y="3649639"/>
+                    <a:pt x="0" y="1317069"/>
                   </a:moveTo>
                   <a:lnTo>
                     <a:pt x="0" y="0"/>
@@ -4680,21 +4715,21 @@
         </p:sp>
         <p:sp>
           <p:nvSpPr>
-            <p:cNvPr id="28" name="pl28"/>
+            <p:cNvPr id="29" name="pl29"/>
             <p:cNvSpPr/>
             <p:nvPr/>
           </p:nvSpPr>
           <p:spPr>
             <a:xfrm>
-              <a:off x="3074393" y="2073503"/>
-              <a:ext cx="0" cy="3649639"/>
+              <a:off x="3103710" y="2143092"/>
+              <a:ext cx="0" cy="1317069"/>
             </a:xfrm>
             <a:custGeom>
               <a:avLst/>
               <a:pathLst>
-                <a:path w="0" h="3649639">
+                <a:path w="0" h="1317069">
                   <a:moveTo>
-                    <a:pt x="0" y="3649639"/>
+                    <a:pt x="0" y="1317069"/>
                   </a:moveTo>
                   <a:lnTo>
                     <a:pt x="0" y="0"/>
@@ -4723,21 +4758,21 @@
         </p:sp>
         <p:sp>
           <p:nvSpPr>
-            <p:cNvPr id="29" name="pl29"/>
+            <p:cNvPr id="30" name="pl30"/>
             <p:cNvSpPr/>
             <p:nvPr/>
           </p:nvSpPr>
           <p:spPr>
             <a:xfrm>
-              <a:off x="5518580" y="2073503"/>
-              <a:ext cx="0" cy="3649639"/>
+              <a:off x="5504283" y="2143092"/>
+              <a:ext cx="0" cy="1317069"/>
             </a:xfrm>
             <a:custGeom>
               <a:avLst/>
               <a:pathLst>
-                <a:path w="0" h="3649639">
+                <a:path w="0" h="1317069">
                   <a:moveTo>
-                    <a:pt x="0" y="3649639"/>
+                    <a:pt x="0" y="1317069"/>
                   </a:moveTo>
                   <a:lnTo>
                     <a:pt x="0" y="0"/>
@@ -4766,13 +4801,13 @@
         </p:sp>
         <p:sp>
           <p:nvSpPr>
-            <p:cNvPr id="30" name="tx30"/>
+            <p:cNvPr id="31" name="tx31"/>
             <p:cNvSpPr/>
             <p:nvPr/>
           </p:nvSpPr>
           <p:spPr>
             <a:xfrm>
-              <a:off x="692708" y="5517199"/>
+              <a:off x="762297" y="3360243"/>
               <a:ext cx="62179" cy="80101"/>
             </a:xfrm>
             <a:prstGeom prst="rect">
@@ -4812,13 +4847,13 @@
         </p:sp>
         <p:sp>
           <p:nvSpPr>
-            <p:cNvPr id="31" name="tx31"/>
+            <p:cNvPr id="32" name="tx32"/>
             <p:cNvSpPr/>
             <p:nvPr/>
           </p:nvSpPr>
           <p:spPr>
             <a:xfrm>
-              <a:off x="692708" y="4687735"/>
+              <a:off x="762297" y="3060909"/>
               <a:ext cx="62179" cy="80101"/>
             </a:xfrm>
             <a:prstGeom prst="rect">
@@ -4858,13 +4893,13 @@
         </p:sp>
         <p:sp>
           <p:nvSpPr>
-            <p:cNvPr id="32" name="tx32"/>
+            <p:cNvPr id="33" name="tx33"/>
             <p:cNvSpPr/>
             <p:nvPr/>
           </p:nvSpPr>
           <p:spPr>
             <a:xfrm>
-              <a:off x="692708" y="3858272"/>
+              <a:off x="762297" y="2761575"/>
               <a:ext cx="62179" cy="80101"/>
             </a:xfrm>
             <a:prstGeom prst="rect">
@@ -4904,13 +4939,13 @@
         </p:sp>
         <p:sp>
           <p:nvSpPr>
-            <p:cNvPr id="33" name="tx33"/>
+            <p:cNvPr id="34" name="tx34"/>
             <p:cNvSpPr/>
             <p:nvPr/>
           </p:nvSpPr>
           <p:spPr>
             <a:xfrm>
-              <a:off x="692708" y="3028808"/>
+              <a:off x="762297" y="2462242"/>
               <a:ext cx="62179" cy="80101"/>
             </a:xfrm>
             <a:prstGeom prst="rect">
@@ -4950,13 +4985,13 @@
         </p:sp>
         <p:sp>
           <p:nvSpPr>
-            <p:cNvPr id="34" name="tx34"/>
+            <p:cNvPr id="35" name="tx35"/>
             <p:cNvSpPr/>
             <p:nvPr/>
           </p:nvSpPr>
           <p:spPr>
             <a:xfrm>
-              <a:off x="692708" y="2199345"/>
+              <a:off x="762297" y="2162908"/>
               <a:ext cx="62179" cy="80101"/>
             </a:xfrm>
             <a:prstGeom prst="rect">
@@ -4996,13 +5031,13 @@
         </p:sp>
         <p:sp>
           <p:nvSpPr>
-            <p:cNvPr id="35" name="tx35"/>
+            <p:cNvPr id="36" name="tx36"/>
             <p:cNvSpPr/>
             <p:nvPr/>
           </p:nvSpPr>
           <p:spPr>
             <a:xfrm>
-              <a:off x="2134610" y="5785772"/>
+              <a:off x="2179256" y="3522791"/>
               <a:ext cx="161574" cy="80101"/>
             </a:xfrm>
             <a:prstGeom prst="rect">
@@ -5042,13 +5077,13 @@
         </p:sp>
         <p:sp>
           <p:nvSpPr>
-            <p:cNvPr id="36" name="tx36"/>
+            <p:cNvPr id="37" name="tx37"/>
             <p:cNvSpPr/>
             <p:nvPr/>
           </p:nvSpPr>
           <p:spPr>
             <a:xfrm>
-              <a:off x="3875731" y="5785772"/>
+              <a:off x="3889308" y="3522791"/>
               <a:ext cx="161574" cy="80101"/>
             </a:xfrm>
             <a:prstGeom prst="rect">
@@ -5088,13 +5123,13 @@
         </p:sp>
         <p:sp>
           <p:nvSpPr>
-            <p:cNvPr id="37" name="tx37"/>
+            <p:cNvPr id="38" name="tx38"/>
             <p:cNvSpPr/>
             <p:nvPr/>
           </p:nvSpPr>
           <p:spPr>
             <a:xfrm>
-              <a:off x="5666549" y="5785772"/>
+              <a:off x="5649057" y="3522791"/>
               <a:ext cx="62179" cy="80101"/>
             </a:xfrm>
             <a:prstGeom prst="rect">
@@ -5134,13 +5169,13 @@
         </p:sp>
         <p:sp>
           <p:nvSpPr>
-            <p:cNvPr id="38" name="tx38"/>
+            <p:cNvPr id="39" name="tx39"/>
             <p:cNvSpPr/>
             <p:nvPr/>
           </p:nvSpPr>
           <p:spPr>
             <a:xfrm>
-              <a:off x="7376580" y="5785772"/>
+              <a:off x="7328020" y="3522791"/>
               <a:ext cx="124358" cy="80101"/>
             </a:xfrm>
             <a:prstGeom prst="rect">
@@ -5180,13 +5215,13 @@
         </p:sp>
         <p:sp>
           <p:nvSpPr>
-            <p:cNvPr id="39" name="tx39"/>
+            <p:cNvPr id="40" name="tx40"/>
             <p:cNvSpPr/>
             <p:nvPr/>
           </p:nvSpPr>
           <p:spPr>
             <a:xfrm>
-              <a:off x="1561815" y="5925448"/>
+              <a:off x="1561815" y="3662467"/>
               <a:ext cx="6311097" cy="100218"/>
             </a:xfrm>
             <a:prstGeom prst="rect">
@@ -5226,13 +5261,13 @@
         </p:sp>
         <p:sp>
           <p:nvSpPr>
-            <p:cNvPr id="40" name="tx40"/>
+            <p:cNvPr id="41" name="tx41"/>
             <p:cNvSpPr/>
             <p:nvPr/>
           </p:nvSpPr>
           <p:spPr>
             <a:xfrm rot="-5400000">
-              <a:off x="68446" y="3848213"/>
+              <a:off x="138035" y="2751517"/>
               <a:ext cx="1016904" cy="100218"/>
             </a:xfrm>
             <a:prstGeom prst="rect">
@@ -5272,13 +5307,13 @@
         </p:sp>
         <p:sp>
           <p:nvSpPr>
-            <p:cNvPr id="41" name="tx41"/>
+            <p:cNvPr id="42" name="tx42"/>
             <p:cNvSpPr/>
             <p:nvPr/>
           </p:nvSpPr>
           <p:spPr>
             <a:xfrm>
-              <a:off x="817517" y="1896563"/>
+              <a:off x="887106" y="1966152"/>
               <a:ext cx="7026615" cy="82021"/>
             </a:xfrm>
             <a:prstGeom prst="rect">
@@ -5318,13 +5353,3729 @@
         </p:sp>
         <p:sp>
           <p:nvSpPr>
-            <p:cNvPr id="42" name="tx42"/>
+            <p:cNvPr id="43" name="tx43"/>
             <p:cNvSpPr/>
             <p:nvPr/>
           </p:nvSpPr>
           <p:spPr>
             <a:xfrm>
-              <a:off x="817517" y="1669789"/>
+              <a:off x="887106" y="1739378"/>
+              <a:ext cx="4346874" cy="120152"/>
+            </a:xfrm>
+            <a:prstGeom prst="rect">
+              <a:avLst/>
+            </a:prstGeom>
+            <a:noFill/>
+          </p:spPr>
+          <p:txBody>
+            <a:bodyPr lIns="0" rIns="0" tIns="0" bIns="0" anchorCtr="1" anchor="ctr" wrap="none"/>
+            <a:lstStyle/>
+            <a:p>
+              <a:pPr algn="l" marL="0" marR="0" indent="0">
+                <a:lnSpc>
+                  <a:spcPts val="1320"/>
+                </a:lnSpc>
+                <a:spcBef>
+                  <a:spcPts val="0"/>
+                </a:spcBef>
+                <a:spcAft>
+                  <a:spcPts val="0"/>
+                </a:spcAft>
+              </a:pPr>
+              <a:r>
+                <a:rPr sz="1320">
+                  <a:solidFill>
+                    <a:srgbClr val="000000">
+                      <a:alpha val="100000"/>
+                    </a:srgbClr>
+                  </a:solidFill>
+                  <a:latin typeface="Helvetica"/>
+                  <a:cs typeface="Helvetica"/>
+                </a:rPr>
+                <a:t>Composite Grade 3 AEs (Sensitivity, Carboplatin AUC ≥ 3)</a:t>
+              </a:r>
+            </a:p>
+          </p:txBody>
+        </p:sp>
+        <p:sp>
+          <p:nvSpPr>
+            <p:cNvPr id="44" name="pl44"/>
+            <p:cNvSpPr/>
+            <p:nvPr/>
+          </p:nvSpPr>
+          <p:spPr>
+            <a:xfrm>
+              <a:off x="887106" y="5444019"/>
+              <a:ext cx="7660515" cy="0"/>
+            </a:xfrm>
+            <a:custGeom>
+              <a:avLst/>
+              <a:pathLst>
+                <a:path w="7660515" h="0">
+                  <a:moveTo>
+                    <a:pt x="0" y="0"/>
+                  </a:moveTo>
+                  <a:lnTo>
+                    <a:pt x="7660515" y="0"/>
+                  </a:lnTo>
+                  <a:lnTo>
+                    <a:pt x="7660515" y="0"/>
+                  </a:lnTo>
+                </a:path>
+              </a:pathLst>
+            </a:custGeom>
+            <a:ln w="6775" cap="flat">
+              <a:solidFill>
+                <a:srgbClr val="EBEBEB">
+                  <a:alpha val="100000"/>
+                </a:srgbClr>
+              </a:solidFill>
+              <a:prstDash val="solid"/>
+              <a:round/>
+            </a:ln>
+          </p:spPr>
+          <p:txBody>
+            <a:bodyPr/>
+            <a:lstStyle/>
+            <a:p/>
+          </p:txBody>
+        </p:sp>
+        <p:sp>
+          <p:nvSpPr>
+            <p:cNvPr id="45" name="pl45"/>
+            <p:cNvSpPr/>
+            <p:nvPr/>
+          </p:nvSpPr>
+          <p:spPr>
+            <a:xfrm>
+              <a:off x="887106" y="5144686"/>
+              <a:ext cx="7660515" cy="0"/>
+            </a:xfrm>
+            <a:custGeom>
+              <a:avLst/>
+              <a:pathLst>
+                <a:path w="7660515" h="0">
+                  <a:moveTo>
+                    <a:pt x="0" y="0"/>
+                  </a:moveTo>
+                  <a:lnTo>
+                    <a:pt x="7660515" y="0"/>
+                  </a:lnTo>
+                  <a:lnTo>
+                    <a:pt x="7660515" y="0"/>
+                  </a:lnTo>
+                </a:path>
+              </a:pathLst>
+            </a:custGeom>
+            <a:ln w="6775" cap="flat">
+              <a:solidFill>
+                <a:srgbClr val="EBEBEB">
+                  <a:alpha val="100000"/>
+                </a:srgbClr>
+              </a:solidFill>
+              <a:prstDash val="solid"/>
+              <a:round/>
+            </a:ln>
+          </p:spPr>
+          <p:txBody>
+            <a:bodyPr/>
+            <a:lstStyle/>
+            <a:p/>
+          </p:txBody>
+        </p:sp>
+        <p:sp>
+          <p:nvSpPr>
+            <p:cNvPr id="46" name="pl46"/>
+            <p:cNvSpPr/>
+            <p:nvPr/>
+          </p:nvSpPr>
+          <p:spPr>
+            <a:xfrm>
+              <a:off x="887106" y="4845352"/>
+              <a:ext cx="7660515" cy="0"/>
+            </a:xfrm>
+            <a:custGeom>
+              <a:avLst/>
+              <a:pathLst>
+                <a:path w="7660515" h="0">
+                  <a:moveTo>
+                    <a:pt x="0" y="0"/>
+                  </a:moveTo>
+                  <a:lnTo>
+                    <a:pt x="7660515" y="0"/>
+                  </a:lnTo>
+                  <a:lnTo>
+                    <a:pt x="7660515" y="0"/>
+                  </a:lnTo>
+                </a:path>
+              </a:pathLst>
+            </a:custGeom>
+            <a:ln w="6775" cap="flat">
+              <a:solidFill>
+                <a:srgbClr val="EBEBEB">
+                  <a:alpha val="100000"/>
+                </a:srgbClr>
+              </a:solidFill>
+              <a:prstDash val="solid"/>
+              <a:round/>
+            </a:ln>
+          </p:spPr>
+          <p:txBody>
+            <a:bodyPr/>
+            <a:lstStyle/>
+            <a:p/>
+          </p:txBody>
+        </p:sp>
+        <p:sp>
+          <p:nvSpPr>
+            <p:cNvPr id="47" name="pl47"/>
+            <p:cNvSpPr/>
+            <p:nvPr/>
+          </p:nvSpPr>
+          <p:spPr>
+            <a:xfrm>
+              <a:off x="887106" y="4546018"/>
+              <a:ext cx="7660515" cy="0"/>
+            </a:xfrm>
+            <a:custGeom>
+              <a:avLst/>
+              <a:pathLst>
+                <a:path w="7660515" h="0">
+                  <a:moveTo>
+                    <a:pt x="0" y="0"/>
+                  </a:moveTo>
+                  <a:lnTo>
+                    <a:pt x="7660515" y="0"/>
+                  </a:lnTo>
+                  <a:lnTo>
+                    <a:pt x="7660515" y="0"/>
+                  </a:lnTo>
+                </a:path>
+              </a:pathLst>
+            </a:custGeom>
+            <a:ln w="6775" cap="flat">
+              <a:solidFill>
+                <a:srgbClr val="EBEBEB">
+                  <a:alpha val="100000"/>
+                </a:srgbClr>
+              </a:solidFill>
+              <a:prstDash val="solid"/>
+              <a:round/>
+            </a:ln>
+          </p:spPr>
+          <p:txBody>
+            <a:bodyPr/>
+            <a:lstStyle/>
+            <a:p/>
+          </p:txBody>
+        </p:sp>
+        <p:sp>
+          <p:nvSpPr>
+            <p:cNvPr id="48" name="pl48"/>
+            <p:cNvSpPr/>
+            <p:nvPr/>
+          </p:nvSpPr>
+          <p:spPr>
+            <a:xfrm>
+              <a:off x="977504" y="4336484"/>
+              <a:ext cx="0" cy="1317069"/>
+            </a:xfrm>
+            <a:custGeom>
+              <a:avLst/>
+              <a:pathLst>
+                <a:path w="0" h="1317069">
+                  <a:moveTo>
+                    <a:pt x="0" y="1317069"/>
+                  </a:moveTo>
+                  <a:lnTo>
+                    <a:pt x="0" y="0"/>
+                  </a:lnTo>
+                  <a:lnTo>
+                    <a:pt x="0" y="0"/>
+                  </a:lnTo>
+                </a:path>
+              </a:pathLst>
+            </a:custGeom>
+            <a:ln w="6775" cap="flat">
+              <a:solidFill>
+                <a:srgbClr val="EBEBEB">
+                  <a:alpha val="100000"/>
+                </a:srgbClr>
+              </a:solidFill>
+              <a:prstDash val="solid"/>
+              <a:round/>
+            </a:ln>
+          </p:spPr>
+          <p:txBody>
+            <a:bodyPr/>
+            <a:lstStyle/>
+            <a:p/>
+          </p:txBody>
+        </p:sp>
+        <p:sp>
+          <p:nvSpPr>
+            <p:cNvPr id="49" name="pl49"/>
+            <p:cNvSpPr/>
+            <p:nvPr/>
+          </p:nvSpPr>
+          <p:spPr>
+            <a:xfrm>
+              <a:off x="1832530" y="4336484"/>
+              <a:ext cx="0" cy="1317069"/>
+            </a:xfrm>
+            <a:custGeom>
+              <a:avLst/>
+              <a:pathLst>
+                <a:path w="0" h="1317069">
+                  <a:moveTo>
+                    <a:pt x="0" y="1317069"/>
+                  </a:moveTo>
+                  <a:lnTo>
+                    <a:pt x="0" y="0"/>
+                  </a:lnTo>
+                  <a:lnTo>
+                    <a:pt x="0" y="0"/>
+                  </a:lnTo>
+                </a:path>
+              </a:pathLst>
+            </a:custGeom>
+            <a:ln w="6775" cap="flat">
+              <a:solidFill>
+                <a:srgbClr val="EBEBEB">
+                  <a:alpha val="100000"/>
+                </a:srgbClr>
+              </a:solidFill>
+              <a:prstDash val="solid"/>
+              <a:round/>
+            </a:ln>
+          </p:spPr>
+          <p:txBody>
+            <a:bodyPr/>
+            <a:lstStyle/>
+            <a:p/>
+          </p:txBody>
+        </p:sp>
+        <p:sp>
+          <p:nvSpPr>
+            <p:cNvPr id="50" name="pl50"/>
+            <p:cNvSpPr/>
+            <p:nvPr/>
+          </p:nvSpPr>
+          <p:spPr>
+            <a:xfrm>
+              <a:off x="2687556" y="4336484"/>
+              <a:ext cx="0" cy="1317069"/>
+            </a:xfrm>
+            <a:custGeom>
+              <a:avLst/>
+              <a:pathLst>
+                <a:path w="0" h="1317069">
+                  <a:moveTo>
+                    <a:pt x="0" y="1317069"/>
+                  </a:moveTo>
+                  <a:lnTo>
+                    <a:pt x="0" y="0"/>
+                  </a:lnTo>
+                  <a:lnTo>
+                    <a:pt x="0" y="0"/>
+                  </a:lnTo>
+                </a:path>
+              </a:pathLst>
+            </a:custGeom>
+            <a:ln w="6775" cap="flat">
+              <a:solidFill>
+                <a:srgbClr val="EBEBEB">
+                  <a:alpha val="100000"/>
+                </a:srgbClr>
+              </a:solidFill>
+              <a:prstDash val="solid"/>
+              <a:round/>
+            </a:ln>
+          </p:spPr>
+          <p:txBody>
+            <a:bodyPr/>
+            <a:lstStyle/>
+            <a:p/>
+          </p:txBody>
+        </p:sp>
+        <p:sp>
+          <p:nvSpPr>
+            <p:cNvPr id="51" name="pl51"/>
+            <p:cNvSpPr/>
+            <p:nvPr/>
+          </p:nvSpPr>
+          <p:spPr>
+            <a:xfrm>
+              <a:off x="3542582" y="4336484"/>
+              <a:ext cx="0" cy="1317069"/>
+            </a:xfrm>
+            <a:custGeom>
+              <a:avLst/>
+              <a:pathLst>
+                <a:path w="0" h="1317069">
+                  <a:moveTo>
+                    <a:pt x="0" y="1317069"/>
+                  </a:moveTo>
+                  <a:lnTo>
+                    <a:pt x="0" y="0"/>
+                  </a:lnTo>
+                  <a:lnTo>
+                    <a:pt x="0" y="0"/>
+                  </a:lnTo>
+                </a:path>
+              </a:pathLst>
+            </a:custGeom>
+            <a:ln w="6775" cap="flat">
+              <a:solidFill>
+                <a:srgbClr val="EBEBEB">
+                  <a:alpha val="100000"/>
+                </a:srgbClr>
+              </a:solidFill>
+              <a:prstDash val="solid"/>
+              <a:round/>
+            </a:ln>
+          </p:spPr>
+          <p:txBody>
+            <a:bodyPr/>
+            <a:lstStyle/>
+            <a:p/>
+          </p:txBody>
+        </p:sp>
+        <p:sp>
+          <p:nvSpPr>
+            <p:cNvPr id="52" name="pl52"/>
+            <p:cNvSpPr/>
+            <p:nvPr/>
+          </p:nvSpPr>
+          <p:spPr>
+            <a:xfrm>
+              <a:off x="4397608" y="4336484"/>
+              <a:ext cx="0" cy="1317069"/>
+            </a:xfrm>
+            <a:custGeom>
+              <a:avLst/>
+              <a:pathLst>
+                <a:path w="0" h="1317069">
+                  <a:moveTo>
+                    <a:pt x="0" y="1317069"/>
+                  </a:moveTo>
+                  <a:lnTo>
+                    <a:pt x="0" y="0"/>
+                  </a:lnTo>
+                  <a:lnTo>
+                    <a:pt x="0" y="0"/>
+                  </a:lnTo>
+                </a:path>
+              </a:pathLst>
+            </a:custGeom>
+            <a:ln w="6775" cap="flat">
+              <a:solidFill>
+                <a:srgbClr val="EBEBEB">
+                  <a:alpha val="100000"/>
+                </a:srgbClr>
+              </a:solidFill>
+              <a:prstDash val="solid"/>
+              <a:round/>
+            </a:ln>
+          </p:spPr>
+          <p:txBody>
+            <a:bodyPr/>
+            <a:lstStyle/>
+            <a:p/>
+          </p:txBody>
+        </p:sp>
+        <p:sp>
+          <p:nvSpPr>
+            <p:cNvPr id="53" name="pl53"/>
+            <p:cNvSpPr/>
+            <p:nvPr/>
+          </p:nvSpPr>
+          <p:spPr>
+            <a:xfrm>
+              <a:off x="5252634" y="4336484"/>
+              <a:ext cx="0" cy="1317069"/>
+            </a:xfrm>
+            <a:custGeom>
+              <a:avLst/>
+              <a:pathLst>
+                <a:path w="0" h="1317069">
+                  <a:moveTo>
+                    <a:pt x="0" y="1317069"/>
+                  </a:moveTo>
+                  <a:lnTo>
+                    <a:pt x="0" y="0"/>
+                  </a:lnTo>
+                  <a:lnTo>
+                    <a:pt x="0" y="0"/>
+                  </a:lnTo>
+                </a:path>
+              </a:pathLst>
+            </a:custGeom>
+            <a:ln w="6775" cap="flat">
+              <a:solidFill>
+                <a:srgbClr val="EBEBEB">
+                  <a:alpha val="100000"/>
+                </a:srgbClr>
+              </a:solidFill>
+              <a:prstDash val="solid"/>
+              <a:round/>
+            </a:ln>
+          </p:spPr>
+          <p:txBody>
+            <a:bodyPr/>
+            <a:lstStyle/>
+            <a:p/>
+          </p:txBody>
+        </p:sp>
+        <p:sp>
+          <p:nvSpPr>
+            <p:cNvPr id="54" name="pl54"/>
+            <p:cNvSpPr/>
+            <p:nvPr/>
+          </p:nvSpPr>
+          <p:spPr>
+            <a:xfrm>
+              <a:off x="6107660" y="4336484"/>
+              <a:ext cx="0" cy="1317069"/>
+            </a:xfrm>
+            <a:custGeom>
+              <a:avLst/>
+              <a:pathLst>
+                <a:path w="0" h="1317069">
+                  <a:moveTo>
+                    <a:pt x="0" y="1317069"/>
+                  </a:moveTo>
+                  <a:lnTo>
+                    <a:pt x="0" y="0"/>
+                  </a:lnTo>
+                  <a:lnTo>
+                    <a:pt x="0" y="0"/>
+                  </a:lnTo>
+                </a:path>
+              </a:pathLst>
+            </a:custGeom>
+            <a:ln w="6775" cap="flat">
+              <a:solidFill>
+                <a:srgbClr val="EBEBEB">
+                  <a:alpha val="100000"/>
+                </a:srgbClr>
+              </a:solidFill>
+              <a:prstDash val="solid"/>
+              <a:round/>
+            </a:ln>
+          </p:spPr>
+          <p:txBody>
+            <a:bodyPr/>
+            <a:lstStyle/>
+            <a:p/>
+          </p:txBody>
+        </p:sp>
+        <p:sp>
+          <p:nvSpPr>
+            <p:cNvPr id="55" name="pl55"/>
+            <p:cNvSpPr/>
+            <p:nvPr/>
+          </p:nvSpPr>
+          <p:spPr>
+            <a:xfrm>
+              <a:off x="6962686" y="4336484"/>
+              <a:ext cx="0" cy="1317069"/>
+            </a:xfrm>
+            <a:custGeom>
+              <a:avLst/>
+              <a:pathLst>
+                <a:path w="0" h="1317069">
+                  <a:moveTo>
+                    <a:pt x="0" y="1317069"/>
+                  </a:moveTo>
+                  <a:lnTo>
+                    <a:pt x="0" y="0"/>
+                  </a:lnTo>
+                  <a:lnTo>
+                    <a:pt x="0" y="0"/>
+                  </a:lnTo>
+                </a:path>
+              </a:pathLst>
+            </a:custGeom>
+            <a:ln w="6775" cap="flat">
+              <a:solidFill>
+                <a:srgbClr val="EBEBEB">
+                  <a:alpha val="100000"/>
+                </a:srgbClr>
+              </a:solidFill>
+              <a:prstDash val="solid"/>
+              <a:round/>
+            </a:ln>
+          </p:spPr>
+          <p:txBody>
+            <a:bodyPr/>
+            <a:lstStyle/>
+            <a:p/>
+          </p:txBody>
+        </p:sp>
+        <p:sp>
+          <p:nvSpPr>
+            <p:cNvPr id="56" name="pl56"/>
+            <p:cNvSpPr/>
+            <p:nvPr/>
+          </p:nvSpPr>
+          <p:spPr>
+            <a:xfrm>
+              <a:off x="7817712" y="4336484"/>
+              <a:ext cx="0" cy="1317069"/>
+            </a:xfrm>
+            <a:custGeom>
+              <a:avLst/>
+              <a:pathLst>
+                <a:path w="0" h="1317069">
+                  <a:moveTo>
+                    <a:pt x="0" y="1317069"/>
+                  </a:moveTo>
+                  <a:lnTo>
+                    <a:pt x="0" y="0"/>
+                  </a:lnTo>
+                  <a:lnTo>
+                    <a:pt x="0" y="0"/>
+                  </a:lnTo>
+                </a:path>
+              </a:pathLst>
+            </a:custGeom>
+            <a:ln w="6775" cap="flat">
+              <a:solidFill>
+                <a:srgbClr val="EBEBEB">
+                  <a:alpha val="100000"/>
+                </a:srgbClr>
+              </a:solidFill>
+              <a:prstDash val="solid"/>
+              <a:round/>
+            </a:ln>
+          </p:spPr>
+          <p:txBody>
+            <a:bodyPr/>
+            <a:lstStyle/>
+            <a:p/>
+          </p:txBody>
+        </p:sp>
+        <p:sp>
+          <p:nvSpPr>
+            <p:cNvPr id="57" name="pl57"/>
+            <p:cNvSpPr/>
+            <p:nvPr/>
+          </p:nvSpPr>
+          <p:spPr>
+            <a:xfrm>
+              <a:off x="887106" y="5593686"/>
+              <a:ext cx="7660515" cy="0"/>
+            </a:xfrm>
+            <a:custGeom>
+              <a:avLst/>
+              <a:pathLst>
+                <a:path w="7660515" h="0">
+                  <a:moveTo>
+                    <a:pt x="0" y="0"/>
+                  </a:moveTo>
+                  <a:lnTo>
+                    <a:pt x="7660515" y="0"/>
+                  </a:lnTo>
+                  <a:lnTo>
+                    <a:pt x="7660515" y="0"/>
+                  </a:lnTo>
+                </a:path>
+              </a:pathLst>
+            </a:custGeom>
+            <a:ln w="13550" cap="flat">
+              <a:solidFill>
+                <a:srgbClr val="EBEBEB">
+                  <a:alpha val="100000"/>
+                </a:srgbClr>
+              </a:solidFill>
+              <a:prstDash val="solid"/>
+              <a:round/>
+            </a:ln>
+          </p:spPr>
+          <p:txBody>
+            <a:bodyPr/>
+            <a:lstStyle/>
+            <a:p/>
+          </p:txBody>
+        </p:sp>
+        <p:sp>
+          <p:nvSpPr>
+            <p:cNvPr id="58" name="pl58"/>
+            <p:cNvSpPr/>
+            <p:nvPr/>
+          </p:nvSpPr>
+          <p:spPr>
+            <a:xfrm>
+              <a:off x="887106" y="5294352"/>
+              <a:ext cx="7660515" cy="0"/>
+            </a:xfrm>
+            <a:custGeom>
+              <a:avLst/>
+              <a:pathLst>
+                <a:path w="7660515" h="0">
+                  <a:moveTo>
+                    <a:pt x="0" y="0"/>
+                  </a:moveTo>
+                  <a:lnTo>
+                    <a:pt x="7660515" y="0"/>
+                  </a:lnTo>
+                  <a:lnTo>
+                    <a:pt x="7660515" y="0"/>
+                  </a:lnTo>
+                </a:path>
+              </a:pathLst>
+            </a:custGeom>
+            <a:ln w="13550" cap="flat">
+              <a:solidFill>
+                <a:srgbClr val="EBEBEB">
+                  <a:alpha val="100000"/>
+                </a:srgbClr>
+              </a:solidFill>
+              <a:prstDash val="solid"/>
+              <a:round/>
+            </a:ln>
+          </p:spPr>
+          <p:txBody>
+            <a:bodyPr/>
+            <a:lstStyle/>
+            <a:p/>
+          </p:txBody>
+        </p:sp>
+        <p:sp>
+          <p:nvSpPr>
+            <p:cNvPr id="59" name="pl59"/>
+            <p:cNvSpPr/>
+            <p:nvPr/>
+          </p:nvSpPr>
+          <p:spPr>
+            <a:xfrm>
+              <a:off x="887106" y="4995019"/>
+              <a:ext cx="7660515" cy="0"/>
+            </a:xfrm>
+            <a:custGeom>
+              <a:avLst/>
+              <a:pathLst>
+                <a:path w="7660515" h="0">
+                  <a:moveTo>
+                    <a:pt x="0" y="0"/>
+                  </a:moveTo>
+                  <a:lnTo>
+                    <a:pt x="7660515" y="0"/>
+                  </a:lnTo>
+                  <a:lnTo>
+                    <a:pt x="7660515" y="0"/>
+                  </a:lnTo>
+                </a:path>
+              </a:pathLst>
+            </a:custGeom>
+            <a:ln w="13550" cap="flat">
+              <a:solidFill>
+                <a:srgbClr val="EBEBEB">
+                  <a:alpha val="100000"/>
+                </a:srgbClr>
+              </a:solidFill>
+              <a:prstDash val="solid"/>
+              <a:round/>
+            </a:ln>
+          </p:spPr>
+          <p:txBody>
+            <a:bodyPr/>
+            <a:lstStyle/>
+            <a:p/>
+          </p:txBody>
+        </p:sp>
+        <p:sp>
+          <p:nvSpPr>
+            <p:cNvPr id="60" name="pl60"/>
+            <p:cNvSpPr/>
+            <p:nvPr/>
+          </p:nvSpPr>
+          <p:spPr>
+            <a:xfrm>
+              <a:off x="887106" y="4695685"/>
+              <a:ext cx="7660515" cy="0"/>
+            </a:xfrm>
+            <a:custGeom>
+              <a:avLst/>
+              <a:pathLst>
+                <a:path w="7660515" h="0">
+                  <a:moveTo>
+                    <a:pt x="0" y="0"/>
+                  </a:moveTo>
+                  <a:lnTo>
+                    <a:pt x="7660515" y="0"/>
+                  </a:lnTo>
+                  <a:lnTo>
+                    <a:pt x="7660515" y="0"/>
+                  </a:lnTo>
+                </a:path>
+              </a:pathLst>
+            </a:custGeom>
+            <a:ln w="13550" cap="flat">
+              <a:solidFill>
+                <a:srgbClr val="EBEBEB">
+                  <a:alpha val="100000"/>
+                </a:srgbClr>
+              </a:solidFill>
+              <a:prstDash val="solid"/>
+              <a:round/>
+            </a:ln>
+          </p:spPr>
+          <p:txBody>
+            <a:bodyPr/>
+            <a:lstStyle/>
+            <a:p/>
+          </p:txBody>
+        </p:sp>
+        <p:sp>
+          <p:nvSpPr>
+            <p:cNvPr id="61" name="pl61"/>
+            <p:cNvSpPr/>
+            <p:nvPr/>
+          </p:nvSpPr>
+          <p:spPr>
+            <a:xfrm>
+              <a:off x="887106" y="4396351"/>
+              <a:ext cx="7660515" cy="0"/>
+            </a:xfrm>
+            <a:custGeom>
+              <a:avLst/>
+              <a:pathLst>
+                <a:path w="7660515" h="0">
+                  <a:moveTo>
+                    <a:pt x="0" y="0"/>
+                  </a:moveTo>
+                  <a:lnTo>
+                    <a:pt x="7660515" y="0"/>
+                  </a:lnTo>
+                  <a:lnTo>
+                    <a:pt x="7660515" y="0"/>
+                  </a:lnTo>
+                </a:path>
+              </a:pathLst>
+            </a:custGeom>
+            <a:ln w="13550" cap="flat">
+              <a:solidFill>
+                <a:srgbClr val="EBEBEB">
+                  <a:alpha val="100000"/>
+                </a:srgbClr>
+              </a:solidFill>
+              <a:prstDash val="solid"/>
+              <a:round/>
+            </a:ln>
+          </p:spPr>
+          <p:txBody>
+            <a:bodyPr/>
+            <a:lstStyle/>
+            <a:p/>
+          </p:txBody>
+        </p:sp>
+        <p:sp>
+          <p:nvSpPr>
+            <p:cNvPr id="62" name="pl62"/>
+            <p:cNvSpPr/>
+            <p:nvPr/>
+          </p:nvSpPr>
+          <p:spPr>
+            <a:xfrm>
+              <a:off x="1405017" y="4336484"/>
+              <a:ext cx="0" cy="1317069"/>
+            </a:xfrm>
+            <a:custGeom>
+              <a:avLst/>
+              <a:pathLst>
+                <a:path w="0" h="1317069">
+                  <a:moveTo>
+                    <a:pt x="0" y="1317069"/>
+                  </a:moveTo>
+                  <a:lnTo>
+                    <a:pt x="0" y="0"/>
+                  </a:lnTo>
+                  <a:lnTo>
+                    <a:pt x="0" y="0"/>
+                  </a:lnTo>
+                </a:path>
+              </a:pathLst>
+            </a:custGeom>
+            <a:ln w="13550" cap="flat">
+              <a:solidFill>
+                <a:srgbClr val="EBEBEB">
+                  <a:alpha val="100000"/>
+                </a:srgbClr>
+              </a:solidFill>
+              <a:prstDash val="solid"/>
+              <a:round/>
+            </a:ln>
+          </p:spPr>
+          <p:txBody>
+            <a:bodyPr/>
+            <a:lstStyle/>
+            <a:p/>
+          </p:txBody>
+        </p:sp>
+        <p:sp>
+          <p:nvSpPr>
+            <p:cNvPr id="63" name="pl63"/>
+            <p:cNvSpPr/>
+            <p:nvPr/>
+          </p:nvSpPr>
+          <p:spPr>
+            <a:xfrm>
+              <a:off x="2260043" y="4336484"/>
+              <a:ext cx="0" cy="1317069"/>
+            </a:xfrm>
+            <a:custGeom>
+              <a:avLst/>
+              <a:pathLst>
+                <a:path w="0" h="1317069">
+                  <a:moveTo>
+                    <a:pt x="0" y="1317069"/>
+                  </a:moveTo>
+                  <a:lnTo>
+                    <a:pt x="0" y="0"/>
+                  </a:lnTo>
+                  <a:lnTo>
+                    <a:pt x="0" y="0"/>
+                  </a:lnTo>
+                </a:path>
+              </a:pathLst>
+            </a:custGeom>
+            <a:ln w="13550" cap="flat">
+              <a:solidFill>
+                <a:srgbClr val="EBEBEB">
+                  <a:alpha val="100000"/>
+                </a:srgbClr>
+              </a:solidFill>
+              <a:prstDash val="solid"/>
+              <a:round/>
+            </a:ln>
+          </p:spPr>
+          <p:txBody>
+            <a:bodyPr/>
+            <a:lstStyle/>
+            <a:p/>
+          </p:txBody>
+        </p:sp>
+        <p:sp>
+          <p:nvSpPr>
+            <p:cNvPr id="64" name="pl64"/>
+            <p:cNvSpPr/>
+            <p:nvPr/>
+          </p:nvSpPr>
+          <p:spPr>
+            <a:xfrm>
+              <a:off x="3115069" y="4336484"/>
+              <a:ext cx="0" cy="1317069"/>
+            </a:xfrm>
+            <a:custGeom>
+              <a:avLst/>
+              <a:pathLst>
+                <a:path w="0" h="1317069">
+                  <a:moveTo>
+                    <a:pt x="0" y="1317069"/>
+                  </a:moveTo>
+                  <a:lnTo>
+                    <a:pt x="0" y="0"/>
+                  </a:lnTo>
+                  <a:lnTo>
+                    <a:pt x="0" y="0"/>
+                  </a:lnTo>
+                </a:path>
+              </a:pathLst>
+            </a:custGeom>
+            <a:ln w="13550" cap="flat">
+              <a:solidFill>
+                <a:srgbClr val="EBEBEB">
+                  <a:alpha val="100000"/>
+                </a:srgbClr>
+              </a:solidFill>
+              <a:prstDash val="solid"/>
+              <a:round/>
+            </a:ln>
+          </p:spPr>
+          <p:txBody>
+            <a:bodyPr/>
+            <a:lstStyle/>
+            <a:p/>
+          </p:txBody>
+        </p:sp>
+        <p:sp>
+          <p:nvSpPr>
+            <p:cNvPr id="65" name="pl65"/>
+            <p:cNvSpPr/>
+            <p:nvPr/>
+          </p:nvSpPr>
+          <p:spPr>
+            <a:xfrm>
+              <a:off x="3970095" y="4336484"/>
+              <a:ext cx="0" cy="1317069"/>
+            </a:xfrm>
+            <a:custGeom>
+              <a:avLst/>
+              <a:pathLst>
+                <a:path w="0" h="1317069">
+                  <a:moveTo>
+                    <a:pt x="0" y="1317069"/>
+                  </a:moveTo>
+                  <a:lnTo>
+                    <a:pt x="0" y="0"/>
+                  </a:lnTo>
+                  <a:lnTo>
+                    <a:pt x="0" y="0"/>
+                  </a:lnTo>
+                </a:path>
+              </a:pathLst>
+            </a:custGeom>
+            <a:ln w="13550" cap="flat">
+              <a:solidFill>
+                <a:srgbClr val="EBEBEB">
+                  <a:alpha val="100000"/>
+                </a:srgbClr>
+              </a:solidFill>
+              <a:prstDash val="solid"/>
+              <a:round/>
+            </a:ln>
+          </p:spPr>
+          <p:txBody>
+            <a:bodyPr/>
+            <a:lstStyle/>
+            <a:p/>
+          </p:txBody>
+        </p:sp>
+        <p:sp>
+          <p:nvSpPr>
+            <p:cNvPr id="66" name="pl66"/>
+            <p:cNvSpPr/>
+            <p:nvPr/>
+          </p:nvSpPr>
+          <p:spPr>
+            <a:xfrm>
+              <a:off x="4825121" y="4336484"/>
+              <a:ext cx="0" cy="1317069"/>
+            </a:xfrm>
+            <a:custGeom>
+              <a:avLst/>
+              <a:pathLst>
+                <a:path w="0" h="1317069">
+                  <a:moveTo>
+                    <a:pt x="0" y="1317069"/>
+                  </a:moveTo>
+                  <a:lnTo>
+                    <a:pt x="0" y="0"/>
+                  </a:lnTo>
+                  <a:lnTo>
+                    <a:pt x="0" y="0"/>
+                  </a:lnTo>
+                </a:path>
+              </a:pathLst>
+            </a:custGeom>
+            <a:ln w="13550" cap="flat">
+              <a:solidFill>
+                <a:srgbClr val="EBEBEB">
+                  <a:alpha val="100000"/>
+                </a:srgbClr>
+              </a:solidFill>
+              <a:prstDash val="solid"/>
+              <a:round/>
+            </a:ln>
+          </p:spPr>
+          <p:txBody>
+            <a:bodyPr/>
+            <a:lstStyle/>
+            <a:p/>
+          </p:txBody>
+        </p:sp>
+        <p:sp>
+          <p:nvSpPr>
+            <p:cNvPr id="67" name="pl67"/>
+            <p:cNvSpPr/>
+            <p:nvPr/>
+          </p:nvSpPr>
+          <p:spPr>
+            <a:xfrm>
+              <a:off x="5680147" y="4336484"/>
+              <a:ext cx="0" cy="1317069"/>
+            </a:xfrm>
+            <a:custGeom>
+              <a:avLst/>
+              <a:pathLst>
+                <a:path w="0" h="1317069">
+                  <a:moveTo>
+                    <a:pt x="0" y="1317069"/>
+                  </a:moveTo>
+                  <a:lnTo>
+                    <a:pt x="0" y="0"/>
+                  </a:lnTo>
+                  <a:lnTo>
+                    <a:pt x="0" y="0"/>
+                  </a:lnTo>
+                </a:path>
+              </a:pathLst>
+            </a:custGeom>
+            <a:ln w="13550" cap="flat">
+              <a:solidFill>
+                <a:srgbClr val="EBEBEB">
+                  <a:alpha val="100000"/>
+                </a:srgbClr>
+              </a:solidFill>
+              <a:prstDash val="solid"/>
+              <a:round/>
+            </a:ln>
+          </p:spPr>
+          <p:txBody>
+            <a:bodyPr/>
+            <a:lstStyle/>
+            <a:p/>
+          </p:txBody>
+        </p:sp>
+        <p:sp>
+          <p:nvSpPr>
+            <p:cNvPr id="68" name="pl68"/>
+            <p:cNvSpPr/>
+            <p:nvPr/>
+          </p:nvSpPr>
+          <p:spPr>
+            <a:xfrm>
+              <a:off x="6535173" y="4336484"/>
+              <a:ext cx="0" cy="1317069"/>
+            </a:xfrm>
+            <a:custGeom>
+              <a:avLst/>
+              <a:pathLst>
+                <a:path w="0" h="1317069">
+                  <a:moveTo>
+                    <a:pt x="0" y="1317069"/>
+                  </a:moveTo>
+                  <a:lnTo>
+                    <a:pt x="0" y="0"/>
+                  </a:lnTo>
+                  <a:lnTo>
+                    <a:pt x="0" y="0"/>
+                  </a:lnTo>
+                </a:path>
+              </a:pathLst>
+            </a:custGeom>
+            <a:ln w="13550" cap="flat">
+              <a:solidFill>
+                <a:srgbClr val="EBEBEB">
+                  <a:alpha val="100000"/>
+                </a:srgbClr>
+              </a:solidFill>
+              <a:prstDash val="solid"/>
+              <a:round/>
+            </a:ln>
+          </p:spPr>
+          <p:txBody>
+            <a:bodyPr/>
+            <a:lstStyle/>
+            <a:p/>
+          </p:txBody>
+        </p:sp>
+        <p:sp>
+          <p:nvSpPr>
+            <p:cNvPr id="69" name="pl69"/>
+            <p:cNvSpPr/>
+            <p:nvPr/>
+          </p:nvSpPr>
+          <p:spPr>
+            <a:xfrm>
+              <a:off x="7390199" y="4336484"/>
+              <a:ext cx="0" cy="1317069"/>
+            </a:xfrm>
+            <a:custGeom>
+              <a:avLst/>
+              <a:pathLst>
+                <a:path w="0" h="1317069">
+                  <a:moveTo>
+                    <a:pt x="0" y="1317069"/>
+                  </a:moveTo>
+                  <a:lnTo>
+                    <a:pt x="0" y="0"/>
+                  </a:lnTo>
+                  <a:lnTo>
+                    <a:pt x="0" y="0"/>
+                  </a:lnTo>
+                </a:path>
+              </a:pathLst>
+            </a:custGeom>
+            <a:ln w="13550" cap="flat">
+              <a:solidFill>
+                <a:srgbClr val="EBEBEB">
+                  <a:alpha val="100000"/>
+                </a:srgbClr>
+              </a:solidFill>
+              <a:prstDash val="solid"/>
+              <a:round/>
+            </a:ln>
+          </p:spPr>
+          <p:txBody>
+            <a:bodyPr/>
+            <a:lstStyle/>
+            <a:p/>
+          </p:txBody>
+        </p:sp>
+        <p:sp>
+          <p:nvSpPr>
+            <p:cNvPr id="70" name="pl70"/>
+            <p:cNvSpPr/>
+            <p:nvPr/>
+          </p:nvSpPr>
+          <p:spPr>
+            <a:xfrm>
+              <a:off x="8245225" y="4336484"/>
+              <a:ext cx="0" cy="1317069"/>
+            </a:xfrm>
+            <a:custGeom>
+              <a:avLst/>
+              <a:pathLst>
+                <a:path w="0" h="1317069">
+                  <a:moveTo>
+                    <a:pt x="0" y="1317069"/>
+                  </a:moveTo>
+                  <a:lnTo>
+                    <a:pt x="0" y="0"/>
+                  </a:lnTo>
+                  <a:lnTo>
+                    <a:pt x="0" y="0"/>
+                  </a:lnTo>
+                </a:path>
+              </a:pathLst>
+            </a:custGeom>
+            <a:ln w="13550" cap="flat">
+              <a:solidFill>
+                <a:srgbClr val="EBEBEB">
+                  <a:alpha val="100000"/>
+                </a:srgbClr>
+              </a:solidFill>
+              <a:prstDash val="solid"/>
+              <a:round/>
+            </a:ln>
+          </p:spPr>
+          <p:txBody>
+            <a:bodyPr/>
+            <a:lstStyle/>
+            <a:p/>
+          </p:txBody>
+        </p:sp>
+        <p:sp>
+          <p:nvSpPr>
+            <p:cNvPr id="71" name="pg71"/>
+            <p:cNvSpPr/>
+            <p:nvPr/>
+          </p:nvSpPr>
+          <p:spPr>
+            <a:xfrm>
+              <a:off x="1235312" y="4336484"/>
+              <a:ext cx="6964104" cy="1229830"/>
+            </a:xfrm>
+            <a:custGeom>
+              <a:avLst/>
+              <a:pathLst>
+                <a:path w="6964104" h="1229830">
+                  <a:moveTo>
+                    <a:pt x="726745" y="0"/>
+                  </a:moveTo>
+                  <a:lnTo>
+                    <a:pt x="773789" y="36019"/>
+                  </a:lnTo>
+                  <a:lnTo>
+                    <a:pt x="844133" y="87604"/>
+                  </a:lnTo>
+                  <a:lnTo>
+                    <a:pt x="914478" y="137010"/>
+                  </a:lnTo>
+                  <a:lnTo>
+                    <a:pt x="984822" y="184329"/>
+                  </a:lnTo>
+                  <a:lnTo>
+                    <a:pt x="1055167" y="229648"/>
+                  </a:lnTo>
+                  <a:lnTo>
+                    <a:pt x="1125511" y="273054"/>
+                  </a:lnTo>
+                  <a:lnTo>
+                    <a:pt x="1195856" y="314626"/>
+                  </a:lnTo>
+                  <a:lnTo>
+                    <a:pt x="1266200" y="354442"/>
+                  </a:lnTo>
+                  <a:lnTo>
+                    <a:pt x="1336545" y="392576"/>
+                  </a:lnTo>
+                  <a:lnTo>
+                    <a:pt x="1406889" y="429099"/>
+                  </a:lnTo>
+                  <a:lnTo>
+                    <a:pt x="1477234" y="464080"/>
+                  </a:lnTo>
+                  <a:lnTo>
+                    <a:pt x="1547578" y="497582"/>
+                  </a:lnTo>
+                  <a:lnTo>
+                    <a:pt x="1617923" y="529670"/>
+                  </a:lnTo>
+                  <a:lnTo>
+                    <a:pt x="1688267" y="560402"/>
+                  </a:lnTo>
+                  <a:lnTo>
+                    <a:pt x="1758612" y="589836"/>
+                  </a:lnTo>
+                  <a:lnTo>
+                    <a:pt x="1828956" y="618027"/>
+                  </a:lnTo>
+                  <a:lnTo>
+                    <a:pt x="1899301" y="645026"/>
+                  </a:lnTo>
+                  <a:lnTo>
+                    <a:pt x="1969645" y="670886"/>
+                  </a:lnTo>
+                  <a:lnTo>
+                    <a:pt x="2039990" y="695653"/>
+                  </a:lnTo>
+                  <a:lnTo>
+                    <a:pt x="2110334" y="719373"/>
+                  </a:lnTo>
+                  <a:lnTo>
+                    <a:pt x="2180679" y="742092"/>
+                  </a:lnTo>
+                  <a:lnTo>
+                    <a:pt x="2251023" y="763851"/>
+                  </a:lnTo>
+                  <a:lnTo>
+                    <a:pt x="2321368" y="784691"/>
+                  </a:lnTo>
+                  <a:lnTo>
+                    <a:pt x="2391712" y="804651"/>
+                  </a:lnTo>
+                  <a:lnTo>
+                    <a:pt x="2462057" y="823767"/>
+                  </a:lnTo>
+                  <a:lnTo>
+                    <a:pt x="2532401" y="842076"/>
+                  </a:lnTo>
+                  <a:lnTo>
+                    <a:pt x="2602746" y="859612"/>
+                  </a:lnTo>
+                  <a:lnTo>
+                    <a:pt x="2673090" y="876407"/>
+                  </a:lnTo>
+                  <a:lnTo>
+                    <a:pt x="2743435" y="892492"/>
+                  </a:lnTo>
+                  <a:lnTo>
+                    <a:pt x="2813779" y="907898"/>
+                  </a:lnTo>
+                  <a:lnTo>
+                    <a:pt x="2884124" y="922653"/>
+                  </a:lnTo>
+                  <a:lnTo>
+                    <a:pt x="2954468" y="936785"/>
+                  </a:lnTo>
+                  <a:lnTo>
+                    <a:pt x="3024813" y="950320"/>
+                  </a:lnTo>
+                  <a:lnTo>
+                    <a:pt x="3095157" y="959651"/>
+                  </a:lnTo>
+                  <a:lnTo>
+                    <a:pt x="3165502" y="963823"/>
+                  </a:lnTo>
+                  <a:lnTo>
+                    <a:pt x="3235846" y="967938"/>
+                  </a:lnTo>
+                  <a:lnTo>
+                    <a:pt x="3306191" y="971994"/>
+                  </a:lnTo>
+                  <a:lnTo>
+                    <a:pt x="3376535" y="975994"/>
+                  </a:lnTo>
+                  <a:lnTo>
+                    <a:pt x="3446880" y="979937"/>
+                  </a:lnTo>
+                  <a:lnTo>
+                    <a:pt x="3517224" y="983825"/>
+                  </a:lnTo>
+                  <a:lnTo>
+                    <a:pt x="3587569" y="987659"/>
+                  </a:lnTo>
+                  <a:lnTo>
+                    <a:pt x="3657913" y="991439"/>
+                  </a:lnTo>
+                  <a:lnTo>
+                    <a:pt x="3728257" y="995166"/>
+                  </a:lnTo>
+                  <a:lnTo>
+                    <a:pt x="3798602" y="998841"/>
+                  </a:lnTo>
+                  <a:lnTo>
+                    <a:pt x="3868946" y="1002464"/>
+                  </a:lnTo>
+                  <a:lnTo>
+                    <a:pt x="3939291" y="1006036"/>
+                  </a:lnTo>
+                  <a:lnTo>
+                    <a:pt x="4009635" y="1009558"/>
+                  </a:lnTo>
+                  <a:lnTo>
+                    <a:pt x="4079980" y="1013031"/>
+                  </a:lnTo>
+                  <a:lnTo>
+                    <a:pt x="4150324" y="1016455"/>
+                  </a:lnTo>
+                  <a:lnTo>
+                    <a:pt x="4220669" y="1019831"/>
+                  </a:lnTo>
+                  <a:lnTo>
+                    <a:pt x="4291013" y="1023160"/>
+                  </a:lnTo>
+                  <a:lnTo>
+                    <a:pt x="4361358" y="1026442"/>
+                  </a:lnTo>
+                  <a:lnTo>
+                    <a:pt x="4431702" y="1029678"/>
+                  </a:lnTo>
+                  <a:lnTo>
+                    <a:pt x="4502047" y="1032869"/>
+                  </a:lnTo>
+                  <a:lnTo>
+                    <a:pt x="4572391" y="1036015"/>
+                  </a:lnTo>
+                  <a:lnTo>
+                    <a:pt x="4642736" y="1039117"/>
+                  </a:lnTo>
+                  <a:lnTo>
+                    <a:pt x="4713080" y="1042175"/>
+                  </a:lnTo>
+                  <a:lnTo>
+                    <a:pt x="4783425" y="1045190"/>
+                  </a:lnTo>
+                  <a:lnTo>
+                    <a:pt x="4853769" y="1048164"/>
+                  </a:lnTo>
+                  <a:lnTo>
+                    <a:pt x="4924114" y="1051095"/>
+                  </a:lnTo>
+                  <a:lnTo>
+                    <a:pt x="4994458" y="1053985"/>
+                  </a:lnTo>
+                  <a:lnTo>
+                    <a:pt x="5064803" y="1056835"/>
+                  </a:lnTo>
+                  <a:lnTo>
+                    <a:pt x="5135147" y="1059645"/>
+                  </a:lnTo>
+                  <a:lnTo>
+                    <a:pt x="5205492" y="1062415"/>
+                  </a:lnTo>
+                  <a:lnTo>
+                    <a:pt x="5275836" y="1065147"/>
+                  </a:lnTo>
+                  <a:lnTo>
+                    <a:pt x="5346181" y="1067840"/>
+                  </a:lnTo>
+                  <a:lnTo>
+                    <a:pt x="5416525" y="1070496"/>
+                  </a:lnTo>
+                  <a:lnTo>
+                    <a:pt x="5486870" y="1073114"/>
+                  </a:lnTo>
+                  <a:lnTo>
+                    <a:pt x="5557214" y="1075696"/>
+                  </a:lnTo>
+                  <a:lnTo>
+                    <a:pt x="5627559" y="1078241"/>
+                  </a:lnTo>
+                  <a:lnTo>
+                    <a:pt x="5697903" y="1080751"/>
+                  </a:lnTo>
+                  <a:lnTo>
+                    <a:pt x="5768248" y="1083225"/>
+                  </a:lnTo>
+                  <a:lnTo>
+                    <a:pt x="5838592" y="1085665"/>
+                  </a:lnTo>
+                  <a:lnTo>
+                    <a:pt x="5908937" y="1088070"/>
+                  </a:lnTo>
+                  <a:lnTo>
+                    <a:pt x="5979281" y="1090442"/>
+                  </a:lnTo>
+                  <a:lnTo>
+                    <a:pt x="6049626" y="1092781"/>
+                  </a:lnTo>
+                  <a:lnTo>
+                    <a:pt x="6119970" y="1095086"/>
+                  </a:lnTo>
+                  <a:lnTo>
+                    <a:pt x="6190315" y="1097360"/>
+                  </a:lnTo>
+                  <a:lnTo>
+                    <a:pt x="6260659" y="1099601"/>
+                  </a:lnTo>
+                  <a:lnTo>
+                    <a:pt x="6331004" y="1101811"/>
+                  </a:lnTo>
+                  <a:lnTo>
+                    <a:pt x="6401348" y="1103991"/>
+                  </a:lnTo>
+                  <a:lnTo>
+                    <a:pt x="6471693" y="1106139"/>
+                  </a:lnTo>
+                  <a:lnTo>
+                    <a:pt x="6542037" y="1108258"/>
+                  </a:lnTo>
+                  <a:lnTo>
+                    <a:pt x="6612382" y="1110346"/>
+                  </a:lnTo>
+                  <a:lnTo>
+                    <a:pt x="6682726" y="1112406"/>
+                  </a:lnTo>
+                  <a:lnTo>
+                    <a:pt x="6753071" y="1114436"/>
+                  </a:lnTo>
+                  <a:lnTo>
+                    <a:pt x="6823415" y="1116438"/>
+                  </a:lnTo>
+                  <a:lnTo>
+                    <a:pt x="6893760" y="1118412"/>
+                  </a:lnTo>
+                  <a:lnTo>
+                    <a:pt x="6964104" y="1120359"/>
+                  </a:lnTo>
+                  <a:lnTo>
+                    <a:pt x="6964104" y="1229830"/>
+                  </a:lnTo>
+                  <a:lnTo>
+                    <a:pt x="6893760" y="1228623"/>
+                  </a:lnTo>
+                  <a:lnTo>
+                    <a:pt x="6823415" y="1227362"/>
+                  </a:lnTo>
+                  <a:lnTo>
+                    <a:pt x="6753071" y="1226046"/>
+                  </a:lnTo>
+                  <a:lnTo>
+                    <a:pt x="6682726" y="1224672"/>
+                  </a:lnTo>
+                  <a:lnTo>
+                    <a:pt x="6612382" y="1223237"/>
+                  </a:lnTo>
+                  <a:lnTo>
+                    <a:pt x="6542037" y="1221739"/>
+                  </a:lnTo>
+                  <a:lnTo>
+                    <a:pt x="6471693" y="1220175"/>
+                  </a:lnTo>
+                  <a:lnTo>
+                    <a:pt x="6401348" y="1218542"/>
+                  </a:lnTo>
+                  <a:lnTo>
+                    <a:pt x="6331004" y="1216837"/>
+                  </a:lnTo>
+                  <a:lnTo>
+                    <a:pt x="6260659" y="1215057"/>
+                  </a:lnTo>
+                  <a:lnTo>
+                    <a:pt x="6190315" y="1213198"/>
+                  </a:lnTo>
+                  <a:lnTo>
+                    <a:pt x="6119970" y="1211257"/>
+                  </a:lnTo>
+                  <a:lnTo>
+                    <a:pt x="6049626" y="1209231"/>
+                  </a:lnTo>
+                  <a:lnTo>
+                    <a:pt x="5979281" y="1207115"/>
+                  </a:lnTo>
+                  <a:lnTo>
+                    <a:pt x="5908937" y="1204906"/>
+                  </a:lnTo>
+                  <a:lnTo>
+                    <a:pt x="5838592" y="1202600"/>
+                  </a:lnTo>
+                  <a:lnTo>
+                    <a:pt x="5768248" y="1200191"/>
+                  </a:lnTo>
+                  <a:lnTo>
+                    <a:pt x="5697903" y="1197677"/>
+                  </a:lnTo>
+                  <a:lnTo>
+                    <a:pt x="5627559" y="1195052"/>
+                  </a:lnTo>
+                  <a:lnTo>
+                    <a:pt x="5557214" y="1192311"/>
+                  </a:lnTo>
+                  <a:lnTo>
+                    <a:pt x="5486870" y="1189449"/>
+                  </a:lnTo>
+                  <a:lnTo>
+                    <a:pt x="5416525" y="1186460"/>
+                  </a:lnTo>
+                  <a:lnTo>
+                    <a:pt x="5346181" y="1183340"/>
+                  </a:lnTo>
+                  <a:lnTo>
+                    <a:pt x="5275836" y="1180083"/>
+                  </a:lnTo>
+                  <a:lnTo>
+                    <a:pt x="5205492" y="1176681"/>
+                  </a:lnTo>
+                  <a:lnTo>
+                    <a:pt x="5135147" y="1173130"/>
+                  </a:lnTo>
+                  <a:lnTo>
+                    <a:pt x="5064803" y="1169422"/>
+                  </a:lnTo>
+                  <a:lnTo>
+                    <a:pt x="4994458" y="1165551"/>
+                  </a:lnTo>
+                  <a:lnTo>
+                    <a:pt x="4924114" y="1161508"/>
+                  </a:lnTo>
+                  <a:lnTo>
+                    <a:pt x="4853769" y="1157288"/>
+                  </a:lnTo>
+                  <a:lnTo>
+                    <a:pt x="4783425" y="1152881"/>
+                  </a:lnTo>
+                  <a:lnTo>
+                    <a:pt x="4713080" y="1148280"/>
+                  </a:lnTo>
+                  <a:lnTo>
+                    <a:pt x="4642736" y="1143476"/>
+                  </a:lnTo>
+                  <a:lnTo>
+                    <a:pt x="4572391" y="1138460"/>
+                  </a:lnTo>
+                  <a:lnTo>
+                    <a:pt x="4502047" y="1133223"/>
+                  </a:lnTo>
+                  <a:lnTo>
+                    <a:pt x="4431702" y="1127755"/>
+                  </a:lnTo>
+                  <a:lnTo>
+                    <a:pt x="4361358" y="1122046"/>
+                  </a:lnTo>
+                  <a:lnTo>
+                    <a:pt x="4291013" y="1116085"/>
+                  </a:lnTo>
+                  <a:lnTo>
+                    <a:pt x="4220669" y="1109861"/>
+                  </a:lnTo>
+                  <a:lnTo>
+                    <a:pt x="4150324" y="1103363"/>
+                  </a:lnTo>
+                  <a:lnTo>
+                    <a:pt x="4079980" y="1096578"/>
+                  </a:lnTo>
+                  <a:lnTo>
+                    <a:pt x="4009635" y="1089493"/>
+                  </a:lnTo>
+                  <a:lnTo>
+                    <a:pt x="3939291" y="1082097"/>
+                  </a:lnTo>
+                  <a:lnTo>
+                    <a:pt x="3868946" y="1074374"/>
+                  </a:lnTo>
+                  <a:lnTo>
+                    <a:pt x="3798602" y="1066310"/>
+                  </a:lnTo>
+                  <a:lnTo>
+                    <a:pt x="3728257" y="1057891"/>
+                  </a:lnTo>
+                  <a:lnTo>
+                    <a:pt x="3657913" y="1049101"/>
+                  </a:lnTo>
+                  <a:lnTo>
+                    <a:pt x="3587569" y="1039922"/>
+                  </a:lnTo>
+                  <a:lnTo>
+                    <a:pt x="3517224" y="1030339"/>
+                  </a:lnTo>
+                  <a:lnTo>
+                    <a:pt x="3446880" y="1020334"/>
+                  </a:lnTo>
+                  <a:lnTo>
+                    <a:pt x="3376535" y="1009887"/>
+                  </a:lnTo>
+                  <a:lnTo>
+                    <a:pt x="3306191" y="998979"/>
+                  </a:lnTo>
+                  <a:lnTo>
+                    <a:pt x="3235846" y="987590"/>
+                  </a:lnTo>
+                  <a:lnTo>
+                    <a:pt x="3165502" y="975699"/>
+                  </a:lnTo>
+                  <a:lnTo>
+                    <a:pt x="3095157" y="963283"/>
+                  </a:lnTo>
+                  <a:lnTo>
+                    <a:pt x="3024813" y="955419"/>
+                  </a:lnTo>
+                  <a:lnTo>
+                    <a:pt x="2954468" y="951127"/>
+                  </a:lnTo>
+                  <a:lnTo>
+                    <a:pt x="2884124" y="946773"/>
+                  </a:lnTo>
+                  <a:lnTo>
+                    <a:pt x="2813779" y="942358"/>
+                  </a:lnTo>
+                  <a:lnTo>
+                    <a:pt x="2743435" y="937880"/>
+                  </a:lnTo>
+                  <a:lnTo>
+                    <a:pt x="2673090" y="933338"/>
+                  </a:lnTo>
+                  <a:lnTo>
+                    <a:pt x="2602746" y="928732"/>
+                  </a:lnTo>
+                  <a:lnTo>
+                    <a:pt x="2532401" y="924060"/>
+                  </a:lnTo>
+                  <a:lnTo>
+                    <a:pt x="2462057" y="919322"/>
+                  </a:lnTo>
+                  <a:lnTo>
+                    <a:pt x="2391712" y="914516"/>
+                  </a:lnTo>
+                  <a:lnTo>
+                    <a:pt x="2321368" y="909642"/>
+                  </a:lnTo>
+                  <a:lnTo>
+                    <a:pt x="2251023" y="904699"/>
+                  </a:lnTo>
+                  <a:lnTo>
+                    <a:pt x="2180679" y="899685"/>
+                  </a:lnTo>
+                  <a:lnTo>
+                    <a:pt x="2110334" y="894600"/>
+                  </a:lnTo>
+                  <a:lnTo>
+                    <a:pt x="2039990" y="889443"/>
+                  </a:lnTo>
+                  <a:lnTo>
+                    <a:pt x="1969645" y="884213"/>
+                  </a:lnTo>
+                  <a:lnTo>
+                    <a:pt x="1899301" y="878908"/>
+                  </a:lnTo>
+                  <a:lnTo>
+                    <a:pt x="1828956" y="873527"/>
+                  </a:lnTo>
+                  <a:lnTo>
+                    <a:pt x="1758612" y="868070"/>
+                  </a:lnTo>
+                  <a:lnTo>
+                    <a:pt x="1688267" y="862536"/>
+                  </a:lnTo>
+                  <a:lnTo>
+                    <a:pt x="1617923" y="856922"/>
+                  </a:lnTo>
+                  <a:lnTo>
+                    <a:pt x="1547578" y="851229"/>
+                  </a:lnTo>
+                  <a:lnTo>
+                    <a:pt x="1477234" y="845455"/>
+                  </a:lnTo>
+                  <a:lnTo>
+                    <a:pt x="1406889" y="839599"/>
+                  </a:lnTo>
+                  <a:lnTo>
+                    <a:pt x="1336545" y="833659"/>
+                  </a:lnTo>
+                  <a:lnTo>
+                    <a:pt x="1266200" y="827635"/>
+                  </a:lnTo>
+                  <a:lnTo>
+                    <a:pt x="1195856" y="821526"/>
+                  </a:lnTo>
+                  <a:lnTo>
+                    <a:pt x="1125511" y="815329"/>
+                  </a:lnTo>
+                  <a:lnTo>
+                    <a:pt x="1055167" y="809044"/>
+                  </a:lnTo>
+                  <a:lnTo>
+                    <a:pt x="984822" y="802670"/>
+                  </a:lnTo>
+                  <a:lnTo>
+                    <a:pt x="914478" y="796205"/>
+                  </a:lnTo>
+                  <a:lnTo>
+                    <a:pt x="844133" y="789649"/>
+                  </a:lnTo>
+                  <a:lnTo>
+                    <a:pt x="773789" y="782999"/>
+                  </a:lnTo>
+                  <a:lnTo>
+                    <a:pt x="703444" y="776254"/>
+                  </a:lnTo>
+                  <a:lnTo>
+                    <a:pt x="633100" y="769414"/>
+                  </a:lnTo>
+                  <a:lnTo>
+                    <a:pt x="562755" y="762476"/>
+                  </a:lnTo>
+                  <a:lnTo>
+                    <a:pt x="492411" y="755439"/>
+                  </a:lnTo>
+                  <a:lnTo>
+                    <a:pt x="422066" y="748303"/>
+                  </a:lnTo>
+                  <a:lnTo>
+                    <a:pt x="351722" y="741065"/>
+                  </a:lnTo>
+                  <a:lnTo>
+                    <a:pt x="281377" y="733724"/>
+                  </a:lnTo>
+                  <a:lnTo>
+                    <a:pt x="211033" y="726278"/>
+                  </a:lnTo>
+                  <a:lnTo>
+                    <a:pt x="140688" y="718727"/>
+                  </a:lnTo>
+                  <a:lnTo>
+                    <a:pt x="70344" y="711069"/>
+                  </a:lnTo>
+                  <a:lnTo>
+                    <a:pt x="0" y="703301"/>
+                  </a:lnTo>
+                  <a:close/>
+                </a:path>
+              </a:pathLst>
+            </a:custGeom>
+            <a:solidFill>
+              <a:srgbClr val="FF8C00">
+                <a:alpha val="20000"/>
+              </a:srgbClr>
+            </a:solidFill>
+          </p:spPr>
+          <p:txBody>
+            <a:bodyPr/>
+            <a:lstStyle/>
+            <a:p/>
+          </p:txBody>
+        </p:sp>
+        <p:sp>
+          <p:nvSpPr>
+            <p:cNvPr id="72" name="pl72"/>
+            <p:cNvSpPr/>
+            <p:nvPr/>
+          </p:nvSpPr>
+          <p:spPr>
+            <a:xfrm>
+              <a:off x="1962057" y="4336484"/>
+              <a:ext cx="6237359" cy="1120359"/>
+            </a:xfrm>
+            <a:custGeom>
+              <a:avLst/>
+              <a:pathLst>
+                <a:path w="6237359" h="1120359">
+                  <a:moveTo>
+                    <a:pt x="0" y="0"/>
+                  </a:moveTo>
+                  <a:lnTo>
+                    <a:pt x="47044" y="36019"/>
+                  </a:lnTo>
+                  <a:lnTo>
+                    <a:pt x="117388" y="87604"/>
+                  </a:lnTo>
+                  <a:lnTo>
+                    <a:pt x="187733" y="137010"/>
+                  </a:lnTo>
+                  <a:lnTo>
+                    <a:pt x="258077" y="184329"/>
+                  </a:lnTo>
+                  <a:lnTo>
+                    <a:pt x="328422" y="229648"/>
+                  </a:lnTo>
+                  <a:lnTo>
+                    <a:pt x="398766" y="273054"/>
+                  </a:lnTo>
+                  <a:lnTo>
+                    <a:pt x="469111" y="314626"/>
+                  </a:lnTo>
+                  <a:lnTo>
+                    <a:pt x="539455" y="354442"/>
+                  </a:lnTo>
+                  <a:lnTo>
+                    <a:pt x="609800" y="392576"/>
+                  </a:lnTo>
+                  <a:lnTo>
+                    <a:pt x="680144" y="429099"/>
+                  </a:lnTo>
+                  <a:lnTo>
+                    <a:pt x="750489" y="464080"/>
+                  </a:lnTo>
+                  <a:lnTo>
+                    <a:pt x="820833" y="497582"/>
+                  </a:lnTo>
+                  <a:lnTo>
+                    <a:pt x="891178" y="529670"/>
+                  </a:lnTo>
+                  <a:lnTo>
+                    <a:pt x="961522" y="560402"/>
+                  </a:lnTo>
+                  <a:lnTo>
+                    <a:pt x="1031867" y="589836"/>
+                  </a:lnTo>
+                  <a:lnTo>
+                    <a:pt x="1102211" y="618027"/>
+                  </a:lnTo>
+                  <a:lnTo>
+                    <a:pt x="1172556" y="645026"/>
+                  </a:lnTo>
+                  <a:lnTo>
+                    <a:pt x="1242900" y="670886"/>
+                  </a:lnTo>
+                  <a:lnTo>
+                    <a:pt x="1313245" y="695653"/>
+                  </a:lnTo>
+                  <a:lnTo>
+                    <a:pt x="1383589" y="719373"/>
+                  </a:lnTo>
+                  <a:lnTo>
+                    <a:pt x="1453934" y="742092"/>
+                  </a:lnTo>
+                  <a:lnTo>
+                    <a:pt x="1524278" y="763851"/>
+                  </a:lnTo>
+                  <a:lnTo>
+                    <a:pt x="1594623" y="784691"/>
+                  </a:lnTo>
+                  <a:lnTo>
+                    <a:pt x="1664967" y="804651"/>
+                  </a:lnTo>
+                  <a:lnTo>
+                    <a:pt x="1735312" y="823767"/>
+                  </a:lnTo>
+                  <a:lnTo>
+                    <a:pt x="1805656" y="842076"/>
+                  </a:lnTo>
+                  <a:lnTo>
+                    <a:pt x="1876001" y="859612"/>
+                  </a:lnTo>
+                  <a:lnTo>
+                    <a:pt x="1946345" y="876407"/>
+                  </a:lnTo>
+                  <a:lnTo>
+                    <a:pt x="2016690" y="892492"/>
+                  </a:lnTo>
+                  <a:lnTo>
+                    <a:pt x="2087034" y="907898"/>
+                  </a:lnTo>
+                  <a:lnTo>
+                    <a:pt x="2157379" y="922653"/>
+                  </a:lnTo>
+                  <a:lnTo>
+                    <a:pt x="2227723" y="936785"/>
+                  </a:lnTo>
+                  <a:lnTo>
+                    <a:pt x="2298068" y="950320"/>
+                  </a:lnTo>
+                  <a:lnTo>
+                    <a:pt x="2368412" y="959651"/>
+                  </a:lnTo>
+                  <a:lnTo>
+                    <a:pt x="2438757" y="963823"/>
+                  </a:lnTo>
+                  <a:lnTo>
+                    <a:pt x="2509101" y="967938"/>
+                  </a:lnTo>
+                  <a:lnTo>
+                    <a:pt x="2579446" y="971994"/>
+                  </a:lnTo>
+                  <a:lnTo>
+                    <a:pt x="2649790" y="975994"/>
+                  </a:lnTo>
+                  <a:lnTo>
+                    <a:pt x="2720134" y="979937"/>
+                  </a:lnTo>
+                  <a:lnTo>
+                    <a:pt x="2790479" y="983825"/>
+                  </a:lnTo>
+                  <a:lnTo>
+                    <a:pt x="2860823" y="987659"/>
+                  </a:lnTo>
+                  <a:lnTo>
+                    <a:pt x="2931168" y="991439"/>
+                  </a:lnTo>
+                  <a:lnTo>
+                    <a:pt x="3001512" y="995166"/>
+                  </a:lnTo>
+                  <a:lnTo>
+                    <a:pt x="3071857" y="998841"/>
+                  </a:lnTo>
+                  <a:lnTo>
+                    <a:pt x="3142201" y="1002464"/>
+                  </a:lnTo>
+                  <a:lnTo>
+                    <a:pt x="3212546" y="1006036"/>
+                  </a:lnTo>
+                  <a:lnTo>
+                    <a:pt x="3282890" y="1009558"/>
+                  </a:lnTo>
+                  <a:lnTo>
+                    <a:pt x="3353235" y="1013031"/>
+                  </a:lnTo>
+                  <a:lnTo>
+                    <a:pt x="3423579" y="1016455"/>
+                  </a:lnTo>
+                  <a:lnTo>
+                    <a:pt x="3493924" y="1019831"/>
+                  </a:lnTo>
+                  <a:lnTo>
+                    <a:pt x="3564268" y="1023160"/>
+                  </a:lnTo>
+                  <a:lnTo>
+                    <a:pt x="3634613" y="1026442"/>
+                  </a:lnTo>
+                  <a:lnTo>
+                    <a:pt x="3704957" y="1029678"/>
+                  </a:lnTo>
+                  <a:lnTo>
+                    <a:pt x="3775302" y="1032869"/>
+                  </a:lnTo>
+                  <a:lnTo>
+                    <a:pt x="3845646" y="1036015"/>
+                  </a:lnTo>
+                  <a:lnTo>
+                    <a:pt x="3915991" y="1039117"/>
+                  </a:lnTo>
+                  <a:lnTo>
+                    <a:pt x="3986335" y="1042175"/>
+                  </a:lnTo>
+                  <a:lnTo>
+                    <a:pt x="4056680" y="1045190"/>
+                  </a:lnTo>
+                  <a:lnTo>
+                    <a:pt x="4127024" y="1048164"/>
+                  </a:lnTo>
+                  <a:lnTo>
+                    <a:pt x="4197369" y="1051095"/>
+                  </a:lnTo>
+                  <a:lnTo>
+                    <a:pt x="4267713" y="1053985"/>
+                  </a:lnTo>
+                  <a:lnTo>
+                    <a:pt x="4338058" y="1056835"/>
+                  </a:lnTo>
+                  <a:lnTo>
+                    <a:pt x="4408402" y="1059645"/>
+                  </a:lnTo>
+                  <a:lnTo>
+                    <a:pt x="4478747" y="1062415"/>
+                  </a:lnTo>
+                  <a:lnTo>
+                    <a:pt x="4549091" y="1065147"/>
+                  </a:lnTo>
+                  <a:lnTo>
+                    <a:pt x="4619436" y="1067840"/>
+                  </a:lnTo>
+                  <a:lnTo>
+                    <a:pt x="4689780" y="1070496"/>
+                  </a:lnTo>
+                  <a:lnTo>
+                    <a:pt x="4760125" y="1073114"/>
+                  </a:lnTo>
+                  <a:lnTo>
+                    <a:pt x="4830469" y="1075696"/>
+                  </a:lnTo>
+                  <a:lnTo>
+                    <a:pt x="4900814" y="1078241"/>
+                  </a:lnTo>
+                  <a:lnTo>
+                    <a:pt x="4971158" y="1080751"/>
+                  </a:lnTo>
+                  <a:lnTo>
+                    <a:pt x="5041503" y="1083225"/>
+                  </a:lnTo>
+                  <a:lnTo>
+                    <a:pt x="5111847" y="1085665"/>
+                  </a:lnTo>
+                  <a:lnTo>
+                    <a:pt x="5182192" y="1088070"/>
+                  </a:lnTo>
+                  <a:lnTo>
+                    <a:pt x="5252536" y="1090442"/>
+                  </a:lnTo>
+                  <a:lnTo>
+                    <a:pt x="5322881" y="1092781"/>
+                  </a:lnTo>
+                  <a:lnTo>
+                    <a:pt x="5393225" y="1095086"/>
+                  </a:lnTo>
+                  <a:lnTo>
+                    <a:pt x="5463570" y="1097360"/>
+                  </a:lnTo>
+                  <a:lnTo>
+                    <a:pt x="5533914" y="1099601"/>
+                  </a:lnTo>
+                  <a:lnTo>
+                    <a:pt x="5604259" y="1101811"/>
+                  </a:lnTo>
+                  <a:lnTo>
+                    <a:pt x="5674603" y="1103991"/>
+                  </a:lnTo>
+                  <a:lnTo>
+                    <a:pt x="5744948" y="1106139"/>
+                  </a:lnTo>
+                  <a:lnTo>
+                    <a:pt x="5815292" y="1108258"/>
+                  </a:lnTo>
+                  <a:lnTo>
+                    <a:pt x="5885637" y="1110346"/>
+                  </a:lnTo>
+                  <a:lnTo>
+                    <a:pt x="5955981" y="1112406"/>
+                  </a:lnTo>
+                  <a:lnTo>
+                    <a:pt x="6026326" y="1114436"/>
+                  </a:lnTo>
+                  <a:lnTo>
+                    <a:pt x="6096670" y="1116438"/>
+                  </a:lnTo>
+                  <a:lnTo>
+                    <a:pt x="6167015" y="1118412"/>
+                  </a:lnTo>
+                  <a:lnTo>
+                    <a:pt x="6237359" y="1120359"/>
+                  </a:lnTo>
+                </a:path>
+              </a:pathLst>
+            </a:custGeom>
+          </p:spPr>
+          <p:txBody>
+            <a:bodyPr/>
+            <a:lstStyle/>
+            <a:p/>
+          </p:txBody>
+        </p:sp>
+        <p:sp>
+          <p:nvSpPr>
+            <p:cNvPr id="73" name="pl73"/>
+            <p:cNvSpPr/>
+            <p:nvPr/>
+          </p:nvSpPr>
+          <p:spPr>
+            <a:xfrm>
+              <a:off x="1235312" y="5039785"/>
+              <a:ext cx="6964104" cy="526529"/>
+            </a:xfrm>
+            <a:custGeom>
+              <a:avLst/>
+              <a:pathLst>
+                <a:path w="6964104" h="526529">
+                  <a:moveTo>
+                    <a:pt x="6964104" y="526529"/>
+                  </a:moveTo>
+                  <a:lnTo>
+                    <a:pt x="6893760" y="525321"/>
+                  </a:lnTo>
+                  <a:lnTo>
+                    <a:pt x="6823415" y="524061"/>
+                  </a:lnTo>
+                  <a:lnTo>
+                    <a:pt x="6753071" y="522745"/>
+                  </a:lnTo>
+                  <a:lnTo>
+                    <a:pt x="6682726" y="521371"/>
+                  </a:lnTo>
+                  <a:lnTo>
+                    <a:pt x="6612382" y="519936"/>
+                  </a:lnTo>
+                  <a:lnTo>
+                    <a:pt x="6542037" y="518438"/>
+                  </a:lnTo>
+                  <a:lnTo>
+                    <a:pt x="6471693" y="516874"/>
+                  </a:lnTo>
+                  <a:lnTo>
+                    <a:pt x="6401348" y="515241"/>
+                  </a:lnTo>
+                  <a:lnTo>
+                    <a:pt x="6331004" y="513536"/>
+                  </a:lnTo>
+                  <a:lnTo>
+                    <a:pt x="6260659" y="511755"/>
+                  </a:lnTo>
+                  <a:lnTo>
+                    <a:pt x="6190315" y="509897"/>
+                  </a:lnTo>
+                  <a:lnTo>
+                    <a:pt x="6119970" y="507956"/>
+                  </a:lnTo>
+                  <a:lnTo>
+                    <a:pt x="6049626" y="505930"/>
+                  </a:lnTo>
+                  <a:lnTo>
+                    <a:pt x="5979281" y="503814"/>
+                  </a:lnTo>
+                  <a:lnTo>
+                    <a:pt x="5908937" y="501605"/>
+                  </a:lnTo>
+                  <a:lnTo>
+                    <a:pt x="5838592" y="499298"/>
+                  </a:lnTo>
+                  <a:lnTo>
+                    <a:pt x="5768248" y="496890"/>
+                  </a:lnTo>
+                  <a:lnTo>
+                    <a:pt x="5697903" y="494376"/>
+                  </a:lnTo>
+                  <a:lnTo>
+                    <a:pt x="5627559" y="491750"/>
+                  </a:lnTo>
+                  <a:lnTo>
+                    <a:pt x="5557214" y="489009"/>
+                  </a:lnTo>
+                  <a:lnTo>
+                    <a:pt x="5486870" y="486147"/>
+                  </a:lnTo>
+                  <a:lnTo>
+                    <a:pt x="5416525" y="483159"/>
+                  </a:lnTo>
+                  <a:lnTo>
+                    <a:pt x="5346181" y="480039"/>
+                  </a:lnTo>
+                  <a:lnTo>
+                    <a:pt x="5275836" y="476781"/>
+                  </a:lnTo>
+                  <a:lnTo>
+                    <a:pt x="5205492" y="473380"/>
+                  </a:lnTo>
+                  <a:lnTo>
+                    <a:pt x="5135147" y="469829"/>
+                  </a:lnTo>
+                  <a:lnTo>
+                    <a:pt x="5064803" y="466121"/>
+                  </a:lnTo>
+                  <a:lnTo>
+                    <a:pt x="4994458" y="462249"/>
+                  </a:lnTo>
+                  <a:lnTo>
+                    <a:pt x="4924114" y="458207"/>
+                  </a:lnTo>
+                  <a:lnTo>
+                    <a:pt x="4853769" y="453986"/>
+                  </a:lnTo>
+                  <a:lnTo>
+                    <a:pt x="4783425" y="449580"/>
+                  </a:lnTo>
+                  <a:lnTo>
+                    <a:pt x="4713080" y="444979"/>
+                  </a:lnTo>
+                  <a:lnTo>
+                    <a:pt x="4642736" y="440175"/>
+                  </a:lnTo>
+                  <a:lnTo>
+                    <a:pt x="4572391" y="435159"/>
+                  </a:lnTo>
+                  <a:lnTo>
+                    <a:pt x="4502047" y="429922"/>
+                  </a:lnTo>
+                  <a:lnTo>
+                    <a:pt x="4431702" y="424454"/>
+                  </a:lnTo>
+                  <a:lnTo>
+                    <a:pt x="4361358" y="418745"/>
+                  </a:lnTo>
+                  <a:lnTo>
+                    <a:pt x="4291013" y="412784"/>
+                  </a:lnTo>
+                  <a:lnTo>
+                    <a:pt x="4220669" y="406560"/>
+                  </a:lnTo>
+                  <a:lnTo>
+                    <a:pt x="4150324" y="400061"/>
+                  </a:lnTo>
+                  <a:lnTo>
+                    <a:pt x="4079980" y="393276"/>
+                  </a:lnTo>
+                  <a:lnTo>
+                    <a:pt x="4009635" y="386192"/>
+                  </a:lnTo>
+                  <a:lnTo>
+                    <a:pt x="3939291" y="378795"/>
+                  </a:lnTo>
+                  <a:lnTo>
+                    <a:pt x="3868946" y="371072"/>
+                  </a:lnTo>
+                  <a:lnTo>
+                    <a:pt x="3798602" y="363009"/>
+                  </a:lnTo>
+                  <a:lnTo>
+                    <a:pt x="3728257" y="354590"/>
+                  </a:lnTo>
+                  <a:lnTo>
+                    <a:pt x="3657913" y="345799"/>
+                  </a:lnTo>
+                  <a:lnTo>
+                    <a:pt x="3587569" y="336621"/>
+                  </a:lnTo>
+                  <a:lnTo>
+                    <a:pt x="3517224" y="327038"/>
+                  </a:lnTo>
+                  <a:lnTo>
+                    <a:pt x="3446880" y="317032"/>
+                  </a:lnTo>
+                  <a:lnTo>
+                    <a:pt x="3376535" y="306585"/>
+                  </a:lnTo>
+                  <a:lnTo>
+                    <a:pt x="3306191" y="295677"/>
+                  </a:lnTo>
+                  <a:lnTo>
+                    <a:pt x="3235846" y="284289"/>
+                  </a:lnTo>
+                  <a:lnTo>
+                    <a:pt x="3165502" y="272397"/>
+                  </a:lnTo>
+                  <a:lnTo>
+                    <a:pt x="3095157" y="259982"/>
+                  </a:lnTo>
+                  <a:lnTo>
+                    <a:pt x="3024813" y="252117"/>
+                  </a:lnTo>
+                  <a:lnTo>
+                    <a:pt x="2954468" y="247825"/>
+                  </a:lnTo>
+                  <a:lnTo>
+                    <a:pt x="2884124" y="243472"/>
+                  </a:lnTo>
+                  <a:lnTo>
+                    <a:pt x="2813779" y="239057"/>
+                  </a:lnTo>
+                  <a:lnTo>
+                    <a:pt x="2743435" y="234579"/>
+                  </a:lnTo>
+                  <a:lnTo>
+                    <a:pt x="2673090" y="230037"/>
+                  </a:lnTo>
+                  <a:lnTo>
+                    <a:pt x="2602746" y="225431"/>
+                  </a:lnTo>
+                  <a:lnTo>
+                    <a:pt x="2532401" y="220759"/>
+                  </a:lnTo>
+                  <a:lnTo>
+                    <a:pt x="2462057" y="216021"/>
+                  </a:lnTo>
+                  <a:lnTo>
+                    <a:pt x="2391712" y="211215"/>
+                  </a:lnTo>
+                  <a:lnTo>
+                    <a:pt x="2321368" y="206341"/>
+                  </a:lnTo>
+                  <a:lnTo>
+                    <a:pt x="2251023" y="201398"/>
+                  </a:lnTo>
+                  <a:lnTo>
+                    <a:pt x="2180679" y="196384"/>
+                  </a:lnTo>
+                  <a:lnTo>
+                    <a:pt x="2110334" y="191299"/>
+                  </a:lnTo>
+                  <a:lnTo>
+                    <a:pt x="2039990" y="186142"/>
+                  </a:lnTo>
+                  <a:lnTo>
+                    <a:pt x="1969645" y="180911"/>
+                  </a:lnTo>
+                  <a:lnTo>
+                    <a:pt x="1899301" y="175606"/>
+                  </a:lnTo>
+                  <a:lnTo>
+                    <a:pt x="1828956" y="170226"/>
+                  </a:lnTo>
+                  <a:lnTo>
+                    <a:pt x="1758612" y="164769"/>
+                  </a:lnTo>
+                  <a:lnTo>
+                    <a:pt x="1688267" y="159234"/>
+                  </a:lnTo>
+                  <a:lnTo>
+                    <a:pt x="1617923" y="153621"/>
+                  </a:lnTo>
+                  <a:lnTo>
+                    <a:pt x="1547578" y="147928"/>
+                  </a:lnTo>
+                  <a:lnTo>
+                    <a:pt x="1477234" y="142154"/>
+                  </a:lnTo>
+                  <a:lnTo>
+                    <a:pt x="1406889" y="136297"/>
+                  </a:lnTo>
+                  <a:lnTo>
+                    <a:pt x="1336545" y="130358"/>
+                  </a:lnTo>
+                  <a:lnTo>
+                    <a:pt x="1266200" y="124334"/>
+                  </a:lnTo>
+                  <a:lnTo>
+                    <a:pt x="1195856" y="118224"/>
+                  </a:lnTo>
+                  <a:lnTo>
+                    <a:pt x="1125511" y="112028"/>
+                  </a:lnTo>
+                  <a:lnTo>
+                    <a:pt x="1055167" y="105743"/>
+                  </a:lnTo>
+                  <a:lnTo>
+                    <a:pt x="984822" y="99369"/>
+                  </a:lnTo>
+                  <a:lnTo>
+                    <a:pt x="914478" y="92904"/>
+                  </a:lnTo>
+                  <a:lnTo>
+                    <a:pt x="844133" y="86347"/>
+                  </a:lnTo>
+                  <a:lnTo>
+                    <a:pt x="773789" y="79697"/>
+                  </a:lnTo>
+                  <a:lnTo>
+                    <a:pt x="703444" y="72953"/>
+                  </a:lnTo>
+                  <a:lnTo>
+                    <a:pt x="633100" y="66112"/>
+                  </a:lnTo>
+                  <a:lnTo>
+                    <a:pt x="562755" y="59174"/>
+                  </a:lnTo>
+                  <a:lnTo>
+                    <a:pt x="492411" y="52138"/>
+                  </a:lnTo>
+                  <a:lnTo>
+                    <a:pt x="422066" y="45001"/>
+                  </a:lnTo>
+                  <a:lnTo>
+                    <a:pt x="351722" y="37763"/>
+                  </a:lnTo>
+                  <a:lnTo>
+                    <a:pt x="281377" y="30422"/>
+                  </a:lnTo>
+                  <a:lnTo>
+                    <a:pt x="211033" y="22977"/>
+                  </a:lnTo>
+                  <a:lnTo>
+                    <a:pt x="140688" y="15426"/>
+                  </a:lnTo>
+                  <a:lnTo>
+                    <a:pt x="70344" y="7767"/>
+                  </a:lnTo>
+                  <a:lnTo>
+                    <a:pt x="0" y="0"/>
+                  </a:lnTo>
+                </a:path>
+              </a:pathLst>
+            </a:custGeom>
+          </p:spPr>
+          <p:txBody>
+            <a:bodyPr/>
+            <a:lstStyle/>
+            <a:p/>
+          </p:txBody>
+        </p:sp>
+        <p:sp>
+          <p:nvSpPr>
+            <p:cNvPr id="74" name="pl74"/>
+            <p:cNvSpPr/>
+            <p:nvPr/>
+          </p:nvSpPr>
+          <p:spPr>
+            <a:xfrm>
+              <a:off x="1235312" y="4550892"/>
+              <a:ext cx="6964104" cy="981592"/>
+            </a:xfrm>
+            <a:custGeom>
+              <a:avLst/>
+              <a:pathLst>
+                <a:path w="6964104" h="981592">
+                  <a:moveTo>
+                    <a:pt x="0" y="0"/>
+                  </a:moveTo>
+                  <a:lnTo>
+                    <a:pt x="70344" y="29443"/>
+                  </a:lnTo>
+                  <a:lnTo>
+                    <a:pt x="140688" y="58055"/>
+                  </a:lnTo>
+                  <a:lnTo>
+                    <a:pt x="211033" y="85859"/>
+                  </a:lnTo>
+                  <a:lnTo>
+                    <a:pt x="281377" y="112878"/>
+                  </a:lnTo>
+                  <a:lnTo>
+                    <a:pt x="351722" y="139134"/>
+                  </a:lnTo>
+                  <a:lnTo>
+                    <a:pt x="422066" y="164649"/>
+                  </a:lnTo>
+                  <a:lnTo>
+                    <a:pt x="492411" y="189443"/>
+                  </a:lnTo>
+                  <a:lnTo>
+                    <a:pt x="562755" y="213537"/>
+                  </a:lnTo>
+                  <a:lnTo>
+                    <a:pt x="633100" y="236951"/>
+                  </a:lnTo>
+                  <a:lnTo>
+                    <a:pt x="703444" y="259704"/>
+                  </a:lnTo>
+                  <a:lnTo>
+                    <a:pt x="773789" y="281815"/>
+                  </a:lnTo>
+                  <a:lnTo>
+                    <a:pt x="844133" y="303301"/>
+                  </a:lnTo>
+                  <a:lnTo>
+                    <a:pt x="914478" y="324181"/>
+                  </a:lnTo>
+                  <a:lnTo>
+                    <a:pt x="984822" y="344471"/>
+                  </a:lnTo>
+                  <a:lnTo>
+                    <a:pt x="1055167" y="364188"/>
+                  </a:lnTo>
+                  <a:lnTo>
+                    <a:pt x="1125511" y="383348"/>
+                  </a:lnTo>
+                  <a:lnTo>
+                    <a:pt x="1195856" y="401968"/>
+                  </a:lnTo>
+                  <a:lnTo>
+                    <a:pt x="1266200" y="420061"/>
+                  </a:lnTo>
+                  <a:lnTo>
+                    <a:pt x="1336545" y="437644"/>
+                  </a:lnTo>
+                  <a:lnTo>
+                    <a:pt x="1406889" y="454731"/>
+                  </a:lnTo>
+                  <a:lnTo>
+                    <a:pt x="1477234" y="471334"/>
+                  </a:lnTo>
+                  <a:lnTo>
+                    <a:pt x="1547578" y="487470"/>
+                  </a:lnTo>
+                  <a:lnTo>
+                    <a:pt x="1617923" y="503149"/>
+                  </a:lnTo>
+                  <a:lnTo>
+                    <a:pt x="1688267" y="518386"/>
+                  </a:lnTo>
+                  <a:lnTo>
+                    <a:pt x="1758612" y="533193"/>
+                  </a:lnTo>
+                  <a:lnTo>
+                    <a:pt x="1828956" y="547581"/>
+                  </a:lnTo>
+                  <a:lnTo>
+                    <a:pt x="1899301" y="561563"/>
+                  </a:lnTo>
+                  <a:lnTo>
+                    <a:pt x="1969645" y="575151"/>
+                  </a:lnTo>
+                  <a:lnTo>
+                    <a:pt x="2039990" y="588355"/>
+                  </a:lnTo>
+                  <a:lnTo>
+                    <a:pt x="2110334" y="601186"/>
+                  </a:lnTo>
+                  <a:lnTo>
+                    <a:pt x="2180679" y="613655"/>
+                  </a:lnTo>
+                  <a:lnTo>
+                    <a:pt x="2251023" y="625771"/>
+                  </a:lnTo>
+                  <a:lnTo>
+                    <a:pt x="2321368" y="637546"/>
+                  </a:lnTo>
+                  <a:lnTo>
+                    <a:pt x="2391712" y="648988"/>
+                  </a:lnTo>
+                  <a:lnTo>
+                    <a:pt x="2462057" y="660107"/>
+                  </a:lnTo>
+                  <a:lnTo>
+                    <a:pt x="2532401" y="670912"/>
+                  </a:lnTo>
+                  <a:lnTo>
+                    <a:pt x="2602746" y="681412"/>
+                  </a:lnTo>
+                  <a:lnTo>
+                    <a:pt x="2673090" y="691616"/>
+                  </a:lnTo>
+                  <a:lnTo>
+                    <a:pt x="2743435" y="701532"/>
+                  </a:lnTo>
+                  <a:lnTo>
+                    <a:pt x="2813779" y="711167"/>
+                  </a:lnTo>
+                  <a:lnTo>
+                    <a:pt x="2884124" y="720531"/>
+                  </a:lnTo>
+                  <a:lnTo>
+                    <a:pt x="2954468" y="729630"/>
+                  </a:lnTo>
+                  <a:lnTo>
+                    <a:pt x="3024813" y="738472"/>
+                  </a:lnTo>
+                  <a:lnTo>
+                    <a:pt x="3095157" y="747064"/>
+                  </a:lnTo>
+                  <a:lnTo>
+                    <a:pt x="3165502" y="755414"/>
+                  </a:lnTo>
+                  <a:lnTo>
+                    <a:pt x="3235846" y="763528"/>
+                  </a:lnTo>
+                  <a:lnTo>
+                    <a:pt x="3306191" y="771413"/>
+                  </a:lnTo>
+                  <a:lnTo>
+                    <a:pt x="3376535" y="779076"/>
+                  </a:lnTo>
+                  <a:lnTo>
+                    <a:pt x="3446880" y="786522"/>
+                  </a:lnTo>
+                  <a:lnTo>
+                    <a:pt x="3517224" y="793758"/>
+                  </a:lnTo>
+                  <a:lnTo>
+                    <a:pt x="3587569" y="800789"/>
+                  </a:lnTo>
+                  <a:lnTo>
+                    <a:pt x="3657913" y="807622"/>
+                  </a:lnTo>
+                  <a:lnTo>
+                    <a:pt x="3728257" y="814262"/>
+                  </a:lnTo>
+                  <a:lnTo>
+                    <a:pt x="3798602" y="820715"/>
+                  </a:lnTo>
+                  <a:lnTo>
+                    <a:pt x="3868946" y="826985"/>
+                  </a:lnTo>
+                  <a:lnTo>
+                    <a:pt x="3939291" y="833079"/>
+                  </a:lnTo>
+                  <a:lnTo>
+                    <a:pt x="4009635" y="839000"/>
+                  </a:lnTo>
+                  <a:lnTo>
+                    <a:pt x="4079980" y="844754"/>
+                  </a:lnTo>
+                  <a:lnTo>
+                    <a:pt x="4150324" y="850346"/>
+                  </a:lnTo>
+                  <a:lnTo>
+                    <a:pt x="4220669" y="855779"/>
+                  </a:lnTo>
+                  <a:lnTo>
+                    <a:pt x="4291013" y="861060"/>
+                  </a:lnTo>
+                  <a:lnTo>
+                    <a:pt x="4361358" y="866191"/>
+                  </a:lnTo>
+                  <a:lnTo>
+                    <a:pt x="4431702" y="871177"/>
+                  </a:lnTo>
+                  <a:lnTo>
+                    <a:pt x="4502047" y="876023"/>
+                  </a:lnTo>
+                  <a:lnTo>
+                    <a:pt x="4572391" y="880732"/>
+                  </a:lnTo>
+                  <a:lnTo>
+                    <a:pt x="4642736" y="885307"/>
+                  </a:lnTo>
+                  <a:lnTo>
+                    <a:pt x="4713080" y="889754"/>
+                  </a:lnTo>
+                  <a:lnTo>
+                    <a:pt x="4783425" y="894075"/>
+                  </a:lnTo>
+                  <a:lnTo>
+                    <a:pt x="4853769" y="898274"/>
+                  </a:lnTo>
+                  <a:lnTo>
+                    <a:pt x="4924114" y="902355"/>
+                  </a:lnTo>
+                  <a:lnTo>
+                    <a:pt x="4994458" y="906320"/>
+                  </a:lnTo>
+                  <a:lnTo>
+                    <a:pt x="5064803" y="910173"/>
+                  </a:lnTo>
+                  <a:lnTo>
+                    <a:pt x="5135147" y="913918"/>
+                  </a:lnTo>
+                  <a:lnTo>
+                    <a:pt x="5205492" y="917557"/>
+                  </a:lnTo>
+                  <a:lnTo>
+                    <a:pt x="5275836" y="921093"/>
+                  </a:lnTo>
+                  <a:lnTo>
+                    <a:pt x="5346181" y="924529"/>
+                  </a:lnTo>
+                  <a:lnTo>
+                    <a:pt x="5416525" y="927868"/>
+                  </a:lnTo>
+                  <a:lnTo>
+                    <a:pt x="5486870" y="931113"/>
+                  </a:lnTo>
+                  <a:lnTo>
+                    <a:pt x="5557214" y="934266"/>
+                  </a:lnTo>
+                  <a:lnTo>
+                    <a:pt x="5627559" y="937331"/>
+                  </a:lnTo>
+                  <a:lnTo>
+                    <a:pt x="5697903" y="940308"/>
+                  </a:lnTo>
+                  <a:lnTo>
+                    <a:pt x="5768248" y="943202"/>
+                  </a:lnTo>
+                  <a:lnTo>
+                    <a:pt x="5838592" y="946014"/>
+                  </a:lnTo>
+                  <a:lnTo>
+                    <a:pt x="5908937" y="948747"/>
+                  </a:lnTo>
+                  <a:lnTo>
+                    <a:pt x="5979281" y="951402"/>
+                  </a:lnTo>
+                  <a:lnTo>
+                    <a:pt x="6049626" y="953982"/>
+                  </a:lnTo>
+                  <a:lnTo>
+                    <a:pt x="6119970" y="956490"/>
+                  </a:lnTo>
+                  <a:lnTo>
+                    <a:pt x="6190315" y="958927"/>
+                  </a:lnTo>
+                  <a:lnTo>
+                    <a:pt x="6260659" y="961295"/>
+                  </a:lnTo>
+                  <a:lnTo>
+                    <a:pt x="6331004" y="963596"/>
+                  </a:lnTo>
+                  <a:lnTo>
+                    <a:pt x="6401348" y="965832"/>
+                  </a:lnTo>
+                  <a:lnTo>
+                    <a:pt x="6471693" y="968005"/>
+                  </a:lnTo>
+                  <a:lnTo>
+                    <a:pt x="6542037" y="970117"/>
+                  </a:lnTo>
+                  <a:lnTo>
+                    <a:pt x="6612382" y="972169"/>
+                  </a:lnTo>
+                  <a:lnTo>
+                    <a:pt x="6682726" y="974163"/>
+                  </a:lnTo>
+                  <a:lnTo>
+                    <a:pt x="6753071" y="976101"/>
+                  </a:lnTo>
+                  <a:lnTo>
+                    <a:pt x="6823415" y="977984"/>
+                  </a:lnTo>
+                  <a:lnTo>
+                    <a:pt x="6893760" y="979814"/>
+                  </a:lnTo>
+                  <a:lnTo>
+                    <a:pt x="6964104" y="981592"/>
+                  </a:lnTo>
+                </a:path>
+              </a:pathLst>
+            </a:custGeom>
+            <a:ln w="27101" cap="flat">
+              <a:solidFill>
+                <a:srgbClr val="FF8C00">
+                  <a:alpha val="100000"/>
+                </a:srgbClr>
+              </a:solidFill>
+              <a:prstDash val="solid"/>
+              <a:round/>
+            </a:ln>
+          </p:spPr>
+          <p:txBody>
+            <a:bodyPr/>
+            <a:lstStyle/>
+            <a:p/>
+          </p:txBody>
+        </p:sp>
+        <p:sp>
+          <p:nvSpPr>
+            <p:cNvPr id="75" name="pl75"/>
+            <p:cNvSpPr/>
+            <p:nvPr/>
+          </p:nvSpPr>
+          <p:spPr>
+            <a:xfrm>
+              <a:off x="887106" y="5294352"/>
+              <a:ext cx="7660515" cy="0"/>
+            </a:xfrm>
+            <a:custGeom>
+              <a:avLst/>
+              <a:pathLst>
+                <a:path w="7660515" h="0">
+                  <a:moveTo>
+                    <a:pt x="0" y="0"/>
+                  </a:moveTo>
+                  <a:lnTo>
+                    <a:pt x="7660515" y="0"/>
+                  </a:lnTo>
+                  <a:lnTo>
+                    <a:pt x="7660515" y="0"/>
+                  </a:lnTo>
+                </a:path>
+              </a:pathLst>
+            </a:custGeom>
+            <a:ln w="13550" cap="flat">
+              <a:solidFill>
+                <a:srgbClr val="7F7F7F">
+                  <a:alpha val="100000"/>
+                </a:srgbClr>
+              </a:solidFill>
+              <a:prstDash val="dash"/>
+              <a:round/>
+            </a:ln>
+          </p:spPr>
+          <p:txBody>
+            <a:bodyPr/>
+            <a:lstStyle/>
+            <a:p/>
+          </p:txBody>
+        </p:sp>
+        <p:sp>
+          <p:nvSpPr>
+            <p:cNvPr id="76" name="pl76"/>
+            <p:cNvSpPr/>
+            <p:nvPr/>
+          </p:nvSpPr>
+          <p:spPr>
+            <a:xfrm>
+              <a:off x="4300713" y="4336484"/>
+              <a:ext cx="0" cy="1317069"/>
+            </a:xfrm>
+            <a:custGeom>
+              <a:avLst/>
+              <a:pathLst>
+                <a:path w="0" h="1317069">
+                  <a:moveTo>
+                    <a:pt x="0" y="1317069"/>
+                  </a:moveTo>
+                  <a:lnTo>
+                    <a:pt x="0" y="0"/>
+                  </a:lnTo>
+                  <a:lnTo>
+                    <a:pt x="0" y="0"/>
+                  </a:lnTo>
+                </a:path>
+              </a:pathLst>
+            </a:custGeom>
+            <a:ln w="13550" cap="flat">
+              <a:solidFill>
+                <a:srgbClr val="666666">
+                  <a:alpha val="100000"/>
+                </a:srgbClr>
+              </a:solidFill>
+              <a:prstDash val="dot"/>
+              <a:round/>
+            </a:ln>
+          </p:spPr>
+          <p:txBody>
+            <a:bodyPr/>
+            <a:lstStyle/>
+            <a:p/>
+          </p:txBody>
+        </p:sp>
+        <p:sp>
+          <p:nvSpPr>
+            <p:cNvPr id="77" name="pl77"/>
+            <p:cNvSpPr/>
+            <p:nvPr/>
+          </p:nvSpPr>
+          <p:spPr>
+            <a:xfrm>
+              <a:off x="3103710" y="4336484"/>
+              <a:ext cx="0" cy="1317069"/>
+            </a:xfrm>
+            <a:custGeom>
+              <a:avLst/>
+              <a:pathLst>
+                <a:path w="0" h="1317069">
+                  <a:moveTo>
+                    <a:pt x="0" y="1317069"/>
+                  </a:moveTo>
+                  <a:lnTo>
+                    <a:pt x="0" y="0"/>
+                  </a:lnTo>
+                  <a:lnTo>
+                    <a:pt x="0" y="0"/>
+                  </a:lnTo>
+                </a:path>
+              </a:pathLst>
+            </a:custGeom>
+            <a:ln w="13550" cap="flat">
+              <a:solidFill>
+                <a:srgbClr val="4682B4">
+                  <a:alpha val="69803"/>
+                </a:srgbClr>
+              </a:solidFill>
+              <a:prstDash val="dash"/>
+              <a:round/>
+            </a:ln>
+          </p:spPr>
+          <p:txBody>
+            <a:bodyPr/>
+            <a:lstStyle/>
+            <a:p/>
+          </p:txBody>
+        </p:sp>
+        <p:sp>
+          <p:nvSpPr>
+            <p:cNvPr id="78" name="pl78"/>
+            <p:cNvSpPr/>
+            <p:nvPr/>
+          </p:nvSpPr>
+          <p:spPr>
+            <a:xfrm>
+              <a:off x="5504283" y="4336484"/>
+              <a:ext cx="0" cy="1317069"/>
+            </a:xfrm>
+            <a:custGeom>
+              <a:avLst/>
+              <a:pathLst>
+                <a:path w="0" h="1317069">
+                  <a:moveTo>
+                    <a:pt x="0" y="1317069"/>
+                  </a:moveTo>
+                  <a:lnTo>
+                    <a:pt x="0" y="0"/>
+                  </a:lnTo>
+                  <a:lnTo>
+                    <a:pt x="0" y="0"/>
+                  </a:lnTo>
+                </a:path>
+              </a:pathLst>
+            </a:custGeom>
+            <a:ln w="13550" cap="flat">
+              <a:solidFill>
+                <a:srgbClr val="4682B4">
+                  <a:alpha val="69803"/>
+                </a:srgbClr>
+              </a:solidFill>
+              <a:prstDash val="dash"/>
+              <a:round/>
+            </a:ln>
+          </p:spPr>
+          <p:txBody>
+            <a:bodyPr/>
+            <a:lstStyle/>
+            <a:p/>
+          </p:txBody>
+        </p:sp>
+        <p:sp>
+          <p:nvSpPr>
+            <p:cNvPr id="79" name="tx79"/>
+            <p:cNvSpPr/>
+            <p:nvPr/>
+          </p:nvSpPr>
+          <p:spPr>
+            <a:xfrm>
+              <a:off x="762297" y="5553636"/>
+              <a:ext cx="62179" cy="80101"/>
+            </a:xfrm>
+            <a:prstGeom prst="rect">
+              <a:avLst/>
+            </a:prstGeom>
+            <a:noFill/>
+          </p:spPr>
+          <p:txBody>
+            <a:bodyPr lIns="0" rIns="0" tIns="0" bIns="0" anchorCtr="1" anchor="ctr" wrap="none"/>
+            <a:lstStyle/>
+            <a:p>
+              <a:pPr algn="l" marL="0" marR="0" indent="0">
+                <a:lnSpc>
+                  <a:spcPts val="880"/>
+                </a:lnSpc>
+                <a:spcBef>
+                  <a:spcPts val="0"/>
+                </a:spcBef>
+                <a:spcAft>
+                  <a:spcPts val="0"/>
+                </a:spcAft>
+              </a:pPr>
+              <a:r>
+                <a:rPr sz="880">
+                  <a:solidFill>
+                    <a:srgbClr val="4D4D4D">
+                      <a:alpha val="100000"/>
+                    </a:srgbClr>
+                  </a:solidFill>
+                  <a:latin typeface="Helvetica"/>
+                  <a:cs typeface="Helvetica"/>
+                </a:rPr>
+                <a:t>0</a:t>
+              </a:r>
+            </a:p>
+          </p:txBody>
+        </p:sp>
+        <p:sp>
+          <p:nvSpPr>
+            <p:cNvPr id="80" name="tx80"/>
+            <p:cNvSpPr/>
+            <p:nvPr/>
+          </p:nvSpPr>
+          <p:spPr>
+            <a:xfrm>
+              <a:off x="762297" y="5254302"/>
+              <a:ext cx="62179" cy="80101"/>
+            </a:xfrm>
+            <a:prstGeom prst="rect">
+              <a:avLst/>
+            </a:prstGeom>
+            <a:noFill/>
+          </p:spPr>
+          <p:txBody>
+            <a:bodyPr lIns="0" rIns="0" tIns="0" bIns="0" anchorCtr="1" anchor="ctr" wrap="none"/>
+            <a:lstStyle/>
+            <a:p>
+              <a:pPr algn="l" marL="0" marR="0" indent="0">
+                <a:lnSpc>
+                  <a:spcPts val="880"/>
+                </a:lnSpc>
+                <a:spcBef>
+                  <a:spcPts val="0"/>
+                </a:spcBef>
+                <a:spcAft>
+                  <a:spcPts val="0"/>
+                </a:spcAft>
+              </a:pPr>
+              <a:r>
+                <a:rPr sz="880">
+                  <a:solidFill>
+                    <a:srgbClr val="4D4D4D">
+                      <a:alpha val="100000"/>
+                    </a:srgbClr>
+                  </a:solidFill>
+                  <a:latin typeface="Helvetica"/>
+                  <a:cs typeface="Helvetica"/>
+                </a:rPr>
+                <a:t>1</a:t>
+              </a:r>
+            </a:p>
+          </p:txBody>
+        </p:sp>
+        <p:sp>
+          <p:nvSpPr>
+            <p:cNvPr id="81" name="tx81"/>
+            <p:cNvSpPr/>
+            <p:nvPr/>
+          </p:nvSpPr>
+          <p:spPr>
+            <a:xfrm>
+              <a:off x="762297" y="4954968"/>
+              <a:ext cx="62179" cy="80101"/>
+            </a:xfrm>
+            <a:prstGeom prst="rect">
+              <a:avLst/>
+            </a:prstGeom>
+            <a:noFill/>
+          </p:spPr>
+          <p:txBody>
+            <a:bodyPr lIns="0" rIns="0" tIns="0" bIns="0" anchorCtr="1" anchor="ctr" wrap="none"/>
+            <a:lstStyle/>
+            <a:p>
+              <a:pPr algn="l" marL="0" marR="0" indent="0">
+                <a:lnSpc>
+                  <a:spcPts val="880"/>
+                </a:lnSpc>
+                <a:spcBef>
+                  <a:spcPts val="0"/>
+                </a:spcBef>
+                <a:spcAft>
+                  <a:spcPts val="0"/>
+                </a:spcAft>
+              </a:pPr>
+              <a:r>
+                <a:rPr sz="880">
+                  <a:solidFill>
+                    <a:srgbClr val="4D4D4D">
+                      <a:alpha val="100000"/>
+                    </a:srgbClr>
+                  </a:solidFill>
+                  <a:latin typeface="Helvetica"/>
+                  <a:cs typeface="Helvetica"/>
+                </a:rPr>
+                <a:t>2</a:t>
+              </a:r>
+            </a:p>
+          </p:txBody>
+        </p:sp>
+        <p:sp>
+          <p:nvSpPr>
+            <p:cNvPr id="82" name="tx82"/>
+            <p:cNvSpPr/>
+            <p:nvPr/>
+          </p:nvSpPr>
+          <p:spPr>
+            <a:xfrm>
+              <a:off x="762297" y="4655634"/>
+              <a:ext cx="62179" cy="80101"/>
+            </a:xfrm>
+            <a:prstGeom prst="rect">
+              <a:avLst/>
+            </a:prstGeom>
+            <a:noFill/>
+          </p:spPr>
+          <p:txBody>
+            <a:bodyPr lIns="0" rIns="0" tIns="0" bIns="0" anchorCtr="1" anchor="ctr" wrap="none"/>
+            <a:lstStyle/>
+            <a:p>
+              <a:pPr algn="l" marL="0" marR="0" indent="0">
+                <a:lnSpc>
+                  <a:spcPts val="880"/>
+                </a:lnSpc>
+                <a:spcBef>
+                  <a:spcPts val="0"/>
+                </a:spcBef>
+                <a:spcAft>
+                  <a:spcPts val="0"/>
+                </a:spcAft>
+              </a:pPr>
+              <a:r>
+                <a:rPr sz="880">
+                  <a:solidFill>
+                    <a:srgbClr val="4D4D4D">
+                      <a:alpha val="100000"/>
+                    </a:srgbClr>
+                  </a:solidFill>
+                  <a:latin typeface="Helvetica"/>
+                  <a:cs typeface="Helvetica"/>
+                </a:rPr>
+                <a:t>3</a:t>
+              </a:r>
+            </a:p>
+          </p:txBody>
+        </p:sp>
+        <p:sp>
+          <p:nvSpPr>
+            <p:cNvPr id="83" name="tx83"/>
+            <p:cNvSpPr/>
+            <p:nvPr/>
+          </p:nvSpPr>
+          <p:spPr>
+            <a:xfrm>
+              <a:off x="762297" y="4356300"/>
+              <a:ext cx="62179" cy="80101"/>
+            </a:xfrm>
+            <a:prstGeom prst="rect">
+              <a:avLst/>
+            </a:prstGeom>
+            <a:noFill/>
+          </p:spPr>
+          <p:txBody>
+            <a:bodyPr lIns="0" rIns="0" tIns="0" bIns="0" anchorCtr="1" anchor="ctr" wrap="none"/>
+            <a:lstStyle/>
+            <a:p>
+              <a:pPr algn="l" marL="0" marR="0" indent="0">
+                <a:lnSpc>
+                  <a:spcPts val="880"/>
+                </a:lnSpc>
+                <a:spcBef>
+                  <a:spcPts val="0"/>
+                </a:spcBef>
+                <a:spcAft>
+                  <a:spcPts val="0"/>
+                </a:spcAft>
+              </a:pPr>
+              <a:r>
+                <a:rPr sz="880">
+                  <a:solidFill>
+                    <a:srgbClr val="4D4D4D">
+                      <a:alpha val="100000"/>
+                    </a:srgbClr>
+                  </a:solidFill>
+                  <a:latin typeface="Helvetica"/>
+                  <a:cs typeface="Helvetica"/>
+                </a:rPr>
+                <a:t>4</a:t>
+              </a:r>
+            </a:p>
+          </p:txBody>
+        </p:sp>
+        <p:sp>
+          <p:nvSpPr>
+            <p:cNvPr id="84" name="tx84"/>
+            <p:cNvSpPr/>
+            <p:nvPr/>
+          </p:nvSpPr>
+          <p:spPr>
+            <a:xfrm>
+              <a:off x="1324230" y="5716183"/>
+              <a:ext cx="161574" cy="80101"/>
+            </a:xfrm>
+            <a:prstGeom prst="rect">
+              <a:avLst/>
+            </a:prstGeom>
+            <a:noFill/>
+          </p:spPr>
+          <p:txBody>
+            <a:bodyPr lIns="0" rIns="0" tIns="0" bIns="0" anchorCtr="1" anchor="ctr" wrap="none"/>
+            <a:lstStyle/>
+            <a:p>
+              <a:pPr algn="l" marL="0" marR="0" indent="0">
+                <a:lnSpc>
+                  <a:spcPts val="880"/>
+                </a:lnSpc>
+                <a:spcBef>
+                  <a:spcPts val="0"/>
+                </a:spcBef>
+                <a:spcAft>
+                  <a:spcPts val="0"/>
+                </a:spcAft>
+              </a:pPr>
+              <a:r>
+                <a:rPr sz="880">
+                  <a:solidFill>
+                    <a:srgbClr val="4D4D4D">
+                      <a:alpha val="100000"/>
+                    </a:srgbClr>
+                  </a:solidFill>
+                  <a:latin typeface="Helvetica"/>
+                  <a:cs typeface="Helvetica"/>
+                </a:rPr>
+                <a:t>-50</a:t>
+              </a:r>
+            </a:p>
+          </p:txBody>
+        </p:sp>
+        <p:sp>
+          <p:nvSpPr>
+            <p:cNvPr id="85" name="tx85"/>
+            <p:cNvSpPr/>
+            <p:nvPr/>
+          </p:nvSpPr>
+          <p:spPr>
+            <a:xfrm>
+              <a:off x="2179256" y="5716183"/>
+              <a:ext cx="161574" cy="80101"/>
+            </a:xfrm>
+            <a:prstGeom prst="rect">
+              <a:avLst/>
+            </a:prstGeom>
+            <a:noFill/>
+          </p:spPr>
+          <p:txBody>
+            <a:bodyPr lIns="0" rIns="0" tIns="0" bIns="0" anchorCtr="1" anchor="ctr" wrap="none"/>
+            <a:lstStyle/>
+            <a:p>
+              <a:pPr algn="l" marL="0" marR="0" indent="0">
+                <a:lnSpc>
+                  <a:spcPts val="880"/>
+                </a:lnSpc>
+                <a:spcBef>
+                  <a:spcPts val="0"/>
+                </a:spcBef>
+                <a:spcAft>
+                  <a:spcPts val="0"/>
+                </a:spcAft>
+              </a:pPr>
+              <a:r>
+                <a:rPr sz="880">
+                  <a:solidFill>
+                    <a:srgbClr val="4D4D4D">
+                      <a:alpha val="100000"/>
+                    </a:srgbClr>
+                  </a:solidFill>
+                  <a:latin typeface="Helvetica"/>
+                  <a:cs typeface="Helvetica"/>
+                </a:rPr>
+                <a:t>-40</a:t>
+              </a:r>
+            </a:p>
+          </p:txBody>
+        </p:sp>
+        <p:sp>
+          <p:nvSpPr>
+            <p:cNvPr id="86" name="tx86"/>
+            <p:cNvSpPr/>
+            <p:nvPr/>
+          </p:nvSpPr>
+          <p:spPr>
+            <a:xfrm>
+              <a:off x="3034282" y="5716183"/>
+              <a:ext cx="161574" cy="80101"/>
+            </a:xfrm>
+            <a:prstGeom prst="rect">
+              <a:avLst/>
+            </a:prstGeom>
+            <a:noFill/>
+          </p:spPr>
+          <p:txBody>
+            <a:bodyPr lIns="0" rIns="0" tIns="0" bIns="0" anchorCtr="1" anchor="ctr" wrap="none"/>
+            <a:lstStyle/>
+            <a:p>
+              <a:pPr algn="l" marL="0" marR="0" indent="0">
+                <a:lnSpc>
+                  <a:spcPts val="880"/>
+                </a:lnSpc>
+                <a:spcBef>
+                  <a:spcPts val="0"/>
+                </a:spcBef>
+                <a:spcAft>
+                  <a:spcPts val="0"/>
+                </a:spcAft>
+              </a:pPr>
+              <a:r>
+                <a:rPr sz="880">
+                  <a:solidFill>
+                    <a:srgbClr val="4D4D4D">
+                      <a:alpha val="100000"/>
+                    </a:srgbClr>
+                  </a:solidFill>
+                  <a:latin typeface="Helvetica"/>
+                  <a:cs typeface="Helvetica"/>
+                </a:rPr>
+                <a:t>-30</a:t>
+              </a:r>
+            </a:p>
+          </p:txBody>
+        </p:sp>
+        <p:sp>
+          <p:nvSpPr>
+            <p:cNvPr id="87" name="tx87"/>
+            <p:cNvSpPr/>
+            <p:nvPr/>
+          </p:nvSpPr>
+          <p:spPr>
+            <a:xfrm>
+              <a:off x="3889308" y="5716183"/>
+              <a:ext cx="161574" cy="80101"/>
+            </a:xfrm>
+            <a:prstGeom prst="rect">
+              <a:avLst/>
+            </a:prstGeom>
+            <a:noFill/>
+          </p:spPr>
+          <p:txBody>
+            <a:bodyPr lIns="0" rIns="0" tIns="0" bIns="0" anchorCtr="1" anchor="ctr" wrap="none"/>
+            <a:lstStyle/>
+            <a:p>
+              <a:pPr algn="l" marL="0" marR="0" indent="0">
+                <a:lnSpc>
+                  <a:spcPts val="880"/>
+                </a:lnSpc>
+                <a:spcBef>
+                  <a:spcPts val="0"/>
+                </a:spcBef>
+                <a:spcAft>
+                  <a:spcPts val="0"/>
+                </a:spcAft>
+              </a:pPr>
+              <a:r>
+                <a:rPr sz="880">
+                  <a:solidFill>
+                    <a:srgbClr val="4D4D4D">
+                      <a:alpha val="100000"/>
+                    </a:srgbClr>
+                  </a:solidFill>
+                  <a:latin typeface="Helvetica"/>
+                  <a:cs typeface="Helvetica"/>
+                </a:rPr>
+                <a:t>-20</a:t>
+              </a:r>
+            </a:p>
+          </p:txBody>
+        </p:sp>
+        <p:sp>
+          <p:nvSpPr>
+            <p:cNvPr id="88" name="tx88"/>
+            <p:cNvSpPr/>
+            <p:nvPr/>
+          </p:nvSpPr>
+          <p:spPr>
+            <a:xfrm>
+              <a:off x="4744334" y="5716183"/>
+              <a:ext cx="161574" cy="80101"/>
+            </a:xfrm>
+            <a:prstGeom prst="rect">
+              <a:avLst/>
+            </a:prstGeom>
+            <a:noFill/>
+          </p:spPr>
+          <p:txBody>
+            <a:bodyPr lIns="0" rIns="0" tIns="0" bIns="0" anchorCtr="1" anchor="ctr" wrap="none"/>
+            <a:lstStyle/>
+            <a:p>
+              <a:pPr algn="l" marL="0" marR="0" indent="0">
+                <a:lnSpc>
+                  <a:spcPts val="880"/>
+                </a:lnSpc>
+                <a:spcBef>
+                  <a:spcPts val="0"/>
+                </a:spcBef>
+                <a:spcAft>
+                  <a:spcPts val="0"/>
+                </a:spcAft>
+              </a:pPr>
+              <a:r>
+                <a:rPr sz="880">
+                  <a:solidFill>
+                    <a:srgbClr val="4D4D4D">
+                      <a:alpha val="100000"/>
+                    </a:srgbClr>
+                  </a:solidFill>
+                  <a:latin typeface="Helvetica"/>
+                  <a:cs typeface="Helvetica"/>
+                </a:rPr>
+                <a:t>-10</a:t>
+              </a:r>
+            </a:p>
+          </p:txBody>
+        </p:sp>
+        <p:sp>
+          <p:nvSpPr>
+            <p:cNvPr id="89" name="tx89"/>
+            <p:cNvSpPr/>
+            <p:nvPr/>
+          </p:nvSpPr>
+          <p:spPr>
+            <a:xfrm>
+              <a:off x="5649057" y="5716183"/>
+              <a:ext cx="62179" cy="80101"/>
+            </a:xfrm>
+            <a:prstGeom prst="rect">
+              <a:avLst/>
+            </a:prstGeom>
+            <a:noFill/>
+          </p:spPr>
+          <p:txBody>
+            <a:bodyPr lIns="0" rIns="0" tIns="0" bIns="0" anchorCtr="1" anchor="ctr" wrap="none"/>
+            <a:lstStyle/>
+            <a:p>
+              <a:pPr algn="l" marL="0" marR="0" indent="0">
+                <a:lnSpc>
+                  <a:spcPts val="880"/>
+                </a:lnSpc>
+                <a:spcBef>
+                  <a:spcPts val="0"/>
+                </a:spcBef>
+                <a:spcAft>
+                  <a:spcPts val="0"/>
+                </a:spcAft>
+              </a:pPr>
+              <a:r>
+                <a:rPr sz="880">
+                  <a:solidFill>
+                    <a:srgbClr val="4D4D4D">
+                      <a:alpha val="100000"/>
+                    </a:srgbClr>
+                  </a:solidFill>
+                  <a:latin typeface="Helvetica"/>
+                  <a:cs typeface="Helvetica"/>
+                </a:rPr>
+                <a:t>0</a:t>
+              </a:r>
+            </a:p>
+          </p:txBody>
+        </p:sp>
+        <p:sp>
+          <p:nvSpPr>
+            <p:cNvPr id="90" name="tx90"/>
+            <p:cNvSpPr/>
+            <p:nvPr/>
+          </p:nvSpPr>
+          <p:spPr>
+            <a:xfrm>
+              <a:off x="6472994" y="5716183"/>
+              <a:ext cx="124358" cy="80101"/>
+            </a:xfrm>
+            <a:prstGeom prst="rect">
+              <a:avLst/>
+            </a:prstGeom>
+            <a:noFill/>
+          </p:spPr>
+          <p:txBody>
+            <a:bodyPr lIns="0" rIns="0" tIns="0" bIns="0" anchorCtr="1" anchor="ctr" wrap="none"/>
+            <a:lstStyle/>
+            <a:p>
+              <a:pPr algn="l" marL="0" marR="0" indent="0">
+                <a:lnSpc>
+                  <a:spcPts val="880"/>
+                </a:lnSpc>
+                <a:spcBef>
+                  <a:spcPts val="0"/>
+                </a:spcBef>
+                <a:spcAft>
+                  <a:spcPts val="0"/>
+                </a:spcAft>
+              </a:pPr>
+              <a:r>
+                <a:rPr sz="880">
+                  <a:solidFill>
+                    <a:srgbClr val="4D4D4D">
+                      <a:alpha val="100000"/>
+                    </a:srgbClr>
+                  </a:solidFill>
+                  <a:latin typeface="Helvetica"/>
+                  <a:cs typeface="Helvetica"/>
+                </a:rPr>
+                <a:t>10</a:t>
+              </a:r>
+            </a:p>
+          </p:txBody>
+        </p:sp>
+        <p:sp>
+          <p:nvSpPr>
+            <p:cNvPr id="91" name="tx91"/>
+            <p:cNvSpPr/>
+            <p:nvPr/>
+          </p:nvSpPr>
+          <p:spPr>
+            <a:xfrm>
+              <a:off x="7328020" y="5716183"/>
+              <a:ext cx="124358" cy="80101"/>
+            </a:xfrm>
+            <a:prstGeom prst="rect">
+              <a:avLst/>
+            </a:prstGeom>
+            <a:noFill/>
+          </p:spPr>
+          <p:txBody>
+            <a:bodyPr lIns="0" rIns="0" tIns="0" bIns="0" anchorCtr="1" anchor="ctr" wrap="none"/>
+            <a:lstStyle/>
+            <a:p>
+              <a:pPr algn="l" marL="0" marR="0" indent="0">
+                <a:lnSpc>
+                  <a:spcPts val="880"/>
+                </a:lnSpc>
+                <a:spcBef>
+                  <a:spcPts val="0"/>
+                </a:spcBef>
+                <a:spcAft>
+                  <a:spcPts val="0"/>
+                </a:spcAft>
+              </a:pPr>
+              <a:r>
+                <a:rPr sz="880">
+                  <a:solidFill>
+                    <a:srgbClr val="4D4D4D">
+                      <a:alpha val="100000"/>
+                    </a:srgbClr>
+                  </a:solidFill>
+                  <a:latin typeface="Helvetica"/>
+                  <a:cs typeface="Helvetica"/>
+                </a:rPr>
+                <a:t>20</a:t>
+              </a:r>
+            </a:p>
+          </p:txBody>
+        </p:sp>
+        <p:sp>
+          <p:nvSpPr>
+            <p:cNvPr id="92" name="tx92"/>
+            <p:cNvSpPr/>
+            <p:nvPr/>
+          </p:nvSpPr>
+          <p:spPr>
+            <a:xfrm>
+              <a:off x="8183046" y="5716183"/>
+              <a:ext cx="124358" cy="80101"/>
+            </a:xfrm>
+            <a:prstGeom prst="rect">
+              <a:avLst/>
+            </a:prstGeom>
+            <a:noFill/>
+          </p:spPr>
+          <p:txBody>
+            <a:bodyPr lIns="0" rIns="0" tIns="0" bIns="0" anchorCtr="1" anchor="ctr" wrap="none"/>
+            <a:lstStyle/>
+            <a:p>
+              <a:pPr algn="l" marL="0" marR="0" indent="0">
+                <a:lnSpc>
+                  <a:spcPts val="880"/>
+                </a:lnSpc>
+                <a:spcBef>
+                  <a:spcPts val="0"/>
+                </a:spcBef>
+                <a:spcAft>
+                  <a:spcPts val="0"/>
+                </a:spcAft>
+              </a:pPr>
+              <a:r>
+                <a:rPr sz="880">
+                  <a:solidFill>
+                    <a:srgbClr val="4D4D4D">
+                      <a:alpha val="100000"/>
+                    </a:srgbClr>
+                  </a:solidFill>
+                  <a:latin typeface="Helvetica"/>
+                  <a:cs typeface="Helvetica"/>
+                </a:rPr>
+                <a:t>30</a:t>
+              </a:r>
+            </a:p>
+          </p:txBody>
+        </p:sp>
+        <p:sp>
+          <p:nvSpPr>
+            <p:cNvPr id="93" name="tx93"/>
+            <p:cNvSpPr/>
+            <p:nvPr/>
+          </p:nvSpPr>
+          <p:spPr>
+            <a:xfrm>
+              <a:off x="1561815" y="5855859"/>
+              <a:ext cx="6311097" cy="100218"/>
+            </a:xfrm>
+            <a:prstGeom prst="rect">
+              <a:avLst/>
+            </a:prstGeom>
+            <a:noFill/>
+          </p:spPr>
+          <p:txBody>
+            <a:bodyPr lIns="0" rIns="0" tIns="0" bIns="0" anchorCtr="1" anchor="ctr" wrap="none"/>
+            <a:lstStyle/>
+            <a:p>
+              <a:pPr algn="l" marL="0" marR="0" indent="0">
+                <a:lnSpc>
+                  <a:spcPts val="1100"/>
+                </a:lnSpc>
+                <a:spcBef>
+                  <a:spcPts val="0"/>
+                </a:spcBef>
+                <a:spcAft>
+                  <a:spcPts val="0"/>
+                </a:spcAft>
+              </a:pPr>
+              <a:r>
+                <a:rPr sz="1100">
+                  <a:solidFill>
+                    <a:srgbClr val="000000">
+                      <a:alpha val="100000"/>
+                    </a:srgbClr>
+                  </a:solidFill>
+                  <a:latin typeface="Helvetica"/>
+                  <a:cs typeface="Helvetica"/>
+                </a:rPr>
+                <a:t>Sensitivity eGFR Difference (%): 100 × (CKD-EPI 2012 CysC − CKD-EPI 2021 Cr) / CKD-EPI 2021 Cr</a:t>
+              </a:r>
+            </a:p>
+          </p:txBody>
+        </p:sp>
+        <p:sp>
+          <p:nvSpPr>
+            <p:cNvPr id="94" name="tx94"/>
+            <p:cNvSpPr/>
+            <p:nvPr/>
+          </p:nvSpPr>
+          <p:spPr>
+            <a:xfrm rot="-5400000">
+              <a:off x="138035" y="4944909"/>
+              <a:ext cx="1016904" cy="100218"/>
+            </a:xfrm>
+            <a:prstGeom prst="rect">
+              <a:avLst/>
+            </a:prstGeom>
+            <a:noFill/>
+          </p:spPr>
+          <p:txBody>
+            <a:bodyPr lIns="0" rIns="0" tIns="0" bIns="0" anchorCtr="1" anchor="ctr" wrap="none"/>
+            <a:lstStyle/>
+            <a:p>
+              <a:pPr algn="l" marL="0" marR="0" indent="0">
+                <a:lnSpc>
+                  <a:spcPts val="1100"/>
+                </a:lnSpc>
+                <a:spcBef>
+                  <a:spcPts val="0"/>
+                </a:spcBef>
+                <a:spcAft>
+                  <a:spcPts val="0"/>
+                </a:spcAft>
+              </a:pPr>
+              <a:r>
+                <a:rPr sz="1100">
+                  <a:solidFill>
+                    <a:srgbClr val="000000">
+                      <a:alpha val="100000"/>
+                    </a:srgbClr>
+                  </a:solidFill>
+                  <a:latin typeface="Helvetica"/>
+                  <a:cs typeface="Helvetica"/>
+                </a:rPr>
+                <a:t>subHR (95% CI)</a:t>
+              </a:r>
+            </a:p>
+          </p:txBody>
+        </p:sp>
+        <p:sp>
+          <p:nvSpPr>
+            <p:cNvPr id="95" name="tx95"/>
+            <p:cNvSpPr/>
+            <p:nvPr/>
+          </p:nvSpPr>
+          <p:spPr>
+            <a:xfrm>
+              <a:off x="887106" y="4159544"/>
+              <a:ext cx="7026615" cy="82021"/>
+            </a:xfrm>
+            <a:prstGeom prst="rect">
+              <a:avLst/>
+            </a:prstGeom>
+            <a:noFill/>
+          </p:spPr>
+          <p:txBody>
+            <a:bodyPr lIns="0" rIns="0" tIns="0" bIns="0" anchorCtr="1" anchor="ctr" wrap="none"/>
+            <a:lstStyle/>
+            <a:p>
+              <a:pPr algn="l" marL="0" marR="0" indent="0">
+                <a:lnSpc>
+                  <a:spcPts val="900"/>
+                </a:lnSpc>
+                <a:spcBef>
+                  <a:spcPts val="0"/>
+                </a:spcBef>
+                <a:spcAft>
+                  <a:spcPts val="0"/>
+                </a:spcAft>
+              </a:pPr>
+              <a:r>
+                <a:rPr sz="900">
+                  <a:solidFill>
+                    <a:srgbClr val="404040">
+                      <a:alpha val="100000"/>
+                    </a:srgbClr>
+                  </a:solidFill>
+                  <a:latin typeface="Helvetica"/>
+                  <a:cs typeface="Helvetica"/>
+                </a:rPr>
+                <a:t>subHR per 10 % decline: 1.42 (1.19-1.69), p_Bonf = &lt;0.001 (n = 6)  |  per IQR decline (Δ = 28.1 %): 2.66 (1.62-4.36)  |  IQR: [-30.1, -2.1] %</a:t>
+              </a:r>
+            </a:p>
+          </p:txBody>
+        </p:sp>
+        <p:sp>
+          <p:nvSpPr>
+            <p:cNvPr id="96" name="tx96"/>
+            <p:cNvSpPr/>
+            <p:nvPr/>
+          </p:nvSpPr>
+          <p:spPr>
+            <a:xfrm>
+              <a:off x="887106" y="3932770"/>
               <a:ext cx="4346874" cy="120152"/>
             </a:xfrm>
             <a:prstGeom prst="rect">
